--- a/참고파일/강의 컨텐츠 관리 시스템_박수연_박희용_260807.pptx
+++ b/참고파일/강의 컨텐츠 관리 시스템_박수연_박희용_260807.pptx
@@ -23206,8 +23206,8 @@
         </p:nvSpPr>
         <p:spPr>
           <a:xfrm>
-            <a:off x="5060132" y="2138621"/>
-            <a:ext cx="1600200" cy="1133856"/>
+            <a:off x="5010461" y="2138621"/>
+            <a:ext cx="1649871" cy="1133856"/>
           </a:xfrm>
           <a:prstGeom prst="diamond">
             <a:avLst/>
@@ -24679,8 +24679,8 @@
         </p:nvSpPr>
         <p:spPr>
           <a:xfrm>
-            <a:off x="1691640" y="3639312"/>
-            <a:ext cx="4206240" cy="1005840"/>
+            <a:off x="1691640" y="3537168"/>
+            <a:ext cx="4206240" cy="1107984"/>
           </a:xfrm>
           <a:prstGeom prst="roundRect">
             <a:avLst>
@@ -24797,8 +24797,8 @@
         </p:nvSpPr>
         <p:spPr>
           <a:xfrm>
-            <a:off x="6172200" y="3639312"/>
-            <a:ext cx="4206240" cy="1005840"/>
+            <a:off x="6172200" y="3547872"/>
+            <a:ext cx="4206240" cy="1097280"/>
           </a:xfrm>
           <a:prstGeom prst="roundRect">
             <a:avLst>
@@ -29901,7 +29901,7 @@
                 <a:ea typeface="맑은 고딕"/>
                 <a:cs typeface="맑은 고딕"/>
               </a:rPr>
-              <a:t>기존 LMS와 별도로, 교육 콘텐츠의 안전한 공유와 생성형 AI 활용을 하나로 묶는 통합 플랫폼</a:t>
+              <a:t>교육 콘텐츠의 안전한 공유와 생성형 AI 활용을 하나로 묶는 통합 플랫폼</a:t>
             </a:r>
           </a:p>
         </p:txBody>
@@ -30980,7 +30980,7 @@
               <a:t>GAS </a:t>
             </a:r>
             <a:r>
-              <a:rPr sz="1600" b="0" i="0" dirty="0" err="1">
+              <a:rPr sz="1600" b="0" i="0" err="1">
                 <a:solidFill>
                   <a:srgbClr val="595959"/>
                 </a:solidFill>
@@ -30991,6 +30991,39 @@
               <a:t>프로젝트</a:t>
             </a:r>
             <a:r>
+              <a:rPr sz="1600" b="0" i="0">
+                <a:solidFill>
+                  <a:srgbClr val="595959"/>
+                </a:solidFill>
+                <a:latin typeface="맑은 고딕"/>
+                <a:ea typeface="맑은 고딕"/>
+                <a:cs typeface="맑은 고딕"/>
+              </a:rPr>
+              <a:t> </a:t>
+            </a:r>
+            <a:r>
+              <a:rPr lang="en-US" sz="1600" b="0" i="0">
+                <a:solidFill>
+                  <a:srgbClr val="595959"/>
+                </a:solidFill>
+                <a:latin typeface="맑은 고딕"/>
+                <a:ea typeface="맑은 고딕"/>
+                <a:cs typeface="맑은 고딕"/>
+              </a:rPr>
+              <a:t>3</a:t>
+            </a:r>
+            <a:r>
+              <a:rPr sz="1600" b="0" i="0">
+                <a:solidFill>
+                  <a:srgbClr val="595959"/>
+                </a:solidFill>
+                <a:latin typeface="맑은 고딕"/>
+                <a:ea typeface="맑은 고딕"/>
+                <a:cs typeface="맑은 고딕"/>
+              </a:rPr>
+              <a:t>개 </a:t>
+            </a:r>
+            <a:r>
               <a:rPr sz="1600" b="0" i="0" dirty="0">
                 <a:solidFill>
                   <a:srgbClr val="595959"/>
@@ -30999,7 +31032,7 @@
                 <a:ea typeface="맑은 고딕"/>
                 <a:cs typeface="맑은 고딕"/>
               </a:rPr>
-              <a:t> 4개 + AI </a:t>
+              <a:t>+ AI </a:t>
             </a:r>
             <a:r>
               <a:rPr sz="1600" b="0" i="0" dirty="0" err="1">
@@ -31194,7 +31227,29 @@
                 <a:ea typeface="맑은 고딕"/>
                 <a:cs typeface="맑은 고딕"/>
               </a:rPr>
-              <a:t>슬라이드 변환·웹게시·목차 추출·DB 기록을 담당하는 공용 "엔진" — 3개 시스템이 공유</a:t>
+              <a:t>슬라이드 변환·웹게시·목차 추출·DB 기록을 담당하는 공용 "엔진" </a:t>
+            </a:r>
+            <a:r>
+              <a:rPr lang="en-US">
+                <a:solidFill>
+                  <a:srgbClr val="333333"/>
+                </a:solidFill>
+                <a:latin typeface="맑은 고딕"/>
+                <a:ea typeface="맑은 고딕"/>
+                <a:cs typeface="맑은 고딕"/>
+              </a:rPr>
+              <a:t>- 2</a:t>
+            </a:r>
+            <a:r>
+              <a:rPr b="0" i="0">
+                <a:solidFill>
+                  <a:srgbClr val="333333"/>
+                </a:solidFill>
+                <a:latin typeface="맑은 고딕"/>
+                <a:ea typeface="맑은 고딕"/>
+                <a:cs typeface="맑은 고딕"/>
+              </a:rPr>
+              <a:t>개 시스템이 공유</a:t>
             </a:r>
           </a:p>
         </p:txBody>
@@ -31508,17 +31563,6 @@
                 <a:spcPts val="500"/>
               </a:spcAft>
             </a:pPr>
-            <a:r>
-              <a:rPr lang="en-US" sz="1600" b="1" i="0">
-                <a:solidFill>
-                  <a:srgbClr val="E97132"/>
-                </a:solidFill>
-                <a:latin typeface="맑은 고딕"/>
-                <a:ea typeface="맑은 고딕"/>
-                <a:cs typeface="맑은 고딕"/>
-              </a:rPr>
-              <a:t>Google </a:t>
-            </a:r>
             <a:r>
               <a:rPr sz="1600" b="1" i="0">
                 <a:solidFill>

--- a/참고파일/강의 컨텐츠 관리 시스템_박수연_박희용_260807.pptx
+++ b/참고파일/강의 컨텐츠 관리 시스템_박수연_박희용_260807.pptx
@@ -5,7 +5,7 @@
     <p:sldMasterId id="2147483657" r:id="rId1"/>
   </p:sldMasterIdLst>
   <p:notesMasterIdLst>
-    <p:notesMasterId r:id="rId29"/>
+    <p:notesMasterId r:id="rId30"/>
   </p:notesMasterIdLst>
   <p:sldIdLst>
     <p:sldId id="300" r:id="rId2"/>
@@ -33,26 +33,31 @@
     <p:sldId id="322" r:id="rId24"/>
     <p:sldId id="323" r:id="rId25"/>
     <p:sldId id="324" r:id="rId26"/>
-    <p:sldId id="325" r:id="rId27"/>
-    <p:sldId id="326" r:id="rId28"/>
+    <p:sldId id="256" r:id="rId27"/>
+    <p:sldId id="325" r:id="rId28"/>
+    <p:sldId id="326" r:id="rId29"/>
   </p:sldIdLst>
   <p:sldSz cx="12192000" cy="6858000"/>
   <p:notesSz cx="6858000" cy="9144000"/>
   <p:embeddedFontLst>
     <p:embeddedFont>
-      <p:font typeface="Microsoft GothicNeo" panose="020B0500000101010101" pitchFamily="50" charset="-127"/>
-      <p:regular r:id="rId30"/>
-      <p:bold r:id="rId31"/>
+      <p:font typeface="Microsoft GothicNeo Light" panose="020B0300000101010101" pitchFamily="50" charset="-127"/>
+      <p:regular r:id="rId31"/>
     </p:embeddedFont>
     <p:embeddedFont>
-      <p:font typeface="맑은 고딕" panose="020B0503020000020004" pitchFamily="50" charset="-127"/>
+      <p:font typeface="Microsoft GothicNeo" panose="020B0500000101010101" pitchFamily="50" charset="-127"/>
       <p:regular r:id="rId32"/>
       <p:bold r:id="rId33"/>
     </p:embeddedFont>
     <p:embeddedFont>
       <p:font typeface="맑은 고딕" panose="020B0503020000020004" pitchFamily="50" charset="-127"/>
-      <p:regular r:id="rId32"/>
-      <p:bold r:id="rId33"/>
+      <p:regular r:id="rId34"/>
+      <p:bold r:id="rId35"/>
+    </p:embeddedFont>
+    <p:embeddedFont>
+      <p:font typeface="맑은 고딕" panose="020B0503020000020004" pitchFamily="50" charset="-127"/>
+      <p:regular r:id="rId34"/>
+      <p:bold r:id="rId35"/>
     </p:embeddedFont>
   </p:embeddedFontLst>
   <p:defaultTextStyle>
@@ -1975,6 +1980,90 @@
 </file>
 
 <file path=ppt/notesSlides/notesSlide5.xml><?xml version="1.0" encoding="utf-8"?>
+<p:notes xmlns:a="http://schemas.openxmlformats.org/drawingml/2006/main" xmlns:r="http://schemas.openxmlformats.org/officeDocument/2006/relationships" xmlns:p="http://schemas.openxmlformats.org/presentationml/2006/main">
+  <p:cSld>
+    <p:spTree>
+      <p:nvGrpSpPr>
+        <p:cNvPr id="1" name=""/>
+        <p:cNvGrpSpPr/>
+        <p:nvPr/>
+      </p:nvGrpSpPr>
+      <p:grpSpPr>
+        <a:xfrm>
+          <a:off x="0" y="0"/>
+          <a:ext cx="0" cy="0"/>
+          <a:chOff x="0" y="0"/>
+          <a:chExt cx="0" cy="0"/>
+        </a:xfrm>
+      </p:grpSpPr>
+      <p:sp>
+        <p:nvSpPr>
+          <p:cNvPr id="2" name="Slide Image Placeholder 1"/>
+          <p:cNvSpPr>
+            <a:spLocks noGrp="1" noRot="1" noChangeAspect="1"/>
+          </p:cNvSpPr>
+          <p:nvPr>
+            <p:ph type="sldImg"/>
+          </p:nvPr>
+        </p:nvSpPr>
+        <p:spPr/>
+      </p:sp>
+      <p:sp>
+        <p:nvSpPr>
+          <p:cNvPr id="3" name="Notes Placeholder 2"/>
+          <p:cNvSpPr>
+            <a:spLocks noGrp="1"/>
+          </p:cNvSpPr>
+          <p:nvPr>
+            <p:ph type="body" idx="1"/>
+          </p:nvPr>
+        </p:nvSpPr>
+        <p:spPr/>
+        <p:txBody>
+          <a:bodyPr/>
+          <a:lstStyle/>
+          <a:p>
+            <a:endParaRPr lang="en-US" dirty="0"/>
+          </a:p>
+        </p:txBody>
+      </p:sp>
+      <p:sp>
+        <p:nvSpPr>
+          <p:cNvPr id="4" name="Slide Number Placeholder 3"/>
+          <p:cNvSpPr>
+            <a:spLocks noGrp="1"/>
+          </p:cNvSpPr>
+          <p:nvPr>
+            <p:ph type="sldNum" sz="quarter" idx="10"/>
+          </p:nvPr>
+        </p:nvSpPr>
+        <p:spPr/>
+        <p:txBody>
+          <a:bodyPr/>
+          <a:lstStyle/>
+          <a:p>
+            <a:fld id="{F7021451-1387-4CA6-816F-3879F97B5CBC}" type="slidenum">
+              <a:rPr lang="en-US"/>
+              <a:t>26</a:t>
+            </a:fld>
+            <a:endParaRPr lang="en-US"/>
+          </a:p>
+        </p:txBody>
+      </p:sp>
+    </p:spTree>
+    <p:extLst>
+      <p:ext uri="{BB962C8B-B14F-4D97-AF65-F5344CB8AC3E}">
+        <p14:creationId xmlns:p14="http://schemas.microsoft.com/office/powerpoint/2010/main" val="1024086991"/>
+      </p:ext>
+    </p:extLst>
+  </p:cSld>
+  <p:clrMapOvr>
+    <a:masterClrMapping/>
+  </p:clrMapOvr>
+</p:notes>
+</file>
+
+<file path=ppt/notesSlides/notesSlide6.xml><?xml version="1.0" encoding="utf-8"?>
 <p:notes xmlns:a="http://schemas.openxmlformats.org/drawingml/2006/main" xmlns:r="http://schemas.openxmlformats.org/officeDocument/2006/relationships" xmlns:p="http://schemas.openxmlformats.org/presentationml/2006/main" showMasterSp="0" showMasterPhAnim="0">
   <p:cSld>
     <p:spTree>
@@ -2235,7 +2324,7 @@
             </a:lvl9pPr>
           </a:lstStyle>
           <a:p>
-            <a:endParaRPr/>
+            <a:endParaRPr dirty="0"/>
           </a:p>
         </p:txBody>
       </p:sp>
@@ -2430,7 +2519,7 @@
             </a:lvl9pPr>
           </a:lstStyle>
           <a:p>
-            <a:endParaRPr/>
+            <a:endParaRPr dirty="0"/>
           </a:p>
         </p:txBody>
       </p:sp>
@@ -2880,6 +2969,41 @@
         </p:txBody>
       </p:sp>
     </p:spTree>
+  </p:cSld>
+  <p:clrMapOvr>
+    <a:masterClrMapping/>
+  </p:clrMapOvr>
+</p:sldLayout>
+</file>
+
+<file path=ppt/slideLayouts/slideLayout10.xml><?xml version="1.0" encoding="utf-8"?>
+<p:sldLayout xmlns:a="http://schemas.openxmlformats.org/drawingml/2006/main" xmlns:r="http://schemas.openxmlformats.org/officeDocument/2006/relationships" xmlns:p="http://schemas.openxmlformats.org/presentationml/2006/main">
+  <p:cSld name="DEFAULT">
+    <p:bg>
+      <p:bgRef idx="1001">
+        <a:schemeClr val="bg1"/>
+      </p:bgRef>
+    </p:bg>
+    <p:spTree>
+      <p:nvGrpSpPr>
+        <p:cNvPr id="1" name=""/>
+        <p:cNvGrpSpPr/>
+        <p:nvPr/>
+      </p:nvGrpSpPr>
+      <p:grpSpPr>
+        <a:xfrm>
+          <a:off x="0" y="0"/>
+          <a:ext cx="0" cy="0"/>
+          <a:chOff x="0" y="0"/>
+          <a:chExt cx="0" cy="0"/>
+        </a:xfrm>
+      </p:grpSpPr>
+    </p:spTree>
+    <p:extLst>
+      <p:ext uri="{BB962C8B-B14F-4D97-AF65-F5344CB8AC3E}">
+        <p14:creationId xmlns:p14="http://schemas.microsoft.com/office/powerpoint/2010/main" val="1484720616"/>
+      </p:ext>
+    </p:extLst>
   </p:cSld>
   <p:clrMapOvr>
     <a:masterClrMapping/>
@@ -3854,7 +3978,7 @@
             </a:lvl9pPr>
           </a:lstStyle>
           <a:p>
-            <a:endParaRPr/>
+            <a:endParaRPr dirty="0"/>
           </a:p>
         </p:txBody>
       </p:sp>
@@ -4080,7 +4204,7 @@
             </a:lvl9pPr>
           </a:lstStyle>
           <a:p>
-            <a:endParaRPr/>
+            <a:endParaRPr dirty="0"/>
           </a:p>
         </p:txBody>
       </p:sp>
@@ -4694,7 +4818,7 @@
             </a:lvl9pPr>
           </a:lstStyle>
           <a:p>
-            <a:endParaRPr/>
+            <a:endParaRPr dirty="0"/>
           </a:p>
         </p:txBody>
       </p:sp>
@@ -6774,7 +6898,7 @@
             </a:lvl9pPr>
           </a:lstStyle>
           <a:p>
-            <a:endParaRPr/>
+            <a:endParaRPr dirty="0"/>
           </a:p>
         </p:txBody>
       </p:sp>
@@ -8152,7 +8276,7 @@
             </a:lvl9pPr>
           </a:lstStyle>
           <a:p>
-            <a:endParaRPr/>
+            <a:endParaRPr dirty="0"/>
           </a:p>
         </p:txBody>
       </p:sp>
@@ -9994,7 +10118,7 @@
             </a:lvl9pPr>
           </a:lstStyle>
           <a:p>
-            <a:endParaRPr/>
+            <a:endParaRPr dirty="0"/>
           </a:p>
         </p:txBody>
       </p:sp>
@@ -10262,7 +10386,7 @@
             </a:lvl9pPr>
           </a:lstStyle>
           <a:p>
-            <a:endParaRPr/>
+            <a:endParaRPr dirty="0"/>
           </a:p>
         </p:txBody>
       </p:sp>
@@ -10857,7 +10981,7 @@
           <p:nvPr/>
         </p:nvPicPr>
         <p:blipFill rotWithShape="1">
-          <a:blip r:embed="rId11">
+          <a:blip r:embed="rId12">
             <a:alphaModFix/>
           </a:blip>
           <a:srcRect/>
@@ -10890,6 +11014,7 @@
     <p:sldLayoutId id="2147483654" r:id="rId7"/>
     <p:sldLayoutId id="2147483655" r:id="rId8"/>
     <p:sldLayoutId id="2147483656" r:id="rId9"/>
+    <p:sldLayoutId id="2147483658" r:id="rId10"/>
   </p:sldLayoutIdLst>
   <p:hf hdr="0" ftr="0" dt="0"/>
   <p:txStyles>
@@ -10923,9 +11048,9 @@
           <a:solidFill>
             <a:srgbClr val="000000"/>
           </a:solidFill>
-          <a:latin typeface="Microsoft GothicNeo" panose="020B0500000101010101" pitchFamily="50" charset="-127"/>
-          <a:ea typeface="Microsoft GothicNeo" panose="020B0500000101010101" pitchFamily="50" charset="-127"/>
-          <a:cs typeface="Microsoft GothicNeo" panose="020B0500000101010101" pitchFamily="50" charset="-127"/>
+          <a:latin typeface="Microsoft GothicNeo Light" panose="020B0300000101010101" pitchFamily="50" charset="-127"/>
+          <a:ea typeface="Microsoft GothicNeo Light" panose="020B0300000101010101" pitchFamily="50" charset="-127"/>
+          <a:cs typeface="Microsoft GothicNeo Light" panose="020B0300000101010101" pitchFamily="50" charset="-127"/>
           <a:sym typeface="Arial"/>
         </a:defRPr>
       </a:lvl1pPr>
@@ -24721,7 +24846,7 @@
               </a:spcAft>
             </a:pPr>
             <a:r>
-              <a:rPr b="1" i="0">
+              <a:rPr b="1" i="0" dirty="0">
                 <a:solidFill>
                   <a:srgbClr val="1F456E"/>
                 </a:solidFill>
@@ -24729,8 +24854,71 @@
                 <a:ea typeface="맑은 고딕"/>
                 <a:cs typeface="맑은 고딕"/>
               </a:rPr>
-              <a:t>(a) 검색 전용 호출</a:t>
-            </a:r>
+              <a:t>(a) </a:t>
+            </a:r>
+            <a:r>
+              <a:rPr b="1" i="0" dirty="0" err="1">
+                <a:solidFill>
+                  <a:srgbClr val="1F456E"/>
+                </a:solidFill>
+                <a:latin typeface="맑은 고딕"/>
+                <a:ea typeface="맑은 고딕"/>
+                <a:cs typeface="맑은 고딕"/>
+              </a:rPr>
+              <a:t>검색</a:t>
+            </a:r>
+            <a:r>
+              <a:rPr b="1" i="0" dirty="0">
+                <a:solidFill>
+                  <a:srgbClr val="1F456E"/>
+                </a:solidFill>
+                <a:latin typeface="맑은 고딕"/>
+                <a:ea typeface="맑은 고딕"/>
+                <a:cs typeface="맑은 고딕"/>
+              </a:rPr>
+              <a:t> </a:t>
+            </a:r>
+            <a:r>
+              <a:rPr b="1" i="0" dirty="0" err="1">
+                <a:solidFill>
+                  <a:srgbClr val="1F456E"/>
+                </a:solidFill>
+                <a:latin typeface="맑은 고딕"/>
+                <a:ea typeface="맑은 고딕"/>
+                <a:cs typeface="맑은 고딕"/>
+              </a:rPr>
+              <a:t>전용</a:t>
+            </a:r>
+            <a:r>
+              <a:rPr b="1" i="0" dirty="0">
+                <a:solidFill>
+                  <a:srgbClr val="1F456E"/>
+                </a:solidFill>
+                <a:latin typeface="맑은 고딕"/>
+                <a:ea typeface="맑은 고딕"/>
+                <a:cs typeface="맑은 고딕"/>
+              </a:rPr>
+              <a:t> </a:t>
+            </a:r>
+            <a:r>
+              <a:rPr b="1" i="0" dirty="0" err="1">
+                <a:solidFill>
+                  <a:srgbClr val="1F456E"/>
+                </a:solidFill>
+                <a:latin typeface="맑은 고딕"/>
+                <a:ea typeface="맑은 고딕"/>
+                <a:cs typeface="맑은 고딕"/>
+              </a:rPr>
+              <a:t>호출</a:t>
+            </a:r>
+            <a:endParaRPr b="1" i="0" dirty="0">
+              <a:solidFill>
+                <a:srgbClr val="1F456E"/>
+              </a:solidFill>
+              <a:latin typeface="맑은 고딕"/>
+              <a:ea typeface="맑은 고딕"/>
+              <a:cs typeface="맑은 고딕"/>
+            </a:endParaRPr>
           </a:p>
           <a:p>
             <a:pPr algn="l">
@@ -24739,15 +24927,268 @@
               </a:lnSpc>
             </a:pPr>
             <a:r>
-              <a:rPr b="0" i="0">
-                <a:solidFill>
-                  <a:srgbClr val="333333"/>
-                </a:solidFill>
-                <a:latin typeface="맑은 고딕"/>
-                <a:ea typeface="맑은 고딕"/>
-                <a:cs typeface="맑은 고딕"/>
-              </a:rPr>
-              <a:t>web_search_preview 도구 바인딩 · 언어/형식 지시 없음 · 25초 하드 타임아웃 · 429 시 3초 후 1회 재시도 · 특이사항 없으면 "NONE"→None</a:t>
+              <a:rPr b="0" i="0" dirty="0" err="1">
+                <a:solidFill>
+                  <a:srgbClr val="333333"/>
+                </a:solidFill>
+                <a:latin typeface="맑은 고딕"/>
+                <a:ea typeface="맑은 고딕"/>
+                <a:cs typeface="맑은 고딕"/>
+              </a:rPr>
+              <a:t>web_search_preview</a:t>
+            </a:r>
+            <a:r>
+              <a:rPr b="0" i="0" dirty="0">
+                <a:solidFill>
+                  <a:srgbClr val="333333"/>
+                </a:solidFill>
+                <a:latin typeface="맑은 고딕"/>
+                <a:ea typeface="맑은 고딕"/>
+                <a:cs typeface="맑은 고딕"/>
+              </a:rPr>
+              <a:t> </a:t>
+            </a:r>
+            <a:r>
+              <a:rPr b="0" i="0" dirty="0" err="1">
+                <a:solidFill>
+                  <a:srgbClr val="333333"/>
+                </a:solidFill>
+                <a:latin typeface="맑은 고딕"/>
+                <a:ea typeface="맑은 고딕"/>
+                <a:cs typeface="맑은 고딕"/>
+              </a:rPr>
+              <a:t>도구</a:t>
+            </a:r>
+            <a:r>
+              <a:rPr b="0" i="0" dirty="0">
+                <a:solidFill>
+                  <a:srgbClr val="333333"/>
+                </a:solidFill>
+                <a:latin typeface="맑은 고딕"/>
+                <a:ea typeface="맑은 고딕"/>
+                <a:cs typeface="맑은 고딕"/>
+              </a:rPr>
+              <a:t> </a:t>
+            </a:r>
+            <a:r>
+              <a:rPr b="0" i="0" dirty="0" err="1">
+                <a:solidFill>
+                  <a:srgbClr val="333333"/>
+                </a:solidFill>
+                <a:latin typeface="맑은 고딕"/>
+                <a:ea typeface="맑은 고딕"/>
+                <a:cs typeface="맑은 고딕"/>
+              </a:rPr>
+              <a:t>바인딩</a:t>
+            </a:r>
+            <a:r>
+              <a:rPr b="0" i="0" dirty="0">
+                <a:solidFill>
+                  <a:srgbClr val="333333"/>
+                </a:solidFill>
+                <a:latin typeface="맑은 고딕"/>
+                <a:ea typeface="맑은 고딕"/>
+                <a:cs typeface="맑은 고딕"/>
+              </a:rPr>
+              <a:t> · </a:t>
+            </a:r>
+            <a:r>
+              <a:rPr b="0" i="0" dirty="0" err="1">
+                <a:solidFill>
+                  <a:srgbClr val="333333"/>
+                </a:solidFill>
+                <a:latin typeface="맑은 고딕"/>
+                <a:ea typeface="맑은 고딕"/>
+                <a:cs typeface="맑은 고딕"/>
+              </a:rPr>
+              <a:t>언어</a:t>
+            </a:r>
+            <a:r>
+              <a:rPr b="0" i="0" dirty="0">
+                <a:solidFill>
+                  <a:srgbClr val="333333"/>
+                </a:solidFill>
+                <a:latin typeface="맑은 고딕"/>
+                <a:ea typeface="맑은 고딕"/>
+                <a:cs typeface="맑은 고딕"/>
+              </a:rPr>
+              <a:t>/</a:t>
+            </a:r>
+            <a:r>
+              <a:rPr b="0" i="0" dirty="0" err="1">
+                <a:solidFill>
+                  <a:srgbClr val="333333"/>
+                </a:solidFill>
+                <a:latin typeface="맑은 고딕"/>
+                <a:ea typeface="맑은 고딕"/>
+                <a:cs typeface="맑은 고딕"/>
+              </a:rPr>
+              <a:t>형식</a:t>
+            </a:r>
+            <a:r>
+              <a:rPr b="0" i="0" dirty="0">
+                <a:solidFill>
+                  <a:srgbClr val="333333"/>
+                </a:solidFill>
+                <a:latin typeface="맑은 고딕"/>
+                <a:ea typeface="맑은 고딕"/>
+                <a:cs typeface="맑은 고딕"/>
+              </a:rPr>
+              <a:t> </a:t>
+            </a:r>
+            <a:r>
+              <a:rPr b="0" i="0" dirty="0" err="1">
+                <a:solidFill>
+                  <a:srgbClr val="333333"/>
+                </a:solidFill>
+                <a:latin typeface="맑은 고딕"/>
+                <a:ea typeface="맑은 고딕"/>
+                <a:cs typeface="맑은 고딕"/>
+              </a:rPr>
+              <a:t>지시</a:t>
+            </a:r>
+            <a:r>
+              <a:rPr b="0" i="0" dirty="0">
+                <a:solidFill>
+                  <a:srgbClr val="333333"/>
+                </a:solidFill>
+                <a:latin typeface="맑은 고딕"/>
+                <a:ea typeface="맑은 고딕"/>
+                <a:cs typeface="맑은 고딕"/>
+              </a:rPr>
+              <a:t> </a:t>
+            </a:r>
+            <a:r>
+              <a:rPr b="0" i="0" dirty="0" err="1">
+                <a:solidFill>
+                  <a:srgbClr val="333333"/>
+                </a:solidFill>
+                <a:latin typeface="맑은 고딕"/>
+                <a:ea typeface="맑은 고딕"/>
+                <a:cs typeface="맑은 고딕"/>
+              </a:rPr>
+              <a:t>없음</a:t>
+            </a:r>
+            <a:r>
+              <a:rPr b="0" i="0" dirty="0">
+                <a:solidFill>
+                  <a:srgbClr val="333333"/>
+                </a:solidFill>
+                <a:latin typeface="맑은 고딕"/>
+                <a:ea typeface="맑은 고딕"/>
+                <a:cs typeface="맑은 고딕"/>
+              </a:rPr>
+              <a:t> · 25초 </a:t>
+            </a:r>
+            <a:r>
+              <a:rPr b="0" i="0" dirty="0" err="1">
+                <a:solidFill>
+                  <a:srgbClr val="333333"/>
+                </a:solidFill>
+                <a:latin typeface="맑은 고딕"/>
+                <a:ea typeface="맑은 고딕"/>
+                <a:cs typeface="맑은 고딕"/>
+              </a:rPr>
+              <a:t>하드</a:t>
+            </a:r>
+            <a:r>
+              <a:rPr b="0" i="0" dirty="0">
+                <a:solidFill>
+                  <a:srgbClr val="333333"/>
+                </a:solidFill>
+                <a:latin typeface="맑은 고딕"/>
+                <a:ea typeface="맑은 고딕"/>
+                <a:cs typeface="맑은 고딕"/>
+              </a:rPr>
+              <a:t> </a:t>
+            </a:r>
+            <a:r>
+              <a:rPr b="0" i="0" dirty="0" err="1">
+                <a:solidFill>
+                  <a:srgbClr val="333333"/>
+                </a:solidFill>
+                <a:latin typeface="맑은 고딕"/>
+                <a:ea typeface="맑은 고딕"/>
+                <a:cs typeface="맑은 고딕"/>
+              </a:rPr>
+              <a:t>타임아웃</a:t>
+            </a:r>
+            <a:r>
+              <a:rPr b="0" i="0" dirty="0">
+                <a:solidFill>
+                  <a:srgbClr val="333333"/>
+                </a:solidFill>
+                <a:latin typeface="맑은 고딕"/>
+                <a:ea typeface="맑은 고딕"/>
+                <a:cs typeface="맑은 고딕"/>
+              </a:rPr>
+              <a:t> · 3초 후 1회 </a:t>
+            </a:r>
+            <a:r>
+              <a:rPr b="0" i="0" dirty="0" err="1">
+                <a:solidFill>
+                  <a:srgbClr val="333333"/>
+                </a:solidFill>
+                <a:latin typeface="맑은 고딕"/>
+                <a:ea typeface="맑은 고딕"/>
+                <a:cs typeface="맑은 고딕"/>
+              </a:rPr>
+              <a:t>재시도</a:t>
+            </a:r>
+            <a:r>
+              <a:rPr b="0" i="0" dirty="0">
+                <a:solidFill>
+                  <a:srgbClr val="333333"/>
+                </a:solidFill>
+                <a:latin typeface="맑은 고딕"/>
+                <a:ea typeface="맑은 고딕"/>
+                <a:cs typeface="맑은 고딕"/>
+              </a:rPr>
+              <a:t> · </a:t>
+            </a:r>
+            <a:r>
+              <a:rPr b="0" i="0" dirty="0" err="1">
+                <a:solidFill>
+                  <a:srgbClr val="333333"/>
+                </a:solidFill>
+                <a:latin typeface="맑은 고딕"/>
+                <a:ea typeface="맑은 고딕"/>
+                <a:cs typeface="맑은 고딕"/>
+              </a:rPr>
+              <a:t>특이사항</a:t>
+            </a:r>
+            <a:r>
+              <a:rPr b="0" i="0" dirty="0">
+                <a:solidFill>
+                  <a:srgbClr val="333333"/>
+                </a:solidFill>
+                <a:latin typeface="맑은 고딕"/>
+                <a:ea typeface="맑은 고딕"/>
+                <a:cs typeface="맑은 고딕"/>
+              </a:rPr>
+              <a:t> </a:t>
+            </a:r>
+            <a:r>
+              <a:rPr b="0" i="0" dirty="0" err="1">
+                <a:solidFill>
+                  <a:srgbClr val="333333"/>
+                </a:solidFill>
+                <a:latin typeface="맑은 고딕"/>
+                <a:ea typeface="맑은 고딕"/>
+                <a:cs typeface="맑은 고딕"/>
+              </a:rPr>
+              <a:t>없으면</a:t>
+            </a:r>
+            <a:r>
+              <a:rPr b="0" i="0" dirty="0">
+                <a:solidFill>
+                  <a:srgbClr val="333333"/>
+                </a:solidFill>
+                <a:latin typeface="맑은 고딕"/>
+                <a:ea typeface="맑은 고딕"/>
+                <a:cs typeface="맑은 고딕"/>
+              </a:rPr>
+              <a:t> "NONE"</a:t>
             </a:r>
           </a:p>
         </p:txBody>
@@ -24839,7 +25280,7 @@
               </a:spcAft>
             </a:pPr>
             <a:r>
-              <a:rPr b="1" i="0">
+              <a:rPr b="1" i="0" dirty="0">
                 <a:solidFill>
                   <a:srgbClr val="1F456E"/>
                 </a:solidFill>
@@ -24847,8 +25288,71 @@
                 <a:ea typeface="맑은 고딕"/>
                 <a:cs typeface="맑은 고딕"/>
               </a:rPr>
-              <a:t>(b) 재작성 전용 호출</a:t>
-            </a:r>
+              <a:t>(b) </a:t>
+            </a:r>
+            <a:r>
+              <a:rPr b="1" i="0" dirty="0" err="1">
+                <a:solidFill>
+                  <a:srgbClr val="1F456E"/>
+                </a:solidFill>
+                <a:latin typeface="맑은 고딕"/>
+                <a:ea typeface="맑은 고딕"/>
+                <a:cs typeface="맑은 고딕"/>
+              </a:rPr>
+              <a:t>재작성</a:t>
+            </a:r>
+            <a:r>
+              <a:rPr b="1" i="0" dirty="0">
+                <a:solidFill>
+                  <a:srgbClr val="1F456E"/>
+                </a:solidFill>
+                <a:latin typeface="맑은 고딕"/>
+                <a:ea typeface="맑은 고딕"/>
+                <a:cs typeface="맑은 고딕"/>
+              </a:rPr>
+              <a:t> </a:t>
+            </a:r>
+            <a:r>
+              <a:rPr b="1" i="0" dirty="0" err="1">
+                <a:solidFill>
+                  <a:srgbClr val="1F456E"/>
+                </a:solidFill>
+                <a:latin typeface="맑은 고딕"/>
+                <a:ea typeface="맑은 고딕"/>
+                <a:cs typeface="맑은 고딕"/>
+              </a:rPr>
+              <a:t>전용</a:t>
+            </a:r>
+            <a:r>
+              <a:rPr b="1" i="0" dirty="0">
+                <a:solidFill>
+                  <a:srgbClr val="1F456E"/>
+                </a:solidFill>
+                <a:latin typeface="맑은 고딕"/>
+                <a:ea typeface="맑은 고딕"/>
+                <a:cs typeface="맑은 고딕"/>
+              </a:rPr>
+              <a:t> </a:t>
+            </a:r>
+            <a:r>
+              <a:rPr b="1" i="0" dirty="0" err="1">
+                <a:solidFill>
+                  <a:srgbClr val="1F456E"/>
+                </a:solidFill>
+                <a:latin typeface="맑은 고딕"/>
+                <a:ea typeface="맑은 고딕"/>
+                <a:cs typeface="맑은 고딕"/>
+              </a:rPr>
+              <a:t>호출</a:t>
+            </a:r>
+            <a:endParaRPr b="1" i="0" dirty="0">
+              <a:solidFill>
+                <a:srgbClr val="1F456E"/>
+              </a:solidFill>
+              <a:latin typeface="맑은 고딕"/>
+              <a:ea typeface="맑은 고딕"/>
+              <a:cs typeface="맑은 고딕"/>
+            </a:endParaRPr>
           </a:p>
           <a:p>
             <a:pPr algn="l">
@@ -24857,15 +25361,400 @@
               </a:lnSpc>
             </a:pPr>
             <a:r>
-              <a:rPr b="0" i="0">
-                <a:solidFill>
-                  <a:srgbClr val="333333"/>
-                </a:solidFill>
-                <a:latin typeface="맑은 고딕"/>
-                <a:ea typeface="맑은 고딕"/>
-                <a:cs typeface="맑은 고딕"/>
-              </a:rPr>
-              <a:t>검색 도구 없는 순수 지시-따르기 호출 — 원시 조사 결과를 한국어 요약 의견으로 재작성 · 마크다운 링크는 정규식으로 한 번 더 제거(안전망)</a:t>
+              <a:rPr b="0" i="0" dirty="0" err="1">
+                <a:solidFill>
+                  <a:srgbClr val="333333"/>
+                </a:solidFill>
+                <a:latin typeface="맑은 고딕"/>
+                <a:ea typeface="맑은 고딕"/>
+                <a:cs typeface="맑은 고딕"/>
+              </a:rPr>
+              <a:t>검색</a:t>
+            </a:r>
+            <a:r>
+              <a:rPr b="0" i="0" dirty="0">
+                <a:solidFill>
+                  <a:srgbClr val="333333"/>
+                </a:solidFill>
+                <a:latin typeface="맑은 고딕"/>
+                <a:ea typeface="맑은 고딕"/>
+                <a:cs typeface="맑은 고딕"/>
+              </a:rPr>
+              <a:t> </a:t>
+            </a:r>
+            <a:r>
+              <a:rPr b="0" i="0" dirty="0" err="1">
+                <a:solidFill>
+                  <a:srgbClr val="333333"/>
+                </a:solidFill>
+                <a:latin typeface="맑은 고딕"/>
+                <a:ea typeface="맑은 고딕"/>
+                <a:cs typeface="맑은 고딕"/>
+              </a:rPr>
+              <a:t>도구</a:t>
+            </a:r>
+            <a:r>
+              <a:rPr b="0" i="0" dirty="0">
+                <a:solidFill>
+                  <a:srgbClr val="333333"/>
+                </a:solidFill>
+                <a:latin typeface="맑은 고딕"/>
+                <a:ea typeface="맑은 고딕"/>
+                <a:cs typeface="맑은 고딕"/>
+              </a:rPr>
+              <a:t> </a:t>
+            </a:r>
+            <a:r>
+              <a:rPr b="0" i="0" dirty="0" err="1">
+                <a:solidFill>
+                  <a:srgbClr val="333333"/>
+                </a:solidFill>
+                <a:latin typeface="맑은 고딕"/>
+                <a:ea typeface="맑은 고딕"/>
+                <a:cs typeface="맑은 고딕"/>
+              </a:rPr>
+              <a:t>없는</a:t>
+            </a:r>
+            <a:r>
+              <a:rPr b="0" i="0" dirty="0">
+                <a:solidFill>
+                  <a:srgbClr val="333333"/>
+                </a:solidFill>
+                <a:latin typeface="맑은 고딕"/>
+                <a:ea typeface="맑은 고딕"/>
+                <a:cs typeface="맑은 고딕"/>
+              </a:rPr>
+              <a:t> </a:t>
+            </a:r>
+            <a:r>
+              <a:rPr b="0" i="0" dirty="0" err="1">
+                <a:solidFill>
+                  <a:srgbClr val="333333"/>
+                </a:solidFill>
+                <a:latin typeface="맑은 고딕"/>
+                <a:ea typeface="맑은 고딕"/>
+                <a:cs typeface="맑은 고딕"/>
+              </a:rPr>
+              <a:t>순수</a:t>
+            </a:r>
+            <a:r>
+              <a:rPr b="0" i="0" dirty="0">
+                <a:solidFill>
+                  <a:srgbClr val="333333"/>
+                </a:solidFill>
+                <a:latin typeface="맑은 고딕"/>
+                <a:ea typeface="맑은 고딕"/>
+                <a:cs typeface="맑은 고딕"/>
+              </a:rPr>
+              <a:t> </a:t>
+            </a:r>
+            <a:r>
+              <a:rPr b="0" i="0" dirty="0" err="1">
+                <a:solidFill>
+                  <a:srgbClr val="333333"/>
+                </a:solidFill>
+                <a:latin typeface="맑은 고딕"/>
+                <a:ea typeface="맑은 고딕"/>
+                <a:cs typeface="맑은 고딕"/>
+              </a:rPr>
+              <a:t>지시-따르기</a:t>
+            </a:r>
+            <a:r>
+              <a:rPr b="0" i="0" dirty="0">
+                <a:solidFill>
+                  <a:srgbClr val="333333"/>
+                </a:solidFill>
+                <a:latin typeface="맑은 고딕"/>
+                <a:ea typeface="맑은 고딕"/>
+                <a:cs typeface="맑은 고딕"/>
+              </a:rPr>
+              <a:t> </a:t>
+            </a:r>
+            <a:r>
+              <a:rPr b="0" i="0" dirty="0" err="1">
+                <a:solidFill>
+                  <a:srgbClr val="333333"/>
+                </a:solidFill>
+                <a:latin typeface="맑은 고딕"/>
+                <a:ea typeface="맑은 고딕"/>
+                <a:cs typeface="맑은 고딕"/>
+              </a:rPr>
+              <a:t>호출</a:t>
+            </a:r>
+            <a:r>
+              <a:rPr b="0" i="0" dirty="0">
+                <a:solidFill>
+                  <a:srgbClr val="333333"/>
+                </a:solidFill>
+                <a:latin typeface="맑은 고딕"/>
+                <a:ea typeface="맑은 고딕"/>
+                <a:cs typeface="맑은 고딕"/>
+              </a:rPr>
+              <a:t> — </a:t>
+            </a:r>
+            <a:r>
+              <a:rPr b="0" i="0" dirty="0" err="1">
+                <a:solidFill>
+                  <a:srgbClr val="333333"/>
+                </a:solidFill>
+                <a:latin typeface="맑은 고딕"/>
+                <a:ea typeface="맑은 고딕"/>
+                <a:cs typeface="맑은 고딕"/>
+              </a:rPr>
+              <a:t>원시</a:t>
+            </a:r>
+            <a:r>
+              <a:rPr b="0" i="0" dirty="0">
+                <a:solidFill>
+                  <a:srgbClr val="333333"/>
+                </a:solidFill>
+                <a:latin typeface="맑은 고딕"/>
+                <a:ea typeface="맑은 고딕"/>
+                <a:cs typeface="맑은 고딕"/>
+              </a:rPr>
+              <a:t> </a:t>
+            </a:r>
+            <a:r>
+              <a:rPr b="0" i="0" dirty="0" err="1">
+                <a:solidFill>
+                  <a:srgbClr val="333333"/>
+                </a:solidFill>
+                <a:latin typeface="맑은 고딕"/>
+                <a:ea typeface="맑은 고딕"/>
+                <a:cs typeface="맑은 고딕"/>
+              </a:rPr>
+              <a:t>조사</a:t>
+            </a:r>
+            <a:r>
+              <a:rPr b="0" i="0" dirty="0">
+                <a:solidFill>
+                  <a:srgbClr val="333333"/>
+                </a:solidFill>
+                <a:latin typeface="맑은 고딕"/>
+                <a:ea typeface="맑은 고딕"/>
+                <a:cs typeface="맑은 고딕"/>
+              </a:rPr>
+              <a:t> </a:t>
+            </a:r>
+            <a:r>
+              <a:rPr b="0" i="0" dirty="0" err="1">
+                <a:solidFill>
+                  <a:srgbClr val="333333"/>
+                </a:solidFill>
+                <a:latin typeface="맑은 고딕"/>
+                <a:ea typeface="맑은 고딕"/>
+                <a:cs typeface="맑은 고딕"/>
+              </a:rPr>
+              <a:t>결과를</a:t>
+            </a:r>
+            <a:r>
+              <a:rPr b="0" i="0" dirty="0">
+                <a:solidFill>
+                  <a:srgbClr val="333333"/>
+                </a:solidFill>
+                <a:latin typeface="맑은 고딕"/>
+                <a:ea typeface="맑은 고딕"/>
+                <a:cs typeface="맑은 고딕"/>
+              </a:rPr>
+              <a:t> </a:t>
+            </a:r>
+            <a:r>
+              <a:rPr b="0" i="0" dirty="0" err="1">
+                <a:solidFill>
+                  <a:srgbClr val="333333"/>
+                </a:solidFill>
+                <a:latin typeface="맑은 고딕"/>
+                <a:ea typeface="맑은 고딕"/>
+                <a:cs typeface="맑은 고딕"/>
+              </a:rPr>
+              <a:t>한국어</a:t>
+            </a:r>
+            <a:r>
+              <a:rPr b="0" i="0" dirty="0">
+                <a:solidFill>
+                  <a:srgbClr val="333333"/>
+                </a:solidFill>
+                <a:latin typeface="맑은 고딕"/>
+                <a:ea typeface="맑은 고딕"/>
+                <a:cs typeface="맑은 고딕"/>
+              </a:rPr>
+              <a:t> </a:t>
+            </a:r>
+            <a:r>
+              <a:rPr b="0" i="0" dirty="0" err="1">
+                <a:solidFill>
+                  <a:srgbClr val="333333"/>
+                </a:solidFill>
+                <a:latin typeface="맑은 고딕"/>
+                <a:ea typeface="맑은 고딕"/>
+                <a:cs typeface="맑은 고딕"/>
+              </a:rPr>
+              <a:t>요약</a:t>
+            </a:r>
+            <a:r>
+              <a:rPr b="0" i="0" dirty="0">
+                <a:solidFill>
+                  <a:srgbClr val="333333"/>
+                </a:solidFill>
+                <a:latin typeface="맑은 고딕"/>
+                <a:ea typeface="맑은 고딕"/>
+                <a:cs typeface="맑은 고딕"/>
+              </a:rPr>
+              <a:t> </a:t>
+            </a:r>
+            <a:r>
+              <a:rPr b="0" i="0" dirty="0" err="1">
+                <a:solidFill>
+                  <a:srgbClr val="333333"/>
+                </a:solidFill>
+                <a:latin typeface="맑은 고딕"/>
+                <a:ea typeface="맑은 고딕"/>
+                <a:cs typeface="맑은 고딕"/>
+              </a:rPr>
+              <a:t>의견으로</a:t>
+            </a:r>
+            <a:r>
+              <a:rPr b="0" i="0" dirty="0">
+                <a:solidFill>
+                  <a:srgbClr val="333333"/>
+                </a:solidFill>
+                <a:latin typeface="맑은 고딕"/>
+                <a:ea typeface="맑은 고딕"/>
+                <a:cs typeface="맑은 고딕"/>
+              </a:rPr>
+              <a:t> </a:t>
+            </a:r>
+            <a:r>
+              <a:rPr b="0" i="0" dirty="0" err="1">
+                <a:solidFill>
+                  <a:srgbClr val="333333"/>
+                </a:solidFill>
+                <a:latin typeface="맑은 고딕"/>
+                <a:ea typeface="맑은 고딕"/>
+                <a:cs typeface="맑은 고딕"/>
+              </a:rPr>
+              <a:t>재작성</a:t>
+            </a:r>
+            <a:r>
+              <a:rPr b="0" i="0" dirty="0">
+                <a:solidFill>
+                  <a:srgbClr val="333333"/>
+                </a:solidFill>
+                <a:latin typeface="맑은 고딕"/>
+                <a:ea typeface="맑은 고딕"/>
+                <a:cs typeface="맑은 고딕"/>
+              </a:rPr>
+              <a:t> · </a:t>
+            </a:r>
+            <a:r>
+              <a:rPr b="0" i="0" dirty="0" err="1">
+                <a:solidFill>
+                  <a:srgbClr val="333333"/>
+                </a:solidFill>
+                <a:latin typeface="맑은 고딕"/>
+                <a:ea typeface="맑은 고딕"/>
+                <a:cs typeface="맑은 고딕"/>
+              </a:rPr>
+              <a:t>마크다운</a:t>
+            </a:r>
+            <a:r>
+              <a:rPr b="0" i="0" dirty="0">
+                <a:solidFill>
+                  <a:srgbClr val="333333"/>
+                </a:solidFill>
+                <a:latin typeface="맑은 고딕"/>
+                <a:ea typeface="맑은 고딕"/>
+                <a:cs typeface="맑은 고딕"/>
+              </a:rPr>
+              <a:t> </a:t>
+            </a:r>
+            <a:r>
+              <a:rPr b="0" i="0" dirty="0" err="1">
+                <a:solidFill>
+                  <a:srgbClr val="333333"/>
+                </a:solidFill>
+                <a:latin typeface="맑은 고딕"/>
+                <a:ea typeface="맑은 고딕"/>
+                <a:cs typeface="맑은 고딕"/>
+              </a:rPr>
+              <a:t>링크는</a:t>
+            </a:r>
+            <a:r>
+              <a:rPr b="0" i="0" dirty="0">
+                <a:solidFill>
+                  <a:srgbClr val="333333"/>
+                </a:solidFill>
+                <a:latin typeface="맑은 고딕"/>
+                <a:ea typeface="맑은 고딕"/>
+                <a:cs typeface="맑은 고딕"/>
+              </a:rPr>
+              <a:t> </a:t>
+            </a:r>
+            <a:r>
+              <a:rPr b="0" i="0" dirty="0" err="1">
+                <a:solidFill>
+                  <a:srgbClr val="333333"/>
+                </a:solidFill>
+                <a:latin typeface="맑은 고딕"/>
+                <a:ea typeface="맑은 고딕"/>
+                <a:cs typeface="맑은 고딕"/>
+              </a:rPr>
+              <a:t>정규식으로</a:t>
+            </a:r>
+            <a:r>
+              <a:rPr b="0" i="0" dirty="0">
+                <a:solidFill>
+                  <a:srgbClr val="333333"/>
+                </a:solidFill>
+                <a:latin typeface="맑은 고딕"/>
+                <a:ea typeface="맑은 고딕"/>
+                <a:cs typeface="맑은 고딕"/>
+              </a:rPr>
+              <a:t> 한 번 더 </a:t>
+            </a:r>
+            <a:r>
+              <a:rPr b="0" i="0" dirty="0" err="1">
+                <a:solidFill>
+                  <a:srgbClr val="333333"/>
+                </a:solidFill>
+                <a:latin typeface="맑은 고딕"/>
+                <a:ea typeface="맑은 고딕"/>
+                <a:cs typeface="맑은 고딕"/>
+              </a:rPr>
+              <a:t>제거</a:t>
+            </a:r>
+            <a:r>
+              <a:rPr b="0" i="0" dirty="0">
+                <a:solidFill>
+                  <a:srgbClr val="333333"/>
+                </a:solidFill>
+                <a:latin typeface="맑은 고딕"/>
+                <a:ea typeface="맑은 고딕"/>
+                <a:cs typeface="맑은 고딕"/>
+              </a:rPr>
+              <a:t>(</a:t>
+            </a:r>
+            <a:r>
+              <a:rPr b="0" i="0" dirty="0" err="1">
+                <a:solidFill>
+                  <a:srgbClr val="333333"/>
+                </a:solidFill>
+                <a:latin typeface="맑은 고딕"/>
+                <a:ea typeface="맑은 고딕"/>
+                <a:cs typeface="맑은 고딕"/>
+              </a:rPr>
+              <a:t>안전망</a:t>
+            </a:r>
+            <a:r>
+              <a:rPr b="0" i="0" dirty="0">
+                <a:solidFill>
+                  <a:srgbClr val="333333"/>
+                </a:solidFill>
+                <a:latin typeface="맑은 고딕"/>
+                <a:ea typeface="맑은 고딕"/>
+                <a:cs typeface="맑은 고딕"/>
+              </a:rPr>
+              <a:t>)</a:t>
             </a:r>
           </a:p>
         </p:txBody>
@@ -24918,7 +25807,7 @@
               </a:spcAft>
             </a:pPr>
             <a:r>
-              <a:rPr b="1" i="0">
+              <a:rPr b="1" i="0" dirty="0" err="1">
                 <a:solidFill>
                   <a:srgbClr val="1F456E"/>
                 </a:solidFill>
@@ -24926,7 +25815,84 @@
                 <a:ea typeface="맑은 고딕"/>
                 <a:cs typeface="맑은 고딕"/>
               </a:rPr>
-              <a:t>입력 데이터 (Supabase 조회)</a:t>
+              <a:t>입력</a:t>
+            </a:r>
+            <a:r>
+              <a:rPr b="1" i="0" dirty="0">
+                <a:solidFill>
+                  <a:srgbClr val="1F456E"/>
+                </a:solidFill>
+                <a:latin typeface="맑은 고딕"/>
+                <a:ea typeface="맑은 고딕"/>
+                <a:cs typeface="맑은 고딕"/>
+              </a:rPr>
+              <a:t> </a:t>
+            </a:r>
+            <a:r>
+              <a:rPr b="1" i="0" dirty="0" err="1">
+                <a:solidFill>
+                  <a:srgbClr val="1F456E"/>
+                </a:solidFill>
+                <a:latin typeface="맑은 고딕"/>
+                <a:ea typeface="맑은 고딕"/>
+                <a:cs typeface="맑은 고딕"/>
+              </a:rPr>
+              <a:t>데이터</a:t>
+            </a:r>
+            <a:r>
+              <a:rPr b="1" i="0" dirty="0">
+                <a:solidFill>
+                  <a:srgbClr val="1F456E"/>
+                </a:solidFill>
+                <a:latin typeface="맑은 고딕"/>
+                <a:ea typeface="맑은 고딕"/>
+                <a:cs typeface="맑은 고딕"/>
+              </a:rPr>
+              <a:t> (</a:t>
+            </a:r>
+            <a:r>
+              <a:rPr b="1" i="0" dirty="0" err="1">
+                <a:solidFill>
+                  <a:srgbClr val="1F456E"/>
+                </a:solidFill>
+                <a:latin typeface="맑은 고딕"/>
+                <a:ea typeface="맑은 고딕"/>
+                <a:cs typeface="맑은 고딕"/>
+              </a:rPr>
+              <a:t>Supabase</a:t>
+            </a:r>
+            <a:r>
+              <a:rPr b="1" i="0" dirty="0">
+                <a:solidFill>
+                  <a:srgbClr val="1F456E"/>
+                </a:solidFill>
+                <a:latin typeface="맑은 고딕"/>
+                <a:ea typeface="맑은 고딕"/>
+                <a:cs typeface="맑은 고딕"/>
+              </a:rPr>
+              <a:t> </a:t>
+            </a:r>
+            <a:r>
+              <a:rPr b="1" i="0" dirty="0" err="1">
+                <a:solidFill>
+                  <a:srgbClr val="1F456E"/>
+                </a:solidFill>
+                <a:latin typeface="맑은 고딕"/>
+                <a:ea typeface="맑은 고딕"/>
+                <a:cs typeface="맑은 고딕"/>
+              </a:rPr>
+              <a:t>조회</a:t>
+            </a:r>
+            <a:r>
+              <a:rPr b="1" i="0" dirty="0">
+                <a:solidFill>
+                  <a:srgbClr val="1F456E"/>
+                </a:solidFill>
+                <a:latin typeface="맑은 고딕"/>
+                <a:ea typeface="맑은 고딕"/>
+                <a:cs typeface="맑은 고딕"/>
+              </a:rPr>
+              <a:t>)</a:t>
             </a:r>
           </a:p>
           <a:p>
@@ -24936,16 +25902,310 @@
               </a:lnSpc>
             </a:pPr>
             <a:r>
-              <a:rPr b="0" i="0">
-                <a:solidFill>
-                  <a:srgbClr val="333333"/>
-                </a:solidFill>
-                <a:latin typeface="맑은 고딕"/>
-                <a:ea typeface="맑은 고딕"/>
-                <a:cs typeface="맑은 고딕"/>
-              </a:rPr>
-              <a:t>슬라이드 본문(slide_contents) + 실시간 설문 결과(survey_results) + 페르소나별 가상질문(virtual_questions) — 학습자 신호까지 근거로 활용</a:t>
-            </a:r>
+              <a:rPr b="0" i="0" dirty="0" err="1">
+                <a:solidFill>
+                  <a:srgbClr val="333333"/>
+                </a:solidFill>
+                <a:latin typeface="맑은 고딕"/>
+                <a:ea typeface="맑은 고딕"/>
+                <a:cs typeface="맑은 고딕"/>
+              </a:rPr>
+              <a:t>슬라이드</a:t>
+            </a:r>
+            <a:r>
+              <a:rPr b="0" i="0" dirty="0">
+                <a:solidFill>
+                  <a:srgbClr val="333333"/>
+                </a:solidFill>
+                <a:latin typeface="맑은 고딕"/>
+                <a:ea typeface="맑은 고딕"/>
+                <a:cs typeface="맑은 고딕"/>
+              </a:rPr>
+              <a:t> </a:t>
+            </a:r>
+            <a:r>
+              <a:rPr b="0" i="0" dirty="0" err="1">
+                <a:solidFill>
+                  <a:srgbClr val="333333"/>
+                </a:solidFill>
+                <a:latin typeface="맑은 고딕"/>
+                <a:ea typeface="맑은 고딕"/>
+                <a:cs typeface="맑은 고딕"/>
+              </a:rPr>
+              <a:t>본문</a:t>
+            </a:r>
+            <a:r>
+              <a:rPr b="0" i="0" dirty="0">
+                <a:solidFill>
+                  <a:srgbClr val="333333"/>
+                </a:solidFill>
+                <a:latin typeface="맑은 고딕"/>
+                <a:ea typeface="맑은 고딕"/>
+                <a:cs typeface="맑은 고딕"/>
+              </a:rPr>
+              <a:t>(</a:t>
+            </a:r>
+            <a:r>
+              <a:rPr b="0" i="0" dirty="0" err="1">
+                <a:solidFill>
+                  <a:srgbClr val="333333"/>
+                </a:solidFill>
+                <a:latin typeface="맑은 고딕"/>
+                <a:ea typeface="맑은 고딕"/>
+                <a:cs typeface="맑은 고딕"/>
+              </a:rPr>
+              <a:t>slide_contents</a:t>
+            </a:r>
+            <a:r>
+              <a:rPr b="0" i="0" dirty="0">
+                <a:solidFill>
+                  <a:srgbClr val="333333"/>
+                </a:solidFill>
+                <a:latin typeface="맑은 고딕"/>
+                <a:ea typeface="맑은 고딕"/>
+                <a:cs typeface="맑은 고딕"/>
+              </a:rPr>
+              <a:t>) + </a:t>
+            </a:r>
+            <a:r>
+              <a:rPr b="0" i="0" dirty="0" err="1">
+                <a:solidFill>
+                  <a:srgbClr val="333333"/>
+                </a:solidFill>
+                <a:latin typeface="맑은 고딕"/>
+                <a:ea typeface="맑은 고딕"/>
+                <a:cs typeface="맑은 고딕"/>
+              </a:rPr>
+              <a:t>실시간</a:t>
+            </a:r>
+            <a:r>
+              <a:rPr b="0" i="0" dirty="0">
+                <a:solidFill>
+                  <a:srgbClr val="333333"/>
+                </a:solidFill>
+                <a:latin typeface="맑은 고딕"/>
+                <a:ea typeface="맑은 고딕"/>
+                <a:cs typeface="맑은 고딕"/>
+              </a:rPr>
+              <a:t> </a:t>
+            </a:r>
+            <a:r>
+              <a:rPr b="0" i="0" dirty="0" err="1">
+                <a:solidFill>
+                  <a:srgbClr val="333333"/>
+                </a:solidFill>
+                <a:latin typeface="맑은 고딕"/>
+                <a:ea typeface="맑은 고딕"/>
+                <a:cs typeface="맑은 고딕"/>
+              </a:rPr>
+              <a:t>설문</a:t>
+            </a:r>
+            <a:r>
+              <a:rPr b="0" i="0" dirty="0">
+                <a:solidFill>
+                  <a:srgbClr val="333333"/>
+                </a:solidFill>
+                <a:latin typeface="맑은 고딕"/>
+                <a:ea typeface="맑은 고딕"/>
+                <a:cs typeface="맑은 고딕"/>
+              </a:rPr>
+              <a:t> </a:t>
+            </a:r>
+            <a:r>
+              <a:rPr b="0" i="0" dirty="0" err="1">
+                <a:solidFill>
+                  <a:srgbClr val="333333"/>
+                </a:solidFill>
+                <a:latin typeface="맑은 고딕"/>
+                <a:ea typeface="맑은 고딕"/>
+                <a:cs typeface="맑은 고딕"/>
+              </a:rPr>
+              <a:t>결과</a:t>
+            </a:r>
+            <a:r>
+              <a:rPr b="0" i="0" dirty="0">
+                <a:solidFill>
+                  <a:srgbClr val="333333"/>
+                </a:solidFill>
+                <a:latin typeface="맑은 고딕"/>
+                <a:ea typeface="맑은 고딕"/>
+                <a:cs typeface="맑은 고딕"/>
+              </a:rPr>
+              <a:t>(</a:t>
+            </a:r>
+            <a:r>
+              <a:rPr b="0" i="0" dirty="0" err="1">
+                <a:solidFill>
+                  <a:srgbClr val="333333"/>
+                </a:solidFill>
+                <a:latin typeface="맑은 고딕"/>
+                <a:ea typeface="맑은 고딕"/>
+                <a:cs typeface="맑은 고딕"/>
+              </a:rPr>
+              <a:t>survey_results</a:t>
+            </a:r>
+            <a:r>
+              <a:rPr b="0" i="0" dirty="0">
+                <a:solidFill>
+                  <a:srgbClr val="333333"/>
+                </a:solidFill>
+                <a:latin typeface="맑은 고딕"/>
+                <a:ea typeface="맑은 고딕"/>
+                <a:cs typeface="맑은 고딕"/>
+              </a:rPr>
+              <a:t>) + </a:t>
+            </a:r>
+            <a:r>
+              <a:rPr b="0" i="0" dirty="0" err="1">
+                <a:solidFill>
+                  <a:srgbClr val="333333"/>
+                </a:solidFill>
+                <a:latin typeface="맑은 고딕"/>
+                <a:ea typeface="맑은 고딕"/>
+                <a:cs typeface="맑은 고딕"/>
+              </a:rPr>
+              <a:t>페르소나별</a:t>
+            </a:r>
+            <a:r>
+              <a:rPr b="0" i="0" dirty="0">
+                <a:solidFill>
+                  <a:srgbClr val="333333"/>
+                </a:solidFill>
+                <a:latin typeface="맑은 고딕"/>
+                <a:ea typeface="맑은 고딕"/>
+                <a:cs typeface="맑은 고딕"/>
+              </a:rPr>
+              <a:t> </a:t>
+            </a:r>
+            <a:r>
+              <a:rPr b="0" i="0" dirty="0" err="1">
+                <a:solidFill>
+                  <a:srgbClr val="333333"/>
+                </a:solidFill>
+                <a:latin typeface="맑은 고딕"/>
+                <a:ea typeface="맑은 고딕"/>
+                <a:cs typeface="맑은 고딕"/>
+              </a:rPr>
+              <a:t>가상질문</a:t>
+            </a:r>
+            <a:r>
+              <a:rPr b="0" i="0" dirty="0">
+                <a:solidFill>
+                  <a:srgbClr val="333333"/>
+                </a:solidFill>
+                <a:latin typeface="맑은 고딕"/>
+                <a:ea typeface="맑은 고딕"/>
+                <a:cs typeface="맑은 고딕"/>
+              </a:rPr>
+              <a:t>(</a:t>
+            </a:r>
+            <a:r>
+              <a:rPr b="0" i="0" dirty="0" err="1">
+                <a:solidFill>
+                  <a:srgbClr val="333333"/>
+                </a:solidFill>
+                <a:latin typeface="맑은 고딕"/>
+                <a:ea typeface="맑은 고딕"/>
+                <a:cs typeface="맑은 고딕"/>
+              </a:rPr>
+              <a:t>virtual_questions</a:t>
+            </a:r>
+            <a:r>
+              <a:rPr b="0" i="0" dirty="0">
+                <a:solidFill>
+                  <a:srgbClr val="333333"/>
+                </a:solidFill>
+                <a:latin typeface="맑은 고딕"/>
+                <a:ea typeface="맑은 고딕"/>
+                <a:cs typeface="맑은 고딕"/>
+              </a:rPr>
+              <a:t>) — </a:t>
+            </a:r>
+            <a:r>
+              <a:rPr b="0" i="0" dirty="0" err="1">
+                <a:solidFill>
+                  <a:srgbClr val="333333"/>
+                </a:solidFill>
+                <a:latin typeface="맑은 고딕"/>
+                <a:ea typeface="맑은 고딕"/>
+                <a:cs typeface="맑은 고딕"/>
+              </a:rPr>
+              <a:t>학습자</a:t>
+            </a:r>
+            <a:r>
+              <a:rPr b="0" i="0" dirty="0">
+                <a:solidFill>
+                  <a:srgbClr val="333333"/>
+                </a:solidFill>
+                <a:latin typeface="맑은 고딕"/>
+                <a:ea typeface="맑은 고딕"/>
+                <a:cs typeface="맑은 고딕"/>
+              </a:rPr>
+              <a:t> </a:t>
+            </a:r>
+            <a:r>
+              <a:rPr b="0" i="0" dirty="0" err="1">
+                <a:solidFill>
+                  <a:srgbClr val="333333"/>
+                </a:solidFill>
+                <a:latin typeface="맑은 고딕"/>
+                <a:ea typeface="맑은 고딕"/>
+                <a:cs typeface="맑은 고딕"/>
+              </a:rPr>
+              <a:t>신호까지</a:t>
+            </a:r>
+            <a:r>
+              <a:rPr b="0" i="0" dirty="0">
+                <a:solidFill>
+                  <a:srgbClr val="333333"/>
+                </a:solidFill>
+                <a:latin typeface="맑은 고딕"/>
+                <a:ea typeface="맑은 고딕"/>
+                <a:cs typeface="맑은 고딕"/>
+              </a:rPr>
+              <a:t> </a:t>
+            </a:r>
+            <a:r>
+              <a:rPr b="0" i="0" dirty="0" err="1">
+                <a:solidFill>
+                  <a:srgbClr val="333333"/>
+                </a:solidFill>
+                <a:latin typeface="맑은 고딕"/>
+                <a:ea typeface="맑은 고딕"/>
+                <a:cs typeface="맑은 고딕"/>
+              </a:rPr>
+              <a:t>근거로</a:t>
+            </a:r>
+            <a:r>
+              <a:rPr b="0" i="0" dirty="0">
+                <a:solidFill>
+                  <a:srgbClr val="333333"/>
+                </a:solidFill>
+                <a:latin typeface="맑은 고딕"/>
+                <a:ea typeface="맑은 고딕"/>
+                <a:cs typeface="맑은 고딕"/>
+              </a:rPr>
+              <a:t> </a:t>
+            </a:r>
+            <a:r>
+              <a:rPr b="0" i="0" dirty="0" err="1">
+                <a:solidFill>
+                  <a:srgbClr val="333333"/>
+                </a:solidFill>
+                <a:latin typeface="맑은 고딕"/>
+                <a:ea typeface="맑은 고딕"/>
+                <a:cs typeface="맑은 고딕"/>
+              </a:rPr>
+              <a:t>활용</a:t>
+            </a:r>
+            <a:endParaRPr b="0" i="0" dirty="0">
+              <a:solidFill>
+                <a:srgbClr val="333333"/>
+              </a:solidFill>
+              <a:latin typeface="맑은 고딕"/>
+              <a:ea typeface="맑은 고딕"/>
+              <a:cs typeface="맑은 고딕"/>
+            </a:endParaRPr>
           </a:p>
         </p:txBody>
       </p:sp>
@@ -27402,10 +28662,70 @@
               <a:buNone/>
             </a:pPr>
             <a:r>
-              <a:rPr lang="en-US"/>
-              <a:t>사례 ③ — 원본 재전송 vs 파생 요약 재사용 (토큰 실측)</a:t>
-            </a:r>
-            <a:endParaRPr/>
+              <a:rPr lang="en-US" dirty="0" err="1"/>
+              <a:t>사례</a:t>
+            </a:r>
+            <a:r>
+              <a:rPr lang="en-US" dirty="0"/>
+              <a:t> ③ — </a:t>
+            </a:r>
+            <a:r>
+              <a:rPr lang="en-US" dirty="0" err="1"/>
+              <a:t>원본</a:t>
+            </a:r>
+            <a:r>
+              <a:rPr lang="en-US" dirty="0"/>
+              <a:t> </a:t>
+            </a:r>
+            <a:r>
+              <a:rPr lang="en-US" dirty="0" err="1"/>
+              <a:t>재전송</a:t>
+            </a:r>
+            <a:r>
+              <a:rPr lang="en-US" dirty="0"/>
+              <a:t> vs </a:t>
+            </a:r>
+            <a:r>
+              <a:rPr lang="en-US" dirty="0" err="1"/>
+              <a:t>파생</a:t>
+            </a:r>
+            <a:r>
+              <a:rPr lang="en-US" dirty="0"/>
+              <a:t> </a:t>
+            </a:r>
+            <a:r>
+              <a:rPr lang="en-US" dirty="0" err="1"/>
+              <a:t>요약</a:t>
+            </a:r>
+            <a:r>
+              <a:rPr lang="en-US" dirty="0"/>
+              <a:t> </a:t>
+            </a:r>
+            <a:r>
+              <a:rPr lang="en-US" dirty="0" err="1"/>
+              <a:t>재사용</a:t>
+            </a:r>
+            <a:r>
+              <a:rPr lang="en-US" dirty="0"/>
+              <a:t> (</a:t>
+            </a:r>
+            <a:r>
+              <a:rPr lang="en-US" dirty="0" err="1"/>
+              <a:t>토큰</a:t>
+            </a:r>
+            <a:r>
+              <a:rPr lang="en-US" dirty="0"/>
+              <a:t> </a:t>
+            </a:r>
+            <a:r>
+              <a:rPr lang="en-US" dirty="0" err="1"/>
+              <a:t>실측</a:t>
+            </a:r>
+            <a:r>
+              <a:rPr lang="en-US" dirty="0"/>
+              <a:t>)</a:t>
+            </a:r>
+            <a:endParaRPr dirty="0"/>
           </a:p>
         </p:txBody>
       </p:sp>
@@ -27464,7 +28784,7 @@
         <p:spPr>
           <a:xfrm>
             <a:off x="384048" y="1005840"/>
-            <a:ext cx="11430000" cy="215444"/>
+            <a:ext cx="11430000" cy="646331"/>
           </a:xfrm>
           <a:prstGeom prst="rect">
             <a:avLst/>
@@ -27479,7 +28799,7 @@
           <a:p>
             <a:pPr algn="l"/>
             <a:r>
-              <a:rPr b="0" i="0">
+              <a:rPr b="0" i="0" dirty="0" err="1">
                 <a:solidFill>
                   <a:srgbClr val="595959"/>
                 </a:solidFill>
@@ -27487,8 +28807,425 @@
                 <a:ea typeface="맑은 고딕"/>
                 <a:cs typeface="맑은 고딕"/>
               </a:rPr>
-              <a:t>강의자료 평가 1회 실행 안의 두 번째 LLM 호출(웹검색)에 무엇을 입력할 것인가</a:t>
-            </a:r>
+              <a:t>강의자료</a:t>
+            </a:r>
+            <a:r>
+              <a:rPr b="0" i="0" dirty="0">
+                <a:solidFill>
+                  <a:srgbClr val="595959"/>
+                </a:solidFill>
+                <a:latin typeface="맑은 고딕"/>
+                <a:ea typeface="맑은 고딕"/>
+                <a:cs typeface="맑은 고딕"/>
+              </a:rPr>
+              <a:t> </a:t>
+            </a:r>
+            <a:r>
+              <a:rPr b="0" i="0" dirty="0" err="1">
+                <a:solidFill>
+                  <a:srgbClr val="595959"/>
+                </a:solidFill>
+                <a:latin typeface="맑은 고딕"/>
+                <a:ea typeface="맑은 고딕"/>
+                <a:cs typeface="맑은 고딕"/>
+              </a:rPr>
+              <a:t>평가</a:t>
+            </a:r>
+            <a:r>
+              <a:rPr b="0" i="0" dirty="0">
+                <a:solidFill>
+                  <a:srgbClr val="595959"/>
+                </a:solidFill>
+                <a:latin typeface="맑은 고딕"/>
+                <a:ea typeface="맑은 고딕"/>
+                <a:cs typeface="맑은 고딕"/>
+              </a:rPr>
+              <a:t> 1회 </a:t>
+            </a:r>
+            <a:r>
+              <a:rPr b="0" i="0" dirty="0" err="1">
+                <a:solidFill>
+                  <a:srgbClr val="595959"/>
+                </a:solidFill>
+                <a:latin typeface="맑은 고딕"/>
+                <a:ea typeface="맑은 고딕"/>
+                <a:cs typeface="맑은 고딕"/>
+              </a:rPr>
+              <a:t>실행</a:t>
+            </a:r>
+            <a:r>
+              <a:rPr b="0" i="0" dirty="0">
+                <a:solidFill>
+                  <a:srgbClr val="595959"/>
+                </a:solidFill>
+                <a:latin typeface="맑은 고딕"/>
+                <a:ea typeface="맑은 고딕"/>
+                <a:cs typeface="맑은 고딕"/>
+              </a:rPr>
+              <a:t> </a:t>
+            </a:r>
+            <a:r>
+              <a:rPr b="0" i="0" dirty="0" err="1">
+                <a:solidFill>
+                  <a:srgbClr val="595959"/>
+                </a:solidFill>
+                <a:latin typeface="맑은 고딕"/>
+                <a:ea typeface="맑은 고딕"/>
+                <a:cs typeface="맑은 고딕"/>
+              </a:rPr>
+              <a:t>안의</a:t>
+            </a:r>
+            <a:r>
+              <a:rPr b="0" i="0" dirty="0">
+                <a:solidFill>
+                  <a:srgbClr val="595959"/>
+                </a:solidFill>
+                <a:latin typeface="맑은 고딕"/>
+                <a:ea typeface="맑은 고딕"/>
+                <a:cs typeface="맑은 고딕"/>
+              </a:rPr>
+              <a:t> 두 </a:t>
+            </a:r>
+            <a:r>
+              <a:rPr b="0" i="0" dirty="0" err="1">
+                <a:solidFill>
+                  <a:srgbClr val="595959"/>
+                </a:solidFill>
+                <a:latin typeface="맑은 고딕"/>
+                <a:ea typeface="맑은 고딕"/>
+                <a:cs typeface="맑은 고딕"/>
+              </a:rPr>
+              <a:t>번째</a:t>
+            </a:r>
+            <a:r>
+              <a:rPr b="0" i="0" dirty="0">
+                <a:solidFill>
+                  <a:srgbClr val="595959"/>
+                </a:solidFill>
+                <a:latin typeface="맑은 고딕"/>
+                <a:ea typeface="맑은 고딕"/>
+                <a:cs typeface="맑은 고딕"/>
+              </a:rPr>
+              <a:t> LLM </a:t>
+            </a:r>
+            <a:r>
+              <a:rPr b="0" i="0" dirty="0" err="1">
+                <a:solidFill>
+                  <a:srgbClr val="595959"/>
+                </a:solidFill>
+                <a:latin typeface="맑은 고딕"/>
+                <a:ea typeface="맑은 고딕"/>
+                <a:cs typeface="맑은 고딕"/>
+              </a:rPr>
+              <a:t>호출</a:t>
+            </a:r>
+            <a:r>
+              <a:rPr b="0" i="0" dirty="0">
+                <a:solidFill>
+                  <a:srgbClr val="595959"/>
+                </a:solidFill>
+                <a:latin typeface="맑은 고딕"/>
+                <a:ea typeface="맑은 고딕"/>
+                <a:cs typeface="맑은 고딕"/>
+              </a:rPr>
+              <a:t>(</a:t>
+            </a:r>
+            <a:r>
+              <a:rPr b="0" i="0" dirty="0" err="1">
+                <a:solidFill>
+                  <a:srgbClr val="595959"/>
+                </a:solidFill>
+                <a:latin typeface="맑은 고딕"/>
+                <a:ea typeface="맑은 고딕"/>
+                <a:cs typeface="맑은 고딕"/>
+              </a:rPr>
+              <a:t>웹검색</a:t>
+            </a:r>
+            <a:r>
+              <a:rPr b="0" i="0" dirty="0">
+                <a:solidFill>
+                  <a:srgbClr val="595959"/>
+                </a:solidFill>
+                <a:latin typeface="맑은 고딕"/>
+                <a:ea typeface="맑은 고딕"/>
+                <a:cs typeface="맑은 고딕"/>
+              </a:rPr>
+              <a:t>)에 </a:t>
+            </a:r>
+            <a:r>
+              <a:rPr b="0" i="0" dirty="0" err="1">
+                <a:solidFill>
+                  <a:srgbClr val="595959"/>
+                </a:solidFill>
+                <a:latin typeface="맑은 고딕"/>
+                <a:ea typeface="맑은 고딕"/>
+                <a:cs typeface="맑은 고딕"/>
+              </a:rPr>
+              <a:t>무엇을</a:t>
+            </a:r>
+            <a:r>
+              <a:rPr b="0" i="0" dirty="0">
+                <a:solidFill>
+                  <a:srgbClr val="595959"/>
+                </a:solidFill>
+                <a:latin typeface="맑은 고딕"/>
+                <a:ea typeface="맑은 고딕"/>
+                <a:cs typeface="맑은 고딕"/>
+              </a:rPr>
+              <a:t> </a:t>
+            </a:r>
+            <a:r>
+              <a:rPr b="0" i="0" dirty="0" err="1">
+                <a:solidFill>
+                  <a:srgbClr val="595959"/>
+                </a:solidFill>
+                <a:latin typeface="맑은 고딕"/>
+                <a:ea typeface="맑은 고딕"/>
+                <a:cs typeface="맑은 고딕"/>
+              </a:rPr>
+              <a:t>입력할</a:t>
+            </a:r>
+            <a:r>
+              <a:rPr b="0" i="0" dirty="0">
+                <a:solidFill>
+                  <a:srgbClr val="595959"/>
+                </a:solidFill>
+                <a:latin typeface="맑은 고딕"/>
+                <a:ea typeface="맑은 고딕"/>
+                <a:cs typeface="맑은 고딕"/>
+              </a:rPr>
+              <a:t> </a:t>
+            </a:r>
+            <a:r>
+              <a:rPr b="0" i="0" dirty="0" err="1">
+                <a:solidFill>
+                  <a:srgbClr val="595959"/>
+                </a:solidFill>
+                <a:latin typeface="맑은 고딕"/>
+                <a:ea typeface="맑은 고딕"/>
+                <a:cs typeface="맑은 고딕"/>
+              </a:rPr>
+              <a:t>것인가</a:t>
+            </a:r>
+            <a:endParaRPr lang="en-US" b="0" i="0" dirty="0">
+              <a:solidFill>
+                <a:srgbClr val="595959"/>
+              </a:solidFill>
+              <a:latin typeface="맑은 고딕"/>
+              <a:ea typeface="맑은 고딕"/>
+              <a:cs typeface="맑은 고딕"/>
+            </a:endParaRPr>
+          </a:p>
+          <a:p>
+            <a:r>
+              <a:rPr lang="en-US" b="0" i="0" dirty="0">
+                <a:solidFill>
+                  <a:srgbClr val="595959"/>
+                </a:solidFill>
+                <a:latin typeface="맑은 고딕"/>
+                <a:ea typeface="맑은 고딕"/>
+                <a:cs typeface="맑은 고딕"/>
+              </a:rPr>
+              <a:t>TPM</a:t>
+            </a:r>
+            <a:r>
+              <a:rPr lang="ko-KR" altLang="en-US" b="0" i="0" dirty="0">
+                <a:solidFill>
+                  <a:srgbClr val="595959"/>
+                </a:solidFill>
+                <a:latin typeface="맑은 고딕"/>
+                <a:ea typeface="맑은 고딕"/>
+                <a:cs typeface="맑은 고딕"/>
+              </a:rPr>
+              <a:t>은 요청단위가 아닌 </a:t>
+            </a:r>
+            <a:r>
+              <a:rPr lang="ko-KR" altLang="en-US" b="0" i="0" dirty="0" err="1">
+                <a:solidFill>
+                  <a:srgbClr val="595959"/>
+                </a:solidFill>
+                <a:latin typeface="맑은 고딕"/>
+                <a:ea typeface="맑은 고딕"/>
+                <a:cs typeface="맑은 고딕"/>
+              </a:rPr>
+              <a:t>분단위</a:t>
+            </a:r>
+            <a:r>
+              <a:rPr lang="ko-KR" altLang="en-US" b="0" i="0" dirty="0">
+                <a:solidFill>
+                  <a:srgbClr val="595959"/>
+                </a:solidFill>
+                <a:latin typeface="맑은 고딕"/>
+                <a:ea typeface="맑은 고딕"/>
+                <a:cs typeface="맑은 고딕"/>
+              </a:rPr>
+              <a:t> 누적</a:t>
+            </a:r>
+            <a:r>
+              <a:rPr lang="en-US" altLang="ko-KR" b="0" i="0" dirty="0">
+                <a:solidFill>
+                  <a:srgbClr val="595959"/>
+                </a:solidFill>
+                <a:latin typeface="맑은 고딕"/>
+                <a:ea typeface="맑은 고딕"/>
+                <a:cs typeface="맑은 고딕"/>
+              </a:rPr>
+              <a:t>. 1</a:t>
+            </a:r>
+            <a:r>
+              <a:rPr lang="ko-KR" altLang="en-US" b="0" i="0" dirty="0" err="1">
+                <a:solidFill>
+                  <a:srgbClr val="595959"/>
+                </a:solidFill>
+                <a:latin typeface="맑은 고딕"/>
+                <a:ea typeface="맑은 고딕"/>
+                <a:cs typeface="맑은 고딕"/>
+              </a:rPr>
+              <a:t>분안에</a:t>
+            </a:r>
+            <a:r>
+              <a:rPr lang="ko-KR" altLang="en-US" b="0" i="0" dirty="0">
+                <a:solidFill>
+                  <a:srgbClr val="595959"/>
+                </a:solidFill>
+                <a:latin typeface="맑은 고딕"/>
+                <a:ea typeface="맑은 고딕"/>
+                <a:cs typeface="맑은 고딕"/>
+              </a:rPr>
+              <a:t> </a:t>
+            </a:r>
+            <a:r>
+              <a:rPr lang="en-US" altLang="ko-KR" b="0" i="0" dirty="0">
+                <a:solidFill>
+                  <a:srgbClr val="595959"/>
+                </a:solidFill>
+                <a:latin typeface="맑은 고딕"/>
+                <a:ea typeface="맑은 고딕"/>
+                <a:cs typeface="맑은 고딕"/>
+              </a:rPr>
+              <a:t>2</a:t>
+            </a:r>
+            <a:r>
+              <a:rPr lang="ko-KR" altLang="en-US" b="0" i="0" dirty="0">
+                <a:solidFill>
+                  <a:srgbClr val="595959"/>
+                </a:solidFill>
+                <a:latin typeface="맑은 고딕"/>
+                <a:ea typeface="맑은 고딕"/>
+                <a:cs typeface="맑은 고딕"/>
+              </a:rPr>
+              <a:t>개의 요청이 이 한계를 넘음 </a:t>
+            </a:r>
+            <a:r>
+              <a:rPr lang="en-US" altLang="ko-KR" b="0" i="0" dirty="0">
+                <a:solidFill>
+                  <a:srgbClr val="595959"/>
+                </a:solidFill>
+                <a:latin typeface="맑은 고딕"/>
+                <a:ea typeface="맑은 고딕"/>
+                <a:cs typeface="맑은 고딕"/>
+              </a:rPr>
+              <a:t>(</a:t>
+            </a:r>
+            <a:r>
+              <a:rPr lang="ko-KR" altLang="en-US" b="0" i="0" dirty="0">
+                <a:solidFill>
+                  <a:srgbClr val="595959"/>
+                </a:solidFill>
+                <a:latin typeface="맑은 고딕"/>
+                <a:ea typeface="맑은 고딕"/>
+                <a:cs typeface="맑은 고딕"/>
+              </a:rPr>
+              <a:t>근거 </a:t>
+            </a:r>
+            <a:r>
+              <a:rPr lang="en-US" altLang="ko-KR" dirty="0">
+                <a:solidFill>
+                  <a:srgbClr val="595959"/>
+                </a:solidFill>
+                <a:latin typeface="맑은 고딕"/>
+                <a:ea typeface="맑은 고딕"/>
+                <a:cs typeface="맑은 고딕"/>
+              </a:rPr>
+              <a:t>: </a:t>
+            </a:r>
+            <a:r>
+              <a:rPr lang="en-US" altLang="ko-KR" dirty="0">
+                <a:solidFill>
+                  <a:srgbClr val="595959"/>
+                </a:solidFill>
+                <a:latin typeface="맑은 고딕"/>
+                <a:ea typeface="맑은 고딕"/>
+                <a:cs typeface="맑은 고딕"/>
+                <a:hlinkClick r:id="rId2"/>
+              </a:rPr>
+              <a:t>https://www.codewords.ai/blog/openai-api-rate-limits</a:t>
+            </a:r>
+            <a:r>
+              <a:rPr lang="en-US" altLang="ko-KR" dirty="0">
+                <a:solidFill>
+                  <a:srgbClr val="595959"/>
+                </a:solidFill>
+                <a:latin typeface="맑은 고딕"/>
+                <a:ea typeface="맑은 고딕"/>
+                <a:cs typeface="맑은 고딕"/>
+              </a:rPr>
+              <a:t> )</a:t>
+            </a:r>
+          </a:p>
+          <a:p>
+            <a:r>
+              <a:rPr lang="en-US" b="0" i="0" dirty="0">
+                <a:solidFill>
+                  <a:srgbClr val="595959"/>
+                </a:solidFill>
+                <a:latin typeface="맑은 고딕"/>
+                <a:ea typeface="맑은 고딕"/>
+                <a:cs typeface="맑은 고딕"/>
+              </a:rPr>
+              <a:t>429 : </a:t>
+            </a:r>
+            <a:r>
+              <a:rPr lang="ko-KR" altLang="en-US" b="0" i="0" dirty="0">
+                <a:solidFill>
+                  <a:srgbClr val="595959"/>
+                </a:solidFill>
+                <a:latin typeface="맑은 고딕"/>
+                <a:ea typeface="맑은 고딕"/>
+                <a:cs typeface="맑은 고딕"/>
+              </a:rPr>
+              <a:t>한도초과시 </a:t>
+            </a:r>
+            <a:r>
+              <a:rPr lang="en-US" altLang="ko-KR" b="0" i="0" dirty="0">
+                <a:solidFill>
+                  <a:srgbClr val="595959"/>
+                </a:solidFill>
+                <a:latin typeface="맑은 고딕"/>
+                <a:ea typeface="맑은 고딕"/>
+                <a:cs typeface="맑은 고딕"/>
+              </a:rPr>
+              <a:t>HTTP </a:t>
+            </a:r>
+            <a:r>
+              <a:rPr lang="ko-KR" altLang="en-US" b="0" i="0" dirty="0">
+                <a:solidFill>
+                  <a:srgbClr val="595959"/>
+                </a:solidFill>
+                <a:latin typeface="맑은 고딕"/>
+                <a:ea typeface="맑은 고딕"/>
+                <a:cs typeface="맑은 고딕"/>
+              </a:rPr>
+              <a:t>오류</a:t>
+            </a:r>
+            <a:endParaRPr b="0" i="0" dirty="0">
+              <a:solidFill>
+                <a:srgbClr val="595959"/>
+              </a:solidFill>
+              <a:latin typeface="맑은 고딕"/>
+              <a:ea typeface="맑은 고딕"/>
+              <a:cs typeface="맑은 고딕"/>
+            </a:endParaRPr>
           </a:p>
         </p:txBody>
       </p:sp>
@@ -27500,7 +29237,7 @@
         </p:nvSpPr>
         <p:spPr>
           <a:xfrm>
-            <a:off x="384048" y="1463040"/>
+            <a:off x="384048" y="1767836"/>
             <a:ext cx="8229600" cy="292608"/>
           </a:xfrm>
           <a:prstGeom prst="rect">
@@ -27537,7 +29274,7 @@
         </p:nvSpPr>
         <p:spPr>
           <a:xfrm>
-            <a:off x="548640" y="1874519"/>
+            <a:off x="548640" y="2179315"/>
             <a:ext cx="2845125" cy="566928"/>
           </a:xfrm>
           <a:prstGeom prst="rect">
@@ -27592,7 +29329,7 @@
         </p:nvSpPr>
         <p:spPr>
           <a:xfrm>
-            <a:off x="3393765" y="1874519"/>
+            <a:off x="3393765" y="2179315"/>
             <a:ext cx="4595164" cy="566928"/>
           </a:xfrm>
           <a:prstGeom prst="rect">
@@ -27626,7 +29363,7 @@
           <a:p>
             <a:pPr algn="ctr"/>
             <a:r>
-              <a:rPr b="1" i="0">
+              <a:rPr b="1" i="0" dirty="0" err="1">
                 <a:solidFill>
                   <a:srgbClr val="FFFFFF"/>
                 </a:solidFill>
@@ -27634,8 +29371,126 @@
                 <a:ea typeface="맑은 고딕"/>
                 <a:cs typeface="맑은 고딕"/>
               </a:rPr>
-              <a:t>웹검색(원문 재전송)  18,845 토큰</a:t>
-            </a:r>
+              <a:t>웹검색</a:t>
+            </a:r>
+            <a:r>
+              <a:rPr b="1" i="0" dirty="0">
+                <a:solidFill>
+                  <a:srgbClr val="FFFFFF"/>
+                </a:solidFill>
+                <a:latin typeface="맑은 고딕"/>
+                <a:ea typeface="맑은 고딕"/>
+                <a:cs typeface="맑은 고딕"/>
+              </a:rPr>
+              <a:t>(</a:t>
+            </a:r>
+            <a:r>
+              <a:rPr b="1" i="0" dirty="0" err="1">
+                <a:solidFill>
+                  <a:srgbClr val="FFFFFF"/>
+                </a:solidFill>
+                <a:latin typeface="맑은 고딕"/>
+                <a:ea typeface="맑은 고딕"/>
+                <a:cs typeface="맑은 고딕"/>
+              </a:rPr>
+              <a:t>원문</a:t>
+            </a:r>
+            <a:r>
+              <a:rPr b="1" i="0" dirty="0">
+                <a:solidFill>
+                  <a:srgbClr val="FFFFFF"/>
+                </a:solidFill>
+                <a:latin typeface="맑은 고딕"/>
+                <a:ea typeface="맑은 고딕"/>
+                <a:cs typeface="맑은 고딕"/>
+              </a:rPr>
+              <a:t> </a:t>
+            </a:r>
+            <a:r>
+              <a:rPr b="1" i="0" dirty="0" err="1">
+                <a:solidFill>
+                  <a:srgbClr val="FFFFFF"/>
+                </a:solidFill>
+                <a:latin typeface="맑은 고딕"/>
+                <a:ea typeface="맑은 고딕"/>
+                <a:cs typeface="맑은 고딕"/>
+              </a:rPr>
+              <a:t>재전송</a:t>
+            </a:r>
+            <a:r>
+              <a:rPr lang="en-US" b="1" i="0" dirty="0">
+                <a:solidFill>
+                  <a:srgbClr val="FFFFFF"/>
+                </a:solidFill>
+                <a:latin typeface="맑은 고딕"/>
+                <a:ea typeface="맑은 고딕"/>
+                <a:cs typeface="맑은 고딕"/>
+              </a:rPr>
+              <a:t>+</a:t>
+            </a:r>
+            <a:r>
+              <a:rPr lang="ko-KR" altLang="en-US" b="1" i="0" dirty="0">
+                <a:solidFill>
+                  <a:srgbClr val="FFFFFF"/>
+                </a:solidFill>
+                <a:latin typeface="맑은 고딕"/>
+                <a:ea typeface="맑은 고딕"/>
+                <a:cs typeface="맑은 고딕"/>
+              </a:rPr>
+              <a:t>도구정의</a:t>
+            </a:r>
+            <a:r>
+              <a:rPr lang="en-US" altLang="ko-KR" b="1" i="0" dirty="0">
+                <a:solidFill>
+                  <a:srgbClr val="FFFFFF"/>
+                </a:solidFill>
+                <a:latin typeface="맑은 고딕"/>
+                <a:ea typeface="맑은 고딕"/>
+                <a:cs typeface="맑은 고딕"/>
+              </a:rPr>
+              <a:t>+</a:t>
+            </a:r>
+            <a:r>
+              <a:rPr lang="ko-KR" altLang="en-US" b="1" i="0" dirty="0" err="1">
+                <a:solidFill>
+                  <a:srgbClr val="FFFFFF"/>
+                </a:solidFill>
+                <a:latin typeface="맑은 고딕"/>
+                <a:ea typeface="맑은 고딕"/>
+                <a:cs typeface="맑은 고딕"/>
+              </a:rPr>
+              <a:t>지시문</a:t>
+            </a:r>
+            <a:r>
+              <a:rPr b="1" i="0" dirty="0">
+                <a:solidFill>
+                  <a:srgbClr val="FFFFFF"/>
+                </a:solidFill>
+                <a:latin typeface="맑은 고딕"/>
+                <a:ea typeface="맑은 고딕"/>
+                <a:cs typeface="맑은 고딕"/>
+              </a:rPr>
+              <a:t>)  18,845 </a:t>
+            </a:r>
+            <a:r>
+              <a:rPr b="1" i="0" dirty="0" err="1">
+                <a:solidFill>
+                  <a:srgbClr val="FFFFFF"/>
+                </a:solidFill>
+                <a:latin typeface="맑은 고딕"/>
+                <a:ea typeface="맑은 고딕"/>
+                <a:cs typeface="맑은 고딕"/>
+              </a:rPr>
+              <a:t>토큰</a:t>
+            </a:r>
+            <a:endParaRPr b="1" i="0" dirty="0">
+              <a:solidFill>
+                <a:srgbClr val="FFFFFF"/>
+              </a:solidFill>
+              <a:latin typeface="맑은 고딕"/>
+              <a:ea typeface="맑은 고딕"/>
+              <a:cs typeface="맑은 고딕"/>
+            </a:endParaRPr>
           </a:p>
         </p:txBody>
       </p:sp>
@@ -27647,7 +29502,7 @@
         </p:nvCxnSpPr>
         <p:spPr>
           <a:xfrm>
-            <a:off x="7863840" y="1691640"/>
+            <a:off x="7863840" y="1996436"/>
             <a:ext cx="0" cy="1097280"/>
           </a:xfrm>
           <a:prstGeom prst="line">
@@ -27684,7 +29539,7 @@
         </p:nvSpPr>
         <p:spPr>
           <a:xfrm>
-            <a:off x="6949440" y="1481328"/>
+            <a:off x="6949440" y="1786124"/>
             <a:ext cx="2926080" cy="215444"/>
           </a:xfrm>
           <a:prstGeom prst="rect">
@@ -27721,7 +29576,7 @@
         </p:nvSpPr>
         <p:spPr>
           <a:xfrm>
-            <a:off x="548640" y="2532887"/>
+            <a:off x="548640" y="2837683"/>
             <a:ext cx="10515600" cy="215444"/>
           </a:xfrm>
           <a:prstGeom prst="rect">
@@ -27769,8 +29624,8 @@
         </p:nvSpPr>
         <p:spPr>
           <a:xfrm>
-            <a:off x="384048" y="3063240"/>
-            <a:ext cx="9144000" cy="292608"/>
+            <a:off x="384048" y="3368036"/>
+            <a:ext cx="9144000" cy="215444"/>
           </a:xfrm>
           <a:prstGeom prst="rect">
             <a:avLst/>
@@ -27785,7 +29640,7 @@
           <a:p>
             <a:pPr algn="l"/>
             <a:r>
-              <a:rPr sz="1400" b="1" i="0">
+              <a:rPr sz="1400" b="1" i="0" dirty="0">
                 <a:solidFill>
                   <a:srgbClr val="1F456E"/>
                 </a:solidFill>
@@ -27793,8 +29648,192 @@
                 <a:ea typeface="맑은 고딕"/>
                 <a:cs typeface="맑은 고딕"/>
               </a:rPr>
-              <a:t>TO-BE — 핵심 평가가 이미 만든 요약(structure_review)을 재사용</a:t>
-            </a:r>
+              <a:t>TO-BE — </a:t>
+            </a:r>
+            <a:r>
+              <a:rPr lang="ko-KR" altLang="en-US" b="1" dirty="0">
+                <a:solidFill>
+                  <a:srgbClr val="1F456E"/>
+                </a:solidFill>
+                <a:latin typeface="맑은 고딕"/>
+                <a:ea typeface="맑은 고딕"/>
+                <a:cs typeface="맑은 고딕"/>
+              </a:rPr>
+              <a:t>웹 검색을 위해 </a:t>
+            </a:r>
+            <a:r>
+              <a:rPr lang="en-US" altLang="ko-KR" b="1" dirty="0">
+                <a:solidFill>
+                  <a:srgbClr val="1F456E"/>
+                </a:solidFill>
+                <a:latin typeface="맑은 고딕"/>
+                <a:ea typeface="맑은 고딕"/>
+                <a:cs typeface="맑은 고딕"/>
+              </a:rPr>
+              <a:t>2</a:t>
+            </a:r>
+            <a:r>
+              <a:rPr lang="ko-KR" altLang="en-US" b="1" dirty="0">
+                <a:solidFill>
+                  <a:srgbClr val="1F456E"/>
+                </a:solidFill>
+                <a:latin typeface="맑은 고딕"/>
+                <a:ea typeface="맑은 고딕"/>
+                <a:cs typeface="맑은 고딕"/>
+              </a:rPr>
+              <a:t>차 요청 시 원문이 아닌 </a:t>
+            </a:r>
+            <a:r>
+              <a:rPr sz="1400" b="1" i="0" dirty="0" err="1">
+                <a:solidFill>
+                  <a:srgbClr val="1F456E"/>
+                </a:solidFill>
+                <a:latin typeface="맑은 고딕"/>
+                <a:ea typeface="맑은 고딕"/>
+                <a:cs typeface="맑은 고딕"/>
+              </a:rPr>
+              <a:t>핵심</a:t>
+            </a:r>
+            <a:r>
+              <a:rPr sz="1400" b="1" i="0" dirty="0">
+                <a:solidFill>
+                  <a:srgbClr val="1F456E"/>
+                </a:solidFill>
+                <a:latin typeface="맑은 고딕"/>
+                <a:ea typeface="맑은 고딕"/>
+                <a:cs typeface="맑은 고딕"/>
+              </a:rPr>
+              <a:t> </a:t>
+            </a:r>
+            <a:r>
+              <a:rPr sz="1400" b="1" i="0" dirty="0" err="1">
+                <a:solidFill>
+                  <a:srgbClr val="1F456E"/>
+                </a:solidFill>
+                <a:latin typeface="맑은 고딕"/>
+                <a:ea typeface="맑은 고딕"/>
+                <a:cs typeface="맑은 고딕"/>
+              </a:rPr>
+              <a:t>평가가</a:t>
+            </a:r>
+            <a:r>
+              <a:rPr sz="1400" b="1" i="0" dirty="0">
+                <a:solidFill>
+                  <a:srgbClr val="1F456E"/>
+                </a:solidFill>
+                <a:latin typeface="맑은 고딕"/>
+                <a:ea typeface="맑은 고딕"/>
+                <a:cs typeface="맑은 고딕"/>
+              </a:rPr>
+              <a:t> </a:t>
+            </a:r>
+            <a:r>
+              <a:rPr sz="1400" b="1" i="0" dirty="0" err="1">
+                <a:solidFill>
+                  <a:srgbClr val="1F456E"/>
+                </a:solidFill>
+                <a:latin typeface="맑은 고딕"/>
+                <a:ea typeface="맑은 고딕"/>
+                <a:cs typeface="맑은 고딕"/>
+              </a:rPr>
+              <a:t>이미</a:t>
+            </a:r>
+            <a:r>
+              <a:rPr sz="1400" b="1" i="0" dirty="0">
+                <a:solidFill>
+                  <a:srgbClr val="1F456E"/>
+                </a:solidFill>
+                <a:latin typeface="맑은 고딕"/>
+                <a:ea typeface="맑은 고딕"/>
+                <a:cs typeface="맑은 고딕"/>
+              </a:rPr>
+              <a:t> </a:t>
+            </a:r>
+            <a:r>
+              <a:rPr sz="1400" b="1" i="0" dirty="0" err="1">
+                <a:solidFill>
+                  <a:srgbClr val="1F456E"/>
+                </a:solidFill>
+                <a:latin typeface="맑은 고딕"/>
+                <a:ea typeface="맑은 고딕"/>
+                <a:cs typeface="맑은 고딕"/>
+              </a:rPr>
+              <a:t>만든</a:t>
+            </a:r>
+            <a:r>
+              <a:rPr sz="1400" b="1" i="0" dirty="0">
+                <a:solidFill>
+                  <a:srgbClr val="1F456E"/>
+                </a:solidFill>
+                <a:latin typeface="맑은 고딕"/>
+                <a:ea typeface="맑은 고딕"/>
+                <a:cs typeface="맑은 고딕"/>
+              </a:rPr>
+              <a:t> </a:t>
+            </a:r>
+            <a:r>
+              <a:rPr sz="1400" b="1" i="0" dirty="0" err="1">
+                <a:solidFill>
+                  <a:srgbClr val="1F456E"/>
+                </a:solidFill>
+                <a:latin typeface="맑은 고딕"/>
+                <a:ea typeface="맑은 고딕"/>
+                <a:cs typeface="맑은 고딕"/>
+              </a:rPr>
+              <a:t>요약</a:t>
+            </a:r>
+            <a:r>
+              <a:rPr sz="1400" b="1" i="0" dirty="0">
+                <a:solidFill>
+                  <a:srgbClr val="1F456E"/>
+                </a:solidFill>
+                <a:latin typeface="맑은 고딕"/>
+                <a:ea typeface="맑은 고딕"/>
+                <a:cs typeface="맑은 고딕"/>
+              </a:rPr>
+              <a:t>(</a:t>
+            </a:r>
+            <a:r>
+              <a:rPr sz="1400" b="1" i="0" dirty="0" err="1">
+                <a:solidFill>
+                  <a:srgbClr val="1F456E"/>
+                </a:solidFill>
+                <a:latin typeface="맑은 고딕"/>
+                <a:ea typeface="맑은 고딕"/>
+                <a:cs typeface="맑은 고딕"/>
+              </a:rPr>
+              <a:t>structure_review</a:t>
+            </a:r>
+            <a:r>
+              <a:rPr sz="1400" b="1" i="0" dirty="0">
+                <a:solidFill>
+                  <a:srgbClr val="1F456E"/>
+                </a:solidFill>
+                <a:latin typeface="맑은 고딕"/>
+                <a:ea typeface="맑은 고딕"/>
+                <a:cs typeface="맑은 고딕"/>
+              </a:rPr>
+              <a:t>)을 </a:t>
+            </a:r>
+            <a:r>
+              <a:rPr sz="1400" b="1" i="0" dirty="0" err="1">
+                <a:solidFill>
+                  <a:srgbClr val="1F456E"/>
+                </a:solidFill>
+                <a:latin typeface="맑은 고딕"/>
+                <a:ea typeface="맑은 고딕"/>
+                <a:cs typeface="맑은 고딕"/>
+              </a:rPr>
+              <a:t>재사용</a:t>
+            </a:r>
+            <a:endParaRPr sz="1400" b="1" i="0" dirty="0">
+              <a:solidFill>
+                <a:srgbClr val="1F456E"/>
+              </a:solidFill>
+              <a:latin typeface="맑은 고딕"/>
+              <a:ea typeface="맑은 고딕"/>
+              <a:cs typeface="맑은 고딕"/>
+            </a:endParaRPr>
           </a:p>
         </p:txBody>
       </p:sp>
@@ -27806,7 +29845,7 @@
         </p:nvSpPr>
         <p:spPr>
           <a:xfrm>
-            <a:off x="548640" y="3474720"/>
+            <a:off x="548640" y="3779516"/>
             <a:ext cx="2845125" cy="566928"/>
           </a:xfrm>
           <a:prstGeom prst="rect">
@@ -27861,7 +29900,7 @@
         </p:nvSpPr>
         <p:spPr>
           <a:xfrm>
-            <a:off x="3393765" y="3474720"/>
+            <a:off x="3393765" y="3779516"/>
             <a:ext cx="320040" cy="566928"/>
           </a:xfrm>
           <a:prstGeom prst="rect">
@@ -27908,7 +29947,7 @@
         </p:nvSpPr>
         <p:spPr>
           <a:xfrm>
-            <a:off x="3805245" y="3584448"/>
+            <a:off x="3805245" y="3889244"/>
             <a:ext cx="5029200" cy="430887"/>
           </a:xfrm>
           <a:prstGeom prst="rect">
@@ -27956,7 +29995,7 @@
         </p:nvCxnSpPr>
         <p:spPr>
           <a:xfrm>
-            <a:off x="7863840" y="3291840"/>
+            <a:off x="7863840" y="3596636"/>
             <a:ext cx="0" cy="914400"/>
           </a:xfrm>
           <a:prstGeom prst="line">
@@ -27993,8 +30032,8 @@
         </p:nvSpPr>
         <p:spPr>
           <a:xfrm>
-            <a:off x="384048" y="4434840"/>
-            <a:ext cx="3675887" cy="1234440"/>
+            <a:off x="402337" y="4549537"/>
+            <a:ext cx="3675887" cy="1104499"/>
           </a:xfrm>
           <a:prstGeom prst="roundRect">
             <a:avLst>
@@ -28035,7 +30074,7 @@
               </a:spcAft>
             </a:pPr>
             <a:r>
-              <a:rPr b="1" i="0">
+              <a:rPr b="1" i="0" dirty="0" err="1">
                 <a:solidFill>
                   <a:srgbClr val="1F456E"/>
                 </a:solidFill>
@@ -28043,8 +30082,60 @@
                 <a:ea typeface="맑은 고딕"/>
                 <a:cs typeface="맑은 고딕"/>
               </a:rPr>
-              <a:t>웹검색 입력 크기</a:t>
-            </a:r>
+              <a:t>웹검색</a:t>
+            </a:r>
+            <a:r>
+              <a:rPr b="1" i="0" dirty="0">
+                <a:solidFill>
+                  <a:srgbClr val="1F456E"/>
+                </a:solidFill>
+                <a:latin typeface="맑은 고딕"/>
+                <a:ea typeface="맑은 고딕"/>
+                <a:cs typeface="맑은 고딕"/>
+              </a:rPr>
+              <a:t> </a:t>
+            </a:r>
+            <a:r>
+              <a:rPr b="1" i="0" dirty="0" err="1">
+                <a:solidFill>
+                  <a:srgbClr val="1F456E"/>
+                </a:solidFill>
+                <a:latin typeface="맑은 고딕"/>
+                <a:ea typeface="맑은 고딕"/>
+                <a:cs typeface="맑은 고딕"/>
+              </a:rPr>
+              <a:t>입력</a:t>
+            </a:r>
+            <a:r>
+              <a:rPr b="1" i="0" dirty="0">
+                <a:solidFill>
+                  <a:srgbClr val="1F456E"/>
+                </a:solidFill>
+                <a:latin typeface="맑은 고딕"/>
+                <a:ea typeface="맑은 고딕"/>
+                <a:cs typeface="맑은 고딕"/>
+              </a:rPr>
+              <a:t> </a:t>
+            </a:r>
+            <a:r>
+              <a:rPr b="1" i="0" dirty="0" err="1">
+                <a:solidFill>
+                  <a:srgbClr val="1F456E"/>
+                </a:solidFill>
+                <a:latin typeface="맑은 고딕"/>
+                <a:ea typeface="맑은 고딕"/>
+                <a:cs typeface="맑은 고딕"/>
+              </a:rPr>
+              <a:t>크기</a:t>
+            </a:r>
+            <a:endParaRPr b="1" i="0" dirty="0">
+              <a:solidFill>
+                <a:srgbClr val="1F456E"/>
+              </a:solidFill>
+              <a:latin typeface="맑은 고딕"/>
+              <a:ea typeface="맑은 고딕"/>
+              <a:cs typeface="맑은 고딕"/>
+            </a:endParaRPr>
           </a:p>
           <a:p>
             <a:pPr algn="l">
@@ -28056,7 +30147,7 @@
               </a:spcAft>
             </a:pPr>
             <a:r>
-              <a:rPr b="1" i="0">
+              <a:rPr b="1" i="0" dirty="0">
                 <a:solidFill>
                   <a:srgbClr val="8A8A8A"/>
                 </a:solidFill>
@@ -28067,15 +30158,70 @@
               <a:t>AS-IS  </a:t>
             </a:r>
             <a:r>
-              <a:rPr b="0" i="0">
-                <a:solidFill>
-                  <a:srgbClr val="333333"/>
-                </a:solidFill>
-                <a:latin typeface="맑은 고딕"/>
-                <a:ea typeface="맑은 고딕"/>
-                <a:cs typeface="맑은 고딕"/>
-              </a:rPr>
-              <a:t>슬라이드 전체 원문 (~143장, 11,000자+)</a:t>
+              <a:rPr b="0" i="0" dirty="0" err="1">
+                <a:solidFill>
+                  <a:srgbClr val="333333"/>
+                </a:solidFill>
+                <a:latin typeface="맑은 고딕"/>
+                <a:ea typeface="맑은 고딕"/>
+                <a:cs typeface="맑은 고딕"/>
+              </a:rPr>
+              <a:t>슬라이드</a:t>
+            </a:r>
+            <a:r>
+              <a:rPr b="0" i="0" dirty="0">
+                <a:solidFill>
+                  <a:srgbClr val="333333"/>
+                </a:solidFill>
+                <a:latin typeface="맑은 고딕"/>
+                <a:ea typeface="맑은 고딕"/>
+                <a:cs typeface="맑은 고딕"/>
+              </a:rPr>
+              <a:t> </a:t>
+            </a:r>
+            <a:r>
+              <a:rPr b="0" i="0" dirty="0" err="1">
+                <a:solidFill>
+                  <a:srgbClr val="333333"/>
+                </a:solidFill>
+                <a:latin typeface="맑은 고딕"/>
+                <a:ea typeface="맑은 고딕"/>
+                <a:cs typeface="맑은 고딕"/>
+              </a:rPr>
+              <a:t>전체</a:t>
+            </a:r>
+            <a:r>
+              <a:rPr b="0" i="0" dirty="0">
+                <a:solidFill>
+                  <a:srgbClr val="333333"/>
+                </a:solidFill>
+                <a:latin typeface="맑은 고딕"/>
+                <a:ea typeface="맑은 고딕"/>
+                <a:cs typeface="맑은 고딕"/>
+              </a:rPr>
+              <a:t> </a:t>
+            </a:r>
+            <a:r>
+              <a:rPr b="0" i="0" dirty="0" err="1">
+                <a:solidFill>
+                  <a:srgbClr val="333333"/>
+                </a:solidFill>
+                <a:latin typeface="맑은 고딕"/>
+                <a:ea typeface="맑은 고딕"/>
+                <a:cs typeface="맑은 고딕"/>
+              </a:rPr>
+              <a:t>원문</a:t>
+            </a:r>
+            <a:r>
+              <a:rPr b="0" i="0" dirty="0">
+                <a:solidFill>
+                  <a:srgbClr val="333333"/>
+                </a:solidFill>
+                <a:latin typeface="맑은 고딕"/>
+                <a:ea typeface="맑은 고딕"/>
+                <a:cs typeface="맑은 고딕"/>
+              </a:rPr>
+              <a:t> (~143장, 11,000자+)</a:t>
             </a:r>
           </a:p>
           <a:p>
@@ -28085,7 +30231,7 @@
               </a:lnSpc>
             </a:pPr>
             <a:r>
-              <a:rPr b="1" i="0">
+              <a:rPr b="1" i="0" dirty="0">
                 <a:solidFill>
                   <a:srgbClr val="3E9B6F"/>
                 </a:solidFill>
@@ -28096,15 +30242,114 @@
               <a:t>TO-BE  </a:t>
             </a:r>
             <a:r>
-              <a:rPr b="1" i="0">
-                <a:solidFill>
-                  <a:srgbClr val="333333"/>
-                </a:solidFill>
-                <a:latin typeface="맑은 고딕"/>
-                <a:ea typeface="맑은 고딕"/>
-                <a:cs typeface="맑은 고딕"/>
-              </a:rPr>
-              <a:t>구조 검토 요약 1건 (수백 토큰)</a:t>
+              <a:rPr b="1" i="0" dirty="0" err="1">
+                <a:solidFill>
+                  <a:srgbClr val="333333"/>
+                </a:solidFill>
+                <a:latin typeface="맑은 고딕"/>
+                <a:ea typeface="맑은 고딕"/>
+                <a:cs typeface="맑은 고딕"/>
+              </a:rPr>
+              <a:t>구조</a:t>
+            </a:r>
+            <a:r>
+              <a:rPr b="1" i="0" dirty="0">
+                <a:solidFill>
+                  <a:srgbClr val="333333"/>
+                </a:solidFill>
+                <a:latin typeface="맑은 고딕"/>
+                <a:ea typeface="맑은 고딕"/>
+                <a:cs typeface="맑은 고딕"/>
+              </a:rPr>
+              <a:t> </a:t>
+            </a:r>
+            <a:r>
+              <a:rPr b="1" i="0" dirty="0" err="1">
+                <a:solidFill>
+                  <a:srgbClr val="333333"/>
+                </a:solidFill>
+                <a:latin typeface="맑은 고딕"/>
+                <a:ea typeface="맑은 고딕"/>
+                <a:cs typeface="맑은 고딕"/>
+              </a:rPr>
+              <a:t>검토</a:t>
+            </a:r>
+            <a:r>
+              <a:rPr b="1" i="0" dirty="0">
+                <a:solidFill>
+                  <a:srgbClr val="333333"/>
+                </a:solidFill>
+                <a:latin typeface="맑은 고딕"/>
+                <a:ea typeface="맑은 고딕"/>
+                <a:cs typeface="맑은 고딕"/>
+              </a:rPr>
+              <a:t> </a:t>
+            </a:r>
+            <a:r>
+              <a:rPr b="1" i="0" dirty="0" err="1">
+                <a:solidFill>
+                  <a:srgbClr val="333333"/>
+                </a:solidFill>
+                <a:latin typeface="맑은 고딕"/>
+                <a:ea typeface="맑은 고딕"/>
+                <a:cs typeface="맑은 고딕"/>
+              </a:rPr>
+              <a:t>요약</a:t>
+            </a:r>
+            <a:r>
+              <a:rPr b="1" i="0" dirty="0">
+                <a:solidFill>
+                  <a:srgbClr val="333333"/>
+                </a:solidFill>
+                <a:latin typeface="맑은 고딕"/>
+                <a:ea typeface="맑은 고딕"/>
+                <a:cs typeface="맑은 고딕"/>
+              </a:rPr>
+              <a:t> 1건 (</a:t>
+            </a:r>
+            <a:r>
+              <a:rPr b="1" i="0" dirty="0" err="1">
+                <a:solidFill>
+                  <a:srgbClr val="333333"/>
+                </a:solidFill>
+                <a:latin typeface="맑은 고딕"/>
+                <a:ea typeface="맑은 고딕"/>
+                <a:cs typeface="맑은 고딕"/>
+              </a:rPr>
+              <a:t>수백</a:t>
+            </a:r>
+            <a:r>
+              <a:rPr b="1" i="0" dirty="0">
+                <a:solidFill>
+                  <a:srgbClr val="333333"/>
+                </a:solidFill>
+                <a:latin typeface="맑은 고딕"/>
+                <a:ea typeface="맑은 고딕"/>
+                <a:cs typeface="맑은 고딕"/>
+              </a:rPr>
+              <a:t> </a:t>
+            </a:r>
+            <a:r>
+              <a:rPr b="1" i="0" dirty="0" err="1">
+                <a:solidFill>
+                  <a:srgbClr val="333333"/>
+                </a:solidFill>
+                <a:latin typeface="맑은 고딕"/>
+                <a:ea typeface="맑은 고딕"/>
+                <a:cs typeface="맑은 고딕"/>
+              </a:rPr>
+              <a:t>토큰</a:t>
+            </a:r>
+            <a:r>
+              <a:rPr b="1" i="0" dirty="0">
+                <a:solidFill>
+                  <a:srgbClr val="333333"/>
+                </a:solidFill>
+                <a:latin typeface="맑은 고딕"/>
+                <a:ea typeface="맑은 고딕"/>
+                <a:cs typeface="맑은 고딕"/>
+              </a:rPr>
+              <a:t>)</a:t>
             </a:r>
           </a:p>
         </p:txBody>
@@ -28117,8 +30362,8 @@
         </p:nvSpPr>
         <p:spPr>
           <a:xfrm>
-            <a:off x="4251960" y="4434840"/>
-            <a:ext cx="3675887" cy="1234440"/>
+            <a:off x="4270249" y="4549537"/>
+            <a:ext cx="3675887" cy="1104499"/>
           </a:xfrm>
           <a:prstGeom prst="roundRect">
             <a:avLst>
@@ -28159,7 +30404,7 @@
               </a:spcAft>
             </a:pPr>
             <a:r>
-              <a:rPr b="1" i="0">
+              <a:rPr b="1" i="0" dirty="0" err="1">
                 <a:solidFill>
                   <a:srgbClr val="1F456E"/>
                 </a:solidFill>
@@ -28167,7 +30412,18 @@
                 <a:ea typeface="맑은 고딕"/>
                 <a:cs typeface="맑은 고딕"/>
               </a:rPr>
-              <a:t>레이트리밋(429)</a:t>
+              <a:t>레이트리밋</a:t>
+            </a:r>
+            <a:r>
+              <a:rPr b="1" i="0" dirty="0">
+                <a:solidFill>
+                  <a:srgbClr val="1F456E"/>
+                </a:solidFill>
+                <a:latin typeface="맑은 고딕"/>
+                <a:ea typeface="맑은 고딕"/>
+                <a:cs typeface="맑은 고딕"/>
+              </a:rPr>
+              <a:t>(429)</a:t>
             </a:r>
           </a:p>
           <a:p>
@@ -28180,7 +30436,7 @@
               </a:spcAft>
             </a:pPr>
             <a:r>
-              <a:rPr b="1" i="0">
+              <a:rPr b="1" i="0" dirty="0">
                 <a:solidFill>
                   <a:srgbClr val="8A8A8A"/>
                 </a:solidFill>
@@ -28191,16 +30447,68 @@
               <a:t>AS-IS  </a:t>
             </a:r>
             <a:r>
-              <a:rPr b="0" i="0">
-                <a:solidFill>
-                  <a:srgbClr val="333333"/>
-                </a:solidFill>
-                <a:latin typeface="맑은 고딕"/>
-                <a:ea typeface="맑은 고딕"/>
-                <a:cs typeface="맑은 고딕"/>
-              </a:rPr>
-              <a:t>발생 — TPM 한도 초과</a:t>
-            </a:r>
+              <a:rPr b="0" i="0" dirty="0" err="1">
+                <a:solidFill>
+                  <a:srgbClr val="333333"/>
+                </a:solidFill>
+                <a:latin typeface="맑은 고딕"/>
+                <a:ea typeface="맑은 고딕"/>
+                <a:cs typeface="맑은 고딕"/>
+              </a:rPr>
+              <a:t>발생</a:t>
+            </a:r>
+            <a:r>
+              <a:rPr b="0" i="0" dirty="0">
+                <a:solidFill>
+                  <a:srgbClr val="333333"/>
+                </a:solidFill>
+                <a:latin typeface="맑은 고딕"/>
+                <a:ea typeface="맑은 고딕"/>
+                <a:cs typeface="맑은 고딕"/>
+              </a:rPr>
+              <a:t> — TPM </a:t>
+            </a:r>
+            <a:r>
+              <a:rPr b="0" i="0" dirty="0" err="1">
+                <a:solidFill>
+                  <a:srgbClr val="333333"/>
+                </a:solidFill>
+                <a:latin typeface="맑은 고딕"/>
+                <a:ea typeface="맑은 고딕"/>
+                <a:cs typeface="맑은 고딕"/>
+              </a:rPr>
+              <a:t>한도</a:t>
+            </a:r>
+            <a:r>
+              <a:rPr b="0" i="0" dirty="0">
+                <a:solidFill>
+                  <a:srgbClr val="333333"/>
+                </a:solidFill>
+                <a:latin typeface="맑은 고딕"/>
+                <a:ea typeface="맑은 고딕"/>
+                <a:cs typeface="맑은 고딕"/>
+              </a:rPr>
+              <a:t> </a:t>
+            </a:r>
+            <a:r>
+              <a:rPr b="0" i="0" dirty="0" err="1">
+                <a:solidFill>
+                  <a:srgbClr val="333333"/>
+                </a:solidFill>
+                <a:latin typeface="맑은 고딕"/>
+                <a:ea typeface="맑은 고딕"/>
+                <a:cs typeface="맑은 고딕"/>
+              </a:rPr>
+              <a:t>초과</a:t>
+            </a:r>
+            <a:endParaRPr b="0" i="0" dirty="0">
+              <a:solidFill>
+                <a:srgbClr val="333333"/>
+              </a:solidFill>
+              <a:latin typeface="맑은 고딕"/>
+              <a:ea typeface="맑은 고딕"/>
+              <a:cs typeface="맑은 고딕"/>
+            </a:endParaRPr>
           </a:p>
           <a:p>
             <a:pPr algn="l">
@@ -28209,7 +30517,7 @@
               </a:lnSpc>
             </a:pPr>
             <a:r>
-              <a:rPr b="1" i="0">
+              <a:rPr b="1" i="0" dirty="0">
                 <a:solidFill>
                   <a:srgbClr val="3E9B6F"/>
                 </a:solidFill>
@@ -28220,7 +30528,7 @@
               <a:t>TO-BE  </a:t>
             </a:r>
             <a:r>
-              <a:rPr b="1" i="0">
+              <a:rPr b="1" i="0" dirty="0" err="1">
                 <a:solidFill>
                   <a:srgbClr val="333333"/>
                 </a:solidFill>
@@ -28230,6 +30538,14 @@
               </a:rPr>
               <a:t>미발생</a:t>
             </a:r>
+            <a:endParaRPr b="1" i="0" dirty="0">
+              <a:solidFill>
+                <a:srgbClr val="333333"/>
+              </a:solidFill>
+              <a:latin typeface="맑은 고딕"/>
+              <a:ea typeface="맑은 고딕"/>
+              <a:cs typeface="맑은 고딕"/>
+            </a:endParaRPr>
           </a:p>
         </p:txBody>
       </p:sp>
@@ -28241,8 +30557,8 @@
         </p:nvSpPr>
         <p:spPr>
           <a:xfrm>
-            <a:off x="8119872" y="4434840"/>
-            <a:ext cx="3675887" cy="1234440"/>
+            <a:off x="8138161" y="4549537"/>
+            <a:ext cx="3675887" cy="1118948"/>
           </a:xfrm>
           <a:prstGeom prst="roundRect">
             <a:avLst>
@@ -28283,7 +30599,7 @@
               </a:spcAft>
             </a:pPr>
             <a:r>
-              <a:rPr b="1" i="0">
+              <a:rPr b="1" i="0" dirty="0" err="1">
                 <a:solidFill>
                   <a:srgbClr val="1F456E"/>
                 </a:solidFill>
@@ -28291,8 +30607,38 @@
                 <a:ea typeface="맑은 고딕"/>
                 <a:cs typeface="맑은 고딕"/>
               </a:rPr>
-              <a:t>전체 실행시간</a:t>
-            </a:r>
+              <a:t>전체</a:t>
+            </a:r>
+            <a:r>
+              <a:rPr b="1" i="0" dirty="0">
+                <a:solidFill>
+                  <a:srgbClr val="1F456E"/>
+                </a:solidFill>
+                <a:latin typeface="맑은 고딕"/>
+                <a:ea typeface="맑은 고딕"/>
+                <a:cs typeface="맑은 고딕"/>
+              </a:rPr>
+              <a:t> </a:t>
+            </a:r>
+            <a:r>
+              <a:rPr b="1" i="0" dirty="0" err="1">
+                <a:solidFill>
+                  <a:srgbClr val="1F456E"/>
+                </a:solidFill>
+                <a:latin typeface="맑은 고딕"/>
+                <a:ea typeface="맑은 고딕"/>
+                <a:cs typeface="맑은 고딕"/>
+              </a:rPr>
+              <a:t>실행시간</a:t>
+            </a:r>
+            <a:endParaRPr b="1" i="0" dirty="0">
+              <a:solidFill>
+                <a:srgbClr val="1F456E"/>
+              </a:solidFill>
+              <a:latin typeface="맑은 고딕"/>
+              <a:ea typeface="맑은 고딕"/>
+              <a:cs typeface="맑은 고딕"/>
+            </a:endParaRPr>
           </a:p>
           <a:p>
             <a:pPr algn="l">
@@ -28304,7 +30650,7 @@
               </a:spcAft>
             </a:pPr>
             <a:r>
-              <a:rPr b="1" i="0">
+              <a:rPr b="1" i="0" dirty="0">
                 <a:solidFill>
                   <a:srgbClr val="8A8A8A"/>
                 </a:solidFill>
@@ -28315,15 +30661,81 @@
               <a:t>AS-IS  </a:t>
             </a:r>
             <a:r>
-              <a:rPr b="0" i="0">
-                <a:solidFill>
-                  <a:srgbClr val="333333"/>
-                </a:solidFill>
-                <a:latin typeface="맑은 고딕"/>
-                <a:ea typeface="맑은 고딕"/>
-                <a:cs typeface="맑은 고딕"/>
-              </a:rPr>
-              <a:t>약 40초 (재시도 대기 포함)</a:t>
+              <a:rPr b="0" i="0" dirty="0">
+                <a:solidFill>
+                  <a:srgbClr val="333333"/>
+                </a:solidFill>
+                <a:latin typeface="맑은 고딕"/>
+                <a:ea typeface="맑은 고딕"/>
+                <a:cs typeface="맑은 고딕"/>
+              </a:rPr>
+              <a:t>약 40초 (</a:t>
+            </a:r>
+            <a:r>
+              <a:rPr b="0" i="0" dirty="0" err="1">
+                <a:solidFill>
+                  <a:srgbClr val="333333"/>
+                </a:solidFill>
+                <a:latin typeface="맑은 고딕"/>
+                <a:ea typeface="맑은 고딕"/>
+                <a:cs typeface="맑은 고딕"/>
+              </a:rPr>
+              <a:t>재시도</a:t>
+            </a:r>
+            <a:r>
+              <a:rPr b="0" i="0" dirty="0">
+                <a:solidFill>
+                  <a:srgbClr val="333333"/>
+                </a:solidFill>
+                <a:latin typeface="맑은 고딕"/>
+                <a:ea typeface="맑은 고딕"/>
+                <a:cs typeface="맑은 고딕"/>
+              </a:rPr>
+              <a:t> </a:t>
+            </a:r>
+            <a:r>
+              <a:rPr b="0" i="0" dirty="0" err="1">
+                <a:solidFill>
+                  <a:srgbClr val="333333"/>
+                </a:solidFill>
+                <a:latin typeface="맑은 고딕"/>
+                <a:ea typeface="맑은 고딕"/>
+                <a:cs typeface="맑은 고딕"/>
+              </a:rPr>
+              <a:t>대기</a:t>
+            </a:r>
+            <a:r>
+              <a:rPr b="0" i="0" dirty="0">
+                <a:solidFill>
+                  <a:srgbClr val="333333"/>
+                </a:solidFill>
+                <a:latin typeface="맑은 고딕"/>
+                <a:ea typeface="맑은 고딕"/>
+                <a:cs typeface="맑은 고딕"/>
+              </a:rPr>
+              <a:t> </a:t>
+            </a:r>
+            <a:r>
+              <a:rPr b="0" i="0" dirty="0" err="1">
+                <a:solidFill>
+                  <a:srgbClr val="333333"/>
+                </a:solidFill>
+                <a:latin typeface="맑은 고딕"/>
+                <a:ea typeface="맑은 고딕"/>
+                <a:cs typeface="맑은 고딕"/>
+              </a:rPr>
+              <a:t>포함</a:t>
+            </a:r>
+            <a:r>
+              <a:rPr b="0" i="0" dirty="0">
+                <a:solidFill>
+                  <a:srgbClr val="333333"/>
+                </a:solidFill>
+                <a:latin typeface="맑은 고딕"/>
+                <a:ea typeface="맑은 고딕"/>
+                <a:cs typeface="맑은 고딕"/>
+              </a:rPr>
+              <a:t>)</a:t>
             </a:r>
           </a:p>
           <a:p>
@@ -28333,7 +30745,7 @@
               </a:lnSpc>
             </a:pPr>
             <a:r>
-              <a:rPr b="1" i="0">
+              <a:rPr b="1" i="0" dirty="0">
                 <a:solidFill>
                   <a:srgbClr val="3E9B6F"/>
                 </a:solidFill>
@@ -28344,7 +30756,7 @@
               <a:t>TO-BE </a:t>
             </a:r>
             <a:r>
-              <a:rPr lang="ko-KR" altLang="en-US" b="1">
+              <a:rPr lang="ko-KR" altLang="en-US" b="1" dirty="0">
                 <a:solidFill>
                   <a:srgbClr val="333333"/>
                 </a:solidFill>
@@ -28355,7 +30767,7 @@
               <a:t>약 </a:t>
             </a:r>
             <a:r>
-              <a:rPr lang="en-US" altLang="ko-KR" b="1">
+              <a:rPr lang="en-US" altLang="ko-KR" b="1" dirty="0">
                 <a:solidFill>
                   <a:srgbClr val="333333"/>
                 </a:solidFill>
@@ -28366,7 +30778,7 @@
               <a:t>20</a:t>
             </a:r>
             <a:r>
-              <a:rPr lang="ko-KR" altLang="en-US" b="1">
+              <a:rPr lang="ko-KR" altLang="en-US" b="1" dirty="0">
                 <a:solidFill>
                   <a:srgbClr val="333333"/>
                 </a:solidFill>
@@ -28377,7 +30789,7 @@
               <a:t>초</a:t>
             </a:r>
             <a:r>
-              <a:rPr lang="en-US" altLang="ko-KR" b="1">
+              <a:rPr lang="en-US" altLang="ko-KR" b="1" dirty="0">
                 <a:solidFill>
                   <a:srgbClr val="333333"/>
                 </a:solidFill>
@@ -28388,16 +30800,116 @@
               <a:t>. </a:t>
             </a:r>
             <a:r>
-              <a:rPr b="1" i="0">
-                <a:solidFill>
-                  <a:srgbClr val="333333"/>
-                </a:solidFill>
-                <a:latin typeface="맑은 고딕"/>
-                <a:ea typeface="맑은 고딕"/>
-                <a:cs typeface="맑은 고딕"/>
-              </a:rPr>
-              <a:t>이전보다 단축 (실측)</a:t>
-            </a:r>
+              <a:rPr b="1" i="0" dirty="0" err="1">
+                <a:solidFill>
+                  <a:srgbClr val="333333"/>
+                </a:solidFill>
+                <a:latin typeface="맑은 고딕"/>
+                <a:ea typeface="맑은 고딕"/>
+                <a:cs typeface="맑은 고딕"/>
+              </a:rPr>
+              <a:t>이전보다</a:t>
+            </a:r>
+            <a:r>
+              <a:rPr b="1" i="0" dirty="0">
+                <a:solidFill>
+                  <a:srgbClr val="333333"/>
+                </a:solidFill>
+                <a:latin typeface="맑은 고딕"/>
+                <a:ea typeface="맑은 고딕"/>
+                <a:cs typeface="맑은 고딕"/>
+              </a:rPr>
+              <a:t> </a:t>
+            </a:r>
+            <a:r>
+              <a:rPr b="1" i="0" dirty="0" err="1">
+                <a:solidFill>
+                  <a:srgbClr val="333333"/>
+                </a:solidFill>
+                <a:latin typeface="맑은 고딕"/>
+                <a:ea typeface="맑은 고딕"/>
+                <a:cs typeface="맑은 고딕"/>
+              </a:rPr>
+              <a:t>단축</a:t>
+            </a:r>
+            <a:r>
+              <a:rPr b="1" i="0" dirty="0">
+                <a:solidFill>
+                  <a:srgbClr val="333333"/>
+                </a:solidFill>
+                <a:latin typeface="맑은 고딕"/>
+                <a:ea typeface="맑은 고딕"/>
+                <a:cs typeface="맑은 고딕"/>
+              </a:rPr>
+              <a:t> (</a:t>
+            </a:r>
+            <a:r>
+              <a:rPr b="1" i="0" dirty="0" err="1">
+                <a:solidFill>
+                  <a:srgbClr val="333333"/>
+                </a:solidFill>
+                <a:latin typeface="맑은 고딕"/>
+                <a:ea typeface="맑은 고딕"/>
+                <a:cs typeface="맑은 고딕"/>
+              </a:rPr>
+              <a:t>실측</a:t>
+            </a:r>
+            <a:r>
+              <a:rPr b="1" i="0" dirty="0">
+                <a:solidFill>
+                  <a:srgbClr val="333333"/>
+                </a:solidFill>
+                <a:latin typeface="맑은 고딕"/>
+                <a:ea typeface="맑은 고딕"/>
+                <a:cs typeface="맑은 고딕"/>
+              </a:rPr>
+              <a:t>)</a:t>
+            </a:r>
+            <a:endParaRPr lang="en-US" b="1" i="0" dirty="0">
+              <a:solidFill>
+                <a:srgbClr val="333333"/>
+              </a:solidFill>
+              <a:latin typeface="맑은 고딕"/>
+              <a:ea typeface="맑은 고딕"/>
+              <a:cs typeface="맑은 고딕"/>
+            </a:endParaRPr>
+          </a:p>
+          <a:p>
+            <a:pPr>
+              <a:lnSpc>
+                <a:spcPct val="110000"/>
+              </a:lnSpc>
+            </a:pPr>
+            <a:r>
+              <a:rPr lang="ko-KR" altLang="en-US" b="1" i="0" dirty="0">
+                <a:solidFill>
+                  <a:srgbClr val="333333"/>
+                </a:solidFill>
+                <a:latin typeface="맑은 고딕"/>
+                <a:ea typeface="맑은 고딕"/>
+                <a:cs typeface="맑은 고딕"/>
+              </a:rPr>
+              <a:t>슬라이드가 더 늘어나도 안전</a:t>
+            </a:r>
+            <a:r>
+              <a:rPr lang="en-US" altLang="ko-KR" b="1" i="0" dirty="0">
+                <a:solidFill>
+                  <a:srgbClr val="333333"/>
+                </a:solidFill>
+                <a:latin typeface="맑은 고딕"/>
+                <a:ea typeface="맑은 고딕"/>
+                <a:cs typeface="맑은 고딕"/>
+              </a:rPr>
+              <a:t>.</a:t>
+            </a:r>
+            <a:endParaRPr b="1" i="0" dirty="0">
+              <a:solidFill>
+                <a:srgbClr val="333333"/>
+              </a:solidFill>
+              <a:latin typeface="맑은 고딕"/>
+              <a:ea typeface="맑은 고딕"/>
+              <a:cs typeface="맑은 고딕"/>
+            </a:endParaRPr>
           </a:p>
         </p:txBody>
       </p:sp>
@@ -28533,6 +31045,1838 @@
 </file>
 
 <file path=ppt/slides/slide26.xml><?xml version="1.0" encoding="utf-8"?>
+<p:sld xmlns:a="http://schemas.openxmlformats.org/drawingml/2006/main" xmlns:r="http://schemas.openxmlformats.org/officeDocument/2006/relationships" xmlns:p="http://schemas.openxmlformats.org/presentationml/2006/main">
+  <p:cSld>
+    <p:spTree>
+      <p:nvGrpSpPr>
+        <p:cNvPr id="1" name=""/>
+        <p:cNvGrpSpPr/>
+        <p:nvPr/>
+      </p:nvGrpSpPr>
+      <p:grpSpPr>
+        <a:xfrm>
+          <a:off x="0" y="0"/>
+          <a:ext cx="0" cy="0"/>
+          <a:chOff x="0" y="0"/>
+          <a:chExt cx="0" cy="0"/>
+        </a:xfrm>
+      </p:grpSpPr>
+      <p:sp>
+        <p:nvSpPr>
+          <p:cNvPr id="2" name="Text 0"/>
+          <p:cNvSpPr/>
+          <p:nvPr/>
+        </p:nvSpPr>
+        <p:spPr>
+          <a:xfrm>
+            <a:off x="402336" y="274320"/>
+            <a:ext cx="11338560" cy="548640"/>
+          </a:xfrm>
+          <a:prstGeom prst="rect">
+            <a:avLst/>
+          </a:prstGeom>
+          <a:noFill/>
+          <a:ln/>
+        </p:spPr>
+        <p:txBody>
+          <a:bodyPr wrap="square" lIns="0" tIns="0" rIns="0" bIns="0" rtlCol="0" anchor="ctr"/>
+          <a:lstStyle/>
+          <a:p>
+            <a:pPr marL="0" indent="0">
+              <a:buNone/>
+            </a:pPr>
+            <a:r>
+              <a:rPr lang="en-US" sz="3000" b="1" dirty="0">
+                <a:solidFill>
+                  <a:srgbClr val="365388"/>
+                </a:solidFill>
+                <a:latin typeface="Malgun Gothic" pitchFamily="34" charset="0"/>
+                <a:ea typeface="Malgun Gothic" pitchFamily="34" charset="-122"/>
+                <a:cs typeface="Malgun Gothic" pitchFamily="34" charset="-120"/>
+              </a:rPr>
+              <a:t>사례 ③ 보강 — </a:t>
+            </a:r>
+            <a:r>
+              <a:rPr lang="en-US" sz="3000" b="1" dirty="0" err="1">
+                <a:solidFill>
+                  <a:srgbClr val="365388"/>
+                </a:solidFill>
+                <a:latin typeface="Malgun Gothic" pitchFamily="34" charset="0"/>
+                <a:ea typeface="Malgun Gothic" pitchFamily="34" charset="-122"/>
+                <a:cs typeface="Malgun Gothic" pitchFamily="34" charset="-120"/>
+              </a:rPr>
+              <a:t>토큰</a:t>
+            </a:r>
+            <a:r>
+              <a:rPr lang="en-US" sz="3000" b="1" dirty="0">
+                <a:solidFill>
+                  <a:srgbClr val="365388"/>
+                </a:solidFill>
+                <a:latin typeface="Malgun Gothic" pitchFamily="34" charset="0"/>
+                <a:ea typeface="Malgun Gothic" pitchFamily="34" charset="-122"/>
+                <a:cs typeface="Malgun Gothic" pitchFamily="34" charset="-120"/>
+              </a:rPr>
+              <a:t> 숫자는 어디서 나온 값인가</a:t>
+            </a:r>
+            <a:endParaRPr lang="en-US" sz="3000" dirty="0"/>
+          </a:p>
+        </p:txBody>
+      </p:sp>
+      <p:sp>
+        <p:nvSpPr>
+          <p:cNvPr id="3" name="Text 1"/>
+          <p:cNvSpPr/>
+          <p:nvPr/>
+        </p:nvSpPr>
+        <p:spPr>
+          <a:xfrm>
+            <a:off x="420624" y="859536"/>
+            <a:ext cx="11338560" cy="274320"/>
+          </a:xfrm>
+          <a:prstGeom prst="rect">
+            <a:avLst/>
+          </a:prstGeom>
+          <a:noFill/>
+          <a:ln/>
+        </p:spPr>
+        <p:txBody>
+          <a:bodyPr wrap="square" lIns="0" tIns="0" rIns="0" bIns="0" rtlCol="0" anchor="ctr"/>
+          <a:lstStyle/>
+          <a:p>
+            <a:pPr marL="0" indent="0">
+              <a:buNone/>
+            </a:pPr>
+            <a:r>
+              <a:rPr lang="en-US" sz="1300" dirty="0">
+                <a:solidFill>
+                  <a:srgbClr val="595959"/>
+                </a:solidFill>
+                <a:latin typeface="Malgun Gothic" pitchFamily="34" charset="0"/>
+                <a:ea typeface="Malgun Gothic" pitchFamily="34" charset="-122"/>
+                <a:cs typeface="Malgun Gothic" pitchFamily="34" charset="-120"/>
+              </a:rPr>
+              <a:t>앞 페이지의 30,513 토큰과 1.026초는 추정이 아니라 OpenAI가 </a:t>
+            </a:r>
+            <a:r>
+              <a:rPr lang="en-US" sz="1300" dirty="0" err="1">
+                <a:solidFill>
+                  <a:srgbClr val="595959"/>
+                </a:solidFill>
+                <a:latin typeface="Malgun Gothic" pitchFamily="34" charset="0"/>
+                <a:ea typeface="Malgun Gothic" pitchFamily="34" charset="-122"/>
+                <a:cs typeface="Malgun Gothic" pitchFamily="34" charset="-120"/>
+              </a:rPr>
+              <a:t>알려준</a:t>
+            </a:r>
+            <a:r>
+              <a:rPr lang="en-US" sz="1300" dirty="0">
+                <a:solidFill>
+                  <a:srgbClr val="595959"/>
+                </a:solidFill>
+                <a:latin typeface="Malgun Gothic" pitchFamily="34" charset="0"/>
+                <a:ea typeface="Malgun Gothic" pitchFamily="34" charset="-122"/>
+                <a:cs typeface="Malgun Gothic" pitchFamily="34" charset="-120"/>
+              </a:rPr>
+              <a:t> 값</a:t>
+            </a:r>
+            <a:endParaRPr lang="en-US" sz="1300" dirty="0"/>
+          </a:p>
+        </p:txBody>
+      </p:sp>
+      <p:sp>
+        <p:nvSpPr>
+          <p:cNvPr id="4" name="Text 2"/>
+          <p:cNvSpPr/>
+          <p:nvPr/>
+        </p:nvSpPr>
+        <p:spPr>
+          <a:xfrm>
+            <a:off x="420624" y="1261872"/>
+            <a:ext cx="11338560" cy="274320"/>
+          </a:xfrm>
+          <a:prstGeom prst="rect">
+            <a:avLst/>
+          </a:prstGeom>
+          <a:noFill/>
+          <a:ln/>
+        </p:spPr>
+        <p:txBody>
+          <a:bodyPr wrap="square" lIns="0" tIns="0" rIns="0" bIns="0" rtlCol="0" anchor="ctr"/>
+          <a:lstStyle/>
+          <a:p>
+            <a:pPr marL="0" indent="0">
+              <a:buNone/>
+            </a:pPr>
+            <a:r>
+              <a:rPr lang="en-US" sz="1600" b="1" dirty="0">
+                <a:solidFill>
+                  <a:srgbClr val="1F456E"/>
+                </a:solidFill>
+                <a:latin typeface="Malgun Gothic" pitchFamily="34" charset="0"/>
+                <a:ea typeface="Malgun Gothic" pitchFamily="34" charset="-122"/>
+                <a:cs typeface="Malgun Gothic" pitchFamily="34" charset="-120"/>
+              </a:rPr>
+              <a:t>토큰 사용량은 세 곳에서 확인된다</a:t>
+            </a:r>
+            <a:endParaRPr lang="en-US" sz="1600" dirty="0"/>
+          </a:p>
+        </p:txBody>
+      </p:sp>
+      <p:sp>
+        <p:nvSpPr>
+          <p:cNvPr id="5" name="Shape 3"/>
+          <p:cNvSpPr/>
+          <p:nvPr/>
+        </p:nvSpPr>
+        <p:spPr>
+          <a:xfrm>
+            <a:off x="420624" y="1591056"/>
+            <a:ext cx="3657600" cy="1298448"/>
+          </a:xfrm>
+          <a:prstGeom prst="roundRect">
+            <a:avLst>
+              <a:gd name="adj" fmla="val 3704"/>
+            </a:avLst>
+          </a:prstGeom>
+          <a:solidFill>
+            <a:srgbClr val="FFFFFF"/>
+          </a:solidFill>
+          <a:ln w="12700">
+            <a:solidFill>
+              <a:srgbClr val="B7CDE2"/>
+            </a:solidFill>
+            <a:prstDash val="solid"/>
+          </a:ln>
+        </p:spPr>
+        <p:txBody>
+          <a:bodyPr/>
+          <a:lstStyle/>
+          <a:p>
+            <a:endParaRPr lang="ko-KR" altLang="en-US"/>
+          </a:p>
+        </p:txBody>
+      </p:sp>
+      <p:sp>
+        <p:nvSpPr>
+          <p:cNvPr id="6" name="Text 4"/>
+          <p:cNvSpPr/>
+          <p:nvPr/>
+        </p:nvSpPr>
+        <p:spPr>
+          <a:xfrm>
+            <a:off x="585216" y="1682496"/>
+            <a:ext cx="3346704" cy="256032"/>
+          </a:xfrm>
+          <a:prstGeom prst="rect">
+            <a:avLst/>
+          </a:prstGeom>
+          <a:noFill/>
+          <a:ln/>
+        </p:spPr>
+        <p:txBody>
+          <a:bodyPr wrap="square" lIns="0" tIns="0" rIns="0" bIns="0" rtlCol="0" anchor="ctr"/>
+          <a:lstStyle/>
+          <a:p>
+            <a:pPr marL="0" indent="0">
+              <a:buNone/>
+            </a:pPr>
+            <a:r>
+              <a:rPr lang="en-US" sz="1400" b="1" dirty="0">
+                <a:solidFill>
+                  <a:srgbClr val="1F456E"/>
+                </a:solidFill>
+                <a:latin typeface="Malgun Gothic" pitchFamily="34" charset="0"/>
+                <a:ea typeface="Malgun Gothic" pitchFamily="34" charset="-122"/>
+                <a:cs typeface="Malgun Gothic" pitchFamily="34" charset="-120"/>
+              </a:rPr>
+              <a:t>①  호출이 성공하면</a:t>
+            </a:r>
+            <a:endParaRPr lang="en-US" sz="1400" dirty="0"/>
+          </a:p>
+        </p:txBody>
+      </p:sp>
+      <p:sp>
+        <p:nvSpPr>
+          <p:cNvPr id="7" name="Text 5"/>
+          <p:cNvSpPr/>
+          <p:nvPr/>
+        </p:nvSpPr>
+        <p:spPr>
+          <a:xfrm>
+            <a:off x="585216" y="1947672"/>
+            <a:ext cx="3346704" cy="237744"/>
+          </a:xfrm>
+          <a:prstGeom prst="rect">
+            <a:avLst/>
+          </a:prstGeom>
+          <a:noFill/>
+          <a:ln/>
+        </p:spPr>
+        <p:txBody>
+          <a:bodyPr wrap="square" lIns="0" tIns="0" rIns="0" bIns="0" rtlCol="0" anchor="ctr"/>
+          <a:lstStyle/>
+          <a:p>
+            <a:pPr marL="0" indent="0">
+              <a:buNone/>
+            </a:pPr>
+            <a:r>
+              <a:rPr lang="en-US" sz="1150" b="1" dirty="0">
+                <a:solidFill>
+                  <a:srgbClr val="3E9B6F"/>
+                </a:solidFill>
+                <a:latin typeface="Malgun Gothic" pitchFamily="34" charset="0"/>
+                <a:ea typeface="Malgun Gothic" pitchFamily="34" charset="-122"/>
+                <a:cs typeface="Malgun Gothic" pitchFamily="34" charset="-120"/>
+              </a:rPr>
+              <a:t>응답 안에 사용량이 함께 온다</a:t>
+            </a:r>
+            <a:endParaRPr lang="en-US" sz="1150" dirty="0"/>
+          </a:p>
+        </p:txBody>
+      </p:sp>
+      <p:sp>
+        <p:nvSpPr>
+          <p:cNvPr id="8" name="Text 6"/>
+          <p:cNvSpPr/>
+          <p:nvPr/>
+        </p:nvSpPr>
+        <p:spPr>
+          <a:xfrm>
+            <a:off x="585216" y="2231136"/>
+            <a:ext cx="3364992" cy="768096"/>
+          </a:xfrm>
+          <a:prstGeom prst="rect">
+            <a:avLst/>
+          </a:prstGeom>
+          <a:noFill/>
+          <a:ln/>
+        </p:spPr>
+        <p:txBody>
+          <a:bodyPr wrap="square" lIns="0" tIns="0" rIns="0" bIns="0" rtlCol="0" anchor="t"/>
+          <a:lstStyle/>
+          <a:p>
+            <a:pPr marL="0" indent="0">
+              <a:lnSpc>
+                <a:spcPct val="130000"/>
+              </a:lnSpc>
+              <a:buNone/>
+            </a:pPr>
+            <a:r>
+              <a:rPr lang="en-US" sz="1100" dirty="0">
+                <a:solidFill>
+                  <a:srgbClr val="333333"/>
+                </a:solidFill>
+                <a:latin typeface="Malgun Gothic" pitchFamily="34" charset="0"/>
+                <a:ea typeface="Malgun Gothic" pitchFamily="34" charset="-122"/>
+                <a:cs typeface="Malgun Gothic" pitchFamily="34" charset="-120"/>
+              </a:rPr>
+              <a:t>보낸 양 · 받은 양 · 합계</a:t>
+            </a:r>
+            <a:endParaRPr lang="en-US" sz="1100" dirty="0"/>
+          </a:p>
+          <a:p>
+            <a:pPr marL="0" indent="0">
+              <a:lnSpc>
+                <a:spcPct val="130000"/>
+              </a:lnSpc>
+              <a:buNone/>
+            </a:pPr>
+            <a:r>
+              <a:rPr lang="en-US" sz="1100" dirty="0">
+                <a:solidFill>
+                  <a:srgbClr val="333333"/>
+                </a:solidFill>
+                <a:latin typeface="Malgun Gothic" pitchFamily="34" charset="0"/>
+                <a:ea typeface="Malgun Gothic" pitchFamily="34" charset="-122"/>
+                <a:cs typeface="Malgun Gothic" pitchFamily="34" charset="-120"/>
+              </a:rPr>
+              <a:t>실제로 처리된 양 = 요금이 매겨지는 값</a:t>
+            </a:r>
+            <a:endParaRPr lang="en-US" sz="1100" dirty="0"/>
+          </a:p>
+          <a:p>
+            <a:pPr marL="0" indent="0">
+              <a:lnSpc>
+                <a:spcPct val="130000"/>
+              </a:lnSpc>
+              <a:buNone/>
+            </a:pPr>
+            <a:r>
+              <a:rPr lang="en-US" sz="1100" dirty="0">
+                <a:solidFill>
+                  <a:srgbClr val="333333"/>
+                </a:solidFill>
+                <a:latin typeface="Malgun Gothic" pitchFamily="34" charset="0"/>
+                <a:ea typeface="Malgun Gothic" pitchFamily="34" charset="-122"/>
+                <a:cs typeface="Malgun Gothic" pitchFamily="34" charset="-120"/>
+              </a:rPr>
+              <a:t>실패한 호출에는 없다</a:t>
+            </a:r>
+            <a:endParaRPr lang="en-US" sz="1100" dirty="0"/>
+          </a:p>
+        </p:txBody>
+      </p:sp>
+      <p:sp>
+        <p:nvSpPr>
+          <p:cNvPr id="9" name="Shape 7"/>
+          <p:cNvSpPr/>
+          <p:nvPr/>
+        </p:nvSpPr>
+        <p:spPr>
+          <a:xfrm>
+            <a:off x="4206240" y="1591056"/>
+            <a:ext cx="3657600" cy="1298448"/>
+          </a:xfrm>
+          <a:prstGeom prst="roundRect">
+            <a:avLst>
+              <a:gd name="adj" fmla="val 3704"/>
+            </a:avLst>
+          </a:prstGeom>
+          <a:solidFill>
+            <a:srgbClr val="FFFFFF"/>
+          </a:solidFill>
+          <a:ln w="12700">
+            <a:solidFill>
+              <a:srgbClr val="B7CDE2"/>
+            </a:solidFill>
+            <a:prstDash val="solid"/>
+          </a:ln>
+        </p:spPr>
+        <p:txBody>
+          <a:bodyPr/>
+          <a:lstStyle/>
+          <a:p>
+            <a:endParaRPr lang="ko-KR" altLang="en-US"/>
+          </a:p>
+        </p:txBody>
+      </p:sp>
+      <p:sp>
+        <p:nvSpPr>
+          <p:cNvPr id="10" name="Text 8"/>
+          <p:cNvSpPr/>
+          <p:nvPr/>
+        </p:nvSpPr>
+        <p:spPr>
+          <a:xfrm>
+            <a:off x="4370832" y="1682496"/>
+            <a:ext cx="3346704" cy="256032"/>
+          </a:xfrm>
+          <a:prstGeom prst="rect">
+            <a:avLst/>
+          </a:prstGeom>
+          <a:noFill/>
+          <a:ln/>
+        </p:spPr>
+        <p:txBody>
+          <a:bodyPr wrap="square" lIns="0" tIns="0" rIns="0" bIns="0" rtlCol="0" anchor="ctr"/>
+          <a:lstStyle/>
+          <a:p>
+            <a:pPr marL="0" indent="0">
+              <a:buNone/>
+            </a:pPr>
+            <a:r>
+              <a:rPr lang="en-US" sz="1400" b="1" dirty="0">
+                <a:solidFill>
+                  <a:srgbClr val="1F456E"/>
+                </a:solidFill>
+                <a:latin typeface="Malgun Gothic" pitchFamily="34" charset="0"/>
+                <a:ea typeface="Malgun Gothic" pitchFamily="34" charset="-122"/>
+                <a:cs typeface="Malgun Gothic" pitchFamily="34" charset="-120"/>
+              </a:rPr>
+              <a:t>②  호출이 거부되면 (429)</a:t>
+            </a:r>
+            <a:endParaRPr lang="en-US" sz="1400" dirty="0"/>
+          </a:p>
+        </p:txBody>
+      </p:sp>
+      <p:sp>
+        <p:nvSpPr>
+          <p:cNvPr id="11" name="Text 9"/>
+          <p:cNvSpPr/>
+          <p:nvPr/>
+        </p:nvSpPr>
+        <p:spPr>
+          <a:xfrm>
+            <a:off x="4370832" y="1947672"/>
+            <a:ext cx="3346704" cy="237744"/>
+          </a:xfrm>
+          <a:prstGeom prst="rect">
+            <a:avLst/>
+          </a:prstGeom>
+          <a:noFill/>
+          <a:ln/>
+        </p:spPr>
+        <p:txBody>
+          <a:bodyPr wrap="square" lIns="0" tIns="0" rIns="0" bIns="0" rtlCol="0" anchor="ctr"/>
+          <a:lstStyle/>
+          <a:p>
+            <a:pPr marL="0" indent="0">
+              <a:buNone/>
+            </a:pPr>
+            <a:r>
+              <a:rPr lang="en-US" sz="1150" b="1" dirty="0">
+                <a:solidFill>
+                  <a:srgbClr val="C03A2B"/>
+                </a:solidFill>
+                <a:latin typeface="Malgun Gothic" pitchFamily="34" charset="0"/>
+                <a:ea typeface="Malgun Gothic" pitchFamily="34" charset="-122"/>
+                <a:cs typeface="Malgun Gothic" pitchFamily="34" charset="-120"/>
+              </a:rPr>
+              <a:t>에러 메시지가 숫자를 알려준다</a:t>
+            </a:r>
+            <a:endParaRPr lang="en-US" sz="1150" dirty="0"/>
+          </a:p>
+        </p:txBody>
+      </p:sp>
+      <p:sp>
+        <p:nvSpPr>
+          <p:cNvPr id="12" name="Text 10"/>
+          <p:cNvSpPr/>
+          <p:nvPr/>
+        </p:nvSpPr>
+        <p:spPr>
+          <a:xfrm>
+            <a:off x="4370832" y="2231136"/>
+            <a:ext cx="3364992" cy="768096"/>
+          </a:xfrm>
+          <a:prstGeom prst="rect">
+            <a:avLst/>
+          </a:prstGeom>
+          <a:noFill/>
+          <a:ln/>
+        </p:spPr>
+        <p:txBody>
+          <a:bodyPr wrap="square" lIns="0" tIns="0" rIns="0" bIns="0" rtlCol="0" anchor="t"/>
+          <a:lstStyle/>
+          <a:p>
+            <a:pPr marL="0" indent="0">
+              <a:lnSpc>
+                <a:spcPct val="130000"/>
+              </a:lnSpc>
+              <a:buNone/>
+            </a:pPr>
+            <a:r>
+              <a:rPr lang="en-US" sz="1100" dirty="0">
+                <a:solidFill>
+                  <a:srgbClr val="333333"/>
+                </a:solidFill>
+                <a:latin typeface="Malgun Gothic" pitchFamily="34" charset="0"/>
+                <a:ea typeface="Malgun Gothic" pitchFamily="34" charset="-122"/>
+                <a:cs typeface="Malgun Gothic" pitchFamily="34" charset="-120"/>
+              </a:rPr>
+              <a:t>한도 · 이미 쓴 양 · 이번 요청량 · 대기 시간</a:t>
+            </a:r>
+            <a:endParaRPr lang="en-US" sz="1100" dirty="0"/>
+          </a:p>
+          <a:p>
+            <a:pPr marL="0" indent="0">
+              <a:lnSpc>
+                <a:spcPct val="130000"/>
+              </a:lnSpc>
+              <a:buNone/>
+            </a:pPr>
+            <a:r>
+              <a:rPr lang="en-US" sz="1100" dirty="0">
+                <a:solidFill>
+                  <a:srgbClr val="333333"/>
+                </a:solidFill>
+                <a:latin typeface="Malgun Gothic" pitchFamily="34" charset="0"/>
+                <a:ea typeface="Malgun Gothic" pitchFamily="34" charset="-122"/>
+                <a:cs typeface="Malgun Gothic" pitchFamily="34" charset="-120"/>
+              </a:rPr>
+              <a:t>OpenAI가 직접 센 값</a:t>
+            </a:r>
+            <a:endParaRPr lang="en-US" sz="1100" dirty="0"/>
+          </a:p>
+          <a:p>
+            <a:pPr marL="0" indent="0">
+              <a:lnSpc>
+                <a:spcPct val="130000"/>
+              </a:lnSpc>
+              <a:buNone/>
+            </a:pPr>
+            <a:r>
+              <a:rPr lang="en-US" sz="1100" dirty="0">
+                <a:solidFill>
+                  <a:srgbClr val="333333"/>
+                </a:solidFill>
+                <a:latin typeface="Malgun Gothic" pitchFamily="34" charset="0"/>
+                <a:ea typeface="Malgun Gothic" pitchFamily="34" charset="-122"/>
+                <a:cs typeface="Malgun Gothic" pitchFamily="34" charset="-120"/>
+              </a:rPr>
+              <a:t>앞 페이지 숫자의 출처가 바로 여기</a:t>
+            </a:r>
+            <a:endParaRPr lang="en-US" sz="1100" dirty="0"/>
+          </a:p>
+        </p:txBody>
+      </p:sp>
+      <p:sp>
+        <p:nvSpPr>
+          <p:cNvPr id="13" name="Shape 11"/>
+          <p:cNvSpPr/>
+          <p:nvPr/>
+        </p:nvSpPr>
+        <p:spPr>
+          <a:xfrm>
+            <a:off x="7991856" y="1591056"/>
+            <a:ext cx="3657600" cy="1298448"/>
+          </a:xfrm>
+          <a:prstGeom prst="roundRect">
+            <a:avLst>
+              <a:gd name="adj" fmla="val 3704"/>
+            </a:avLst>
+          </a:prstGeom>
+          <a:solidFill>
+            <a:srgbClr val="FFFFFF"/>
+          </a:solidFill>
+          <a:ln w="12700">
+            <a:solidFill>
+              <a:srgbClr val="B7CDE2"/>
+            </a:solidFill>
+            <a:prstDash val="solid"/>
+          </a:ln>
+        </p:spPr>
+        <p:txBody>
+          <a:bodyPr/>
+          <a:lstStyle/>
+          <a:p>
+            <a:endParaRPr lang="ko-KR" altLang="en-US"/>
+          </a:p>
+        </p:txBody>
+      </p:sp>
+      <p:sp>
+        <p:nvSpPr>
+          <p:cNvPr id="14" name="Text 12"/>
+          <p:cNvSpPr/>
+          <p:nvPr/>
+        </p:nvSpPr>
+        <p:spPr>
+          <a:xfrm>
+            <a:off x="8156448" y="1682496"/>
+            <a:ext cx="3346704" cy="256032"/>
+          </a:xfrm>
+          <a:prstGeom prst="rect">
+            <a:avLst/>
+          </a:prstGeom>
+          <a:noFill/>
+          <a:ln/>
+        </p:spPr>
+        <p:txBody>
+          <a:bodyPr wrap="square" lIns="0" tIns="0" rIns="0" bIns="0" rtlCol="0" anchor="ctr"/>
+          <a:lstStyle/>
+          <a:p>
+            <a:pPr marL="0" indent="0">
+              <a:buNone/>
+            </a:pPr>
+            <a:r>
+              <a:rPr lang="en-US" sz="1400" b="1" dirty="0">
+                <a:solidFill>
+                  <a:srgbClr val="1F456E"/>
+                </a:solidFill>
+                <a:latin typeface="Malgun Gothic" pitchFamily="34" charset="0"/>
+                <a:ea typeface="Malgun Gothic" pitchFamily="34" charset="-122"/>
+                <a:cs typeface="Malgun Gothic" pitchFamily="34" charset="-120"/>
+              </a:rPr>
+              <a:t>③  성공이든 실패든</a:t>
+            </a:r>
+            <a:endParaRPr lang="en-US" sz="1400" dirty="0"/>
+          </a:p>
+        </p:txBody>
+      </p:sp>
+      <p:sp>
+        <p:nvSpPr>
+          <p:cNvPr id="15" name="Text 13"/>
+          <p:cNvSpPr/>
+          <p:nvPr/>
+        </p:nvSpPr>
+        <p:spPr>
+          <a:xfrm>
+            <a:off x="8156448" y="1947672"/>
+            <a:ext cx="3346704" cy="237744"/>
+          </a:xfrm>
+          <a:prstGeom prst="rect">
+            <a:avLst/>
+          </a:prstGeom>
+          <a:noFill/>
+          <a:ln/>
+        </p:spPr>
+        <p:txBody>
+          <a:bodyPr wrap="square" lIns="0" tIns="0" rIns="0" bIns="0" rtlCol="0" anchor="ctr"/>
+          <a:lstStyle/>
+          <a:p>
+            <a:pPr marL="0" indent="0">
+              <a:buNone/>
+            </a:pPr>
+            <a:r>
+              <a:rPr lang="en-US" sz="1150" b="1" dirty="0">
+                <a:solidFill>
+                  <a:srgbClr val="1F456E"/>
+                </a:solidFill>
+                <a:latin typeface="Malgun Gothic" pitchFamily="34" charset="0"/>
+                <a:ea typeface="Malgun Gothic" pitchFamily="34" charset="-122"/>
+                <a:cs typeface="Malgun Gothic" pitchFamily="34" charset="-120"/>
+              </a:rPr>
+              <a:t>응답 헤더에 남은 여유가 온다</a:t>
+            </a:r>
+            <a:endParaRPr lang="en-US" sz="1150" dirty="0"/>
+          </a:p>
+        </p:txBody>
+      </p:sp>
+      <p:sp>
+        <p:nvSpPr>
+          <p:cNvPr id="16" name="Text 14"/>
+          <p:cNvSpPr/>
+          <p:nvPr/>
+        </p:nvSpPr>
+        <p:spPr>
+          <a:xfrm>
+            <a:off x="8156448" y="2231136"/>
+            <a:ext cx="3364992" cy="768096"/>
+          </a:xfrm>
+          <a:prstGeom prst="rect">
+            <a:avLst/>
+          </a:prstGeom>
+          <a:noFill/>
+          <a:ln/>
+        </p:spPr>
+        <p:txBody>
+          <a:bodyPr wrap="square" lIns="0" tIns="0" rIns="0" bIns="0" rtlCol="0" anchor="t"/>
+          <a:lstStyle/>
+          <a:p>
+            <a:pPr marL="0" indent="0">
+              <a:lnSpc>
+                <a:spcPct val="130000"/>
+              </a:lnSpc>
+              <a:buNone/>
+            </a:pPr>
+            <a:r>
+              <a:rPr lang="en-US" sz="1100" dirty="0">
+                <a:solidFill>
+                  <a:srgbClr val="333333"/>
+                </a:solidFill>
+                <a:latin typeface="Malgun Gothic" pitchFamily="34" charset="0"/>
+                <a:ea typeface="Malgun Gothic" pitchFamily="34" charset="-122"/>
+                <a:cs typeface="Malgun Gothic" pitchFamily="34" charset="-120"/>
+              </a:rPr>
+              <a:t>이번 분에 아직 쓸 수 있는 토큰 양</a:t>
+            </a:r>
+            <a:endParaRPr lang="en-US" sz="1100" dirty="0"/>
+          </a:p>
+          <a:p>
+            <a:pPr marL="0" indent="0">
+              <a:lnSpc>
+                <a:spcPct val="130000"/>
+              </a:lnSpc>
+              <a:buNone/>
+            </a:pPr>
+            <a:r>
+              <a:rPr lang="en-US" sz="1100" dirty="0">
+                <a:solidFill>
+                  <a:srgbClr val="333333"/>
+                </a:solidFill>
+                <a:latin typeface="Malgun Gothic" pitchFamily="34" charset="0"/>
+                <a:ea typeface="Malgun Gothic" pitchFamily="34" charset="-122"/>
+                <a:cs typeface="Malgun Gothic" pitchFamily="34" charset="-120"/>
+              </a:rPr>
+              <a:t>터지기 전에 미리 볼 수 있는 유일한 값</a:t>
+            </a:r>
+            <a:endParaRPr lang="en-US" sz="1100" dirty="0"/>
+          </a:p>
+          <a:p>
+            <a:pPr marL="0" indent="0">
+              <a:lnSpc>
+                <a:spcPct val="130000"/>
+              </a:lnSpc>
+              <a:buNone/>
+            </a:pPr>
+            <a:r>
+              <a:rPr lang="en-US" sz="1100" dirty="0">
+                <a:solidFill>
+                  <a:srgbClr val="333333"/>
+                </a:solidFill>
+                <a:latin typeface="Malgun Gothic" pitchFamily="34" charset="0"/>
+                <a:ea typeface="Malgun Gothic" pitchFamily="34" charset="-122"/>
+                <a:cs typeface="Malgun Gothic" pitchFamily="34" charset="-120"/>
+              </a:rPr>
+              <a:t>본문이 아니라 헤더라 따로 읽어야 한다</a:t>
+            </a:r>
+            <a:endParaRPr lang="en-US" sz="1100" dirty="0"/>
+          </a:p>
+        </p:txBody>
+      </p:sp>
+      <p:sp>
+        <p:nvSpPr>
+          <p:cNvPr id="17" name="Text 15"/>
+          <p:cNvSpPr/>
+          <p:nvPr/>
+        </p:nvSpPr>
+        <p:spPr>
+          <a:xfrm>
+            <a:off x="420624" y="3218688"/>
+            <a:ext cx="6583680" cy="274320"/>
+          </a:xfrm>
+          <a:prstGeom prst="rect">
+            <a:avLst/>
+          </a:prstGeom>
+          <a:noFill/>
+          <a:ln/>
+        </p:spPr>
+        <p:txBody>
+          <a:bodyPr wrap="square" lIns="0" tIns="0" rIns="0" bIns="0" rtlCol="0" anchor="ctr"/>
+          <a:lstStyle/>
+          <a:p>
+            <a:pPr marL="0" indent="0">
+              <a:buNone/>
+            </a:pPr>
+            <a:r>
+              <a:rPr lang="en-US" sz="1600" b="1" dirty="0">
+                <a:solidFill>
+                  <a:srgbClr val="1F456E"/>
+                </a:solidFill>
+                <a:latin typeface="Malgun Gothic" pitchFamily="34" charset="0"/>
+                <a:ea typeface="Malgun Gothic" pitchFamily="34" charset="-122"/>
+                <a:cs typeface="Malgun Gothic" pitchFamily="34" charset="-120"/>
+              </a:rPr>
+              <a:t>429 메시지 하나로 앞 페이지 숫자가 전부 검산된다</a:t>
+            </a:r>
+            <a:endParaRPr lang="en-US" sz="1600" dirty="0"/>
+          </a:p>
+        </p:txBody>
+      </p:sp>
+      <p:sp>
+        <p:nvSpPr>
+          <p:cNvPr id="18" name="Text 16"/>
+          <p:cNvSpPr/>
+          <p:nvPr/>
+        </p:nvSpPr>
+        <p:spPr>
+          <a:xfrm>
+            <a:off x="5705856" y="3145536"/>
+            <a:ext cx="5943600" cy="329184"/>
+          </a:xfrm>
+          <a:prstGeom prst="rect">
+            <a:avLst/>
+          </a:prstGeom>
+          <a:noFill/>
+          <a:ln/>
+        </p:spPr>
+        <p:txBody>
+          <a:bodyPr wrap="square" lIns="0" tIns="0" rIns="0" bIns="0" rtlCol="0" anchor="ctr"/>
+          <a:lstStyle/>
+          <a:p>
+            <a:pPr marL="0" indent="0" algn="r">
+              <a:buNone/>
+            </a:pPr>
+            <a:r>
+              <a:rPr lang="en-US" sz="1000" i="1" dirty="0">
+                <a:solidFill>
+                  <a:srgbClr val="595959"/>
+                </a:solidFill>
+                <a:latin typeface="Malgun Gothic" pitchFamily="34" charset="0"/>
+                <a:ea typeface="Malgun Gothic" pitchFamily="34" charset="-122"/>
+                <a:cs typeface="Malgun Gothic" pitchFamily="34" charset="-120"/>
+              </a:rPr>
+              <a:t>※ 아래는 실측 수치를 429 응답 형식에 </a:t>
+            </a:r>
+            <a:r>
+              <a:rPr lang="en-US" sz="1000" i="1" dirty="0" err="1">
+                <a:solidFill>
+                  <a:srgbClr val="595959"/>
+                </a:solidFill>
+                <a:latin typeface="Malgun Gothic" pitchFamily="34" charset="0"/>
+                <a:ea typeface="Malgun Gothic" pitchFamily="34" charset="-122"/>
+                <a:cs typeface="Malgun Gothic" pitchFamily="34" charset="-120"/>
+              </a:rPr>
+              <a:t>대입한</a:t>
+            </a:r>
+            <a:r>
+              <a:rPr lang="en-US" sz="1000" i="1" dirty="0">
+                <a:solidFill>
+                  <a:srgbClr val="595959"/>
+                </a:solidFill>
+                <a:latin typeface="Malgun Gothic" pitchFamily="34" charset="0"/>
+                <a:ea typeface="Malgun Gothic" pitchFamily="34" charset="-122"/>
+                <a:cs typeface="Malgun Gothic" pitchFamily="34" charset="-120"/>
+              </a:rPr>
+              <a:t> </a:t>
+            </a:r>
+            <a:r>
+              <a:rPr lang="en-US" sz="1000" i="1" dirty="0" err="1">
+                <a:solidFill>
+                  <a:srgbClr val="595959"/>
+                </a:solidFill>
+                <a:latin typeface="Malgun Gothic" pitchFamily="34" charset="0"/>
+                <a:ea typeface="Malgun Gothic" pitchFamily="34" charset="-122"/>
+                <a:cs typeface="Malgun Gothic" pitchFamily="34" charset="-120"/>
+              </a:rPr>
+              <a:t>재구성</a:t>
+            </a:r>
+            <a:r>
+              <a:rPr lang="en-US" sz="1000" i="1" dirty="0">
+                <a:solidFill>
+                  <a:srgbClr val="595959"/>
+                </a:solidFill>
+                <a:latin typeface="Malgun Gothic" pitchFamily="34" charset="0"/>
+                <a:ea typeface="Malgun Gothic" pitchFamily="34" charset="-122"/>
+                <a:cs typeface="Malgun Gothic" pitchFamily="34" charset="-120"/>
+              </a:rPr>
+              <a:t>. </a:t>
+            </a:r>
+            <a:r>
+              <a:rPr lang="ko-KR" altLang="en-US" sz="1000" dirty="0" err="1"/>
+              <a:t>티어에</a:t>
+            </a:r>
+            <a:r>
+              <a:rPr lang="ko-KR" altLang="en-US" sz="1000" dirty="0"/>
+              <a:t> 따라 다름</a:t>
+            </a:r>
+            <a:r>
+              <a:rPr lang="en-US" altLang="ko-KR" sz="1000" dirty="0"/>
+              <a:t>. </a:t>
+            </a:r>
+            <a:br>
+              <a:rPr lang="en-US" altLang="ko-KR" sz="1000" dirty="0"/>
+            </a:br>
+            <a:r>
+              <a:rPr lang="ko-KR" altLang="ko-KR" sz="1000" i="1" dirty="0" err="1">
+                <a:solidFill>
+                  <a:srgbClr val="595959"/>
+                </a:solidFill>
+                <a:latin typeface="Malgun Gothic" pitchFamily="34" charset="0"/>
+                <a:ea typeface="Malgun Gothic" pitchFamily="34" charset="-122"/>
+              </a:rPr>
+              <a:t>OpenAI의</a:t>
+            </a:r>
+            <a:r>
+              <a:rPr lang="ko-KR" altLang="ko-KR" sz="1000" i="1" dirty="0">
+                <a:solidFill>
+                  <a:srgbClr val="595959"/>
+                </a:solidFill>
+                <a:latin typeface="Malgun Gothic" pitchFamily="34" charset="0"/>
+                <a:ea typeface="Malgun Gothic" pitchFamily="34" charset="-122"/>
+              </a:rPr>
+              <a:t> </a:t>
+            </a:r>
+            <a:r>
+              <a:rPr lang="ko-KR" altLang="ko-KR" sz="1000" i="1" dirty="0" err="1">
+                <a:solidFill>
+                  <a:srgbClr val="595959"/>
+                </a:solidFill>
+                <a:latin typeface="Malgun Gothic" pitchFamily="34" charset="0"/>
+                <a:ea typeface="Malgun Gothic" pitchFamily="34" charset="-122"/>
+              </a:rPr>
+              <a:t>티어는</a:t>
+            </a:r>
+            <a:r>
+              <a:rPr lang="ko-KR" altLang="ko-KR" sz="1000" i="1" dirty="0">
+                <a:solidFill>
+                  <a:srgbClr val="595959"/>
+                </a:solidFill>
+                <a:latin typeface="Malgun Gothic" pitchFamily="34" charset="0"/>
+                <a:ea typeface="Malgun Gothic" pitchFamily="34" charset="-122"/>
+              </a:rPr>
+              <a:t> "누적 </a:t>
+            </a:r>
+            <a:r>
+              <a:rPr lang="ko-KR" altLang="ko-KR" sz="1000" i="1" dirty="0" err="1">
+                <a:solidFill>
+                  <a:srgbClr val="595959"/>
+                </a:solidFill>
+                <a:latin typeface="Malgun Gothic" pitchFamily="34" charset="0"/>
+                <a:ea typeface="Malgun Gothic" pitchFamily="34" charset="-122"/>
+              </a:rPr>
+              <a:t>결제액"과</a:t>
+            </a:r>
+            <a:r>
+              <a:rPr lang="ko-KR" altLang="ko-KR" sz="1000" i="1" dirty="0">
+                <a:solidFill>
+                  <a:srgbClr val="595959"/>
+                </a:solidFill>
+                <a:latin typeface="Malgun Gothic" pitchFamily="34" charset="0"/>
+                <a:ea typeface="Malgun Gothic" pitchFamily="34" charset="-122"/>
+              </a:rPr>
+              <a:t> "첫 결제 이후 경과일" 두 조건을 모두 충족해야 올라</a:t>
+            </a:r>
+            <a:r>
+              <a:rPr lang="ko-KR" altLang="en-US" sz="1000" i="1" dirty="0">
+                <a:solidFill>
+                  <a:srgbClr val="595959"/>
+                </a:solidFill>
+                <a:latin typeface="Malgun Gothic" pitchFamily="34" charset="0"/>
+                <a:ea typeface="Malgun Gothic" pitchFamily="34" charset="-122"/>
+              </a:rPr>
+              <a:t>간다</a:t>
+            </a:r>
+            <a:r>
+              <a:rPr lang="en-US" altLang="ko-KR" sz="1000" dirty="0"/>
+              <a:t>.</a:t>
+            </a:r>
+            <a:endParaRPr lang="en-US" sz="1000" dirty="0"/>
+          </a:p>
+        </p:txBody>
+      </p:sp>
+      <p:sp>
+        <p:nvSpPr>
+          <p:cNvPr id="19" name="Shape 17"/>
+          <p:cNvSpPr/>
+          <p:nvPr/>
+        </p:nvSpPr>
+        <p:spPr>
+          <a:xfrm>
+            <a:off x="420624" y="3547872"/>
+            <a:ext cx="11228832" cy="1261872"/>
+          </a:xfrm>
+          <a:prstGeom prst="roundRect">
+            <a:avLst>
+              <a:gd name="adj" fmla="val 3623"/>
+            </a:avLst>
+          </a:prstGeom>
+          <a:solidFill>
+            <a:srgbClr val="E9EEF2"/>
+          </a:solidFill>
+          <a:ln w="12700">
+            <a:solidFill>
+              <a:srgbClr val="B7CDE2"/>
+            </a:solidFill>
+            <a:prstDash val="solid"/>
+          </a:ln>
+        </p:spPr>
+        <p:txBody>
+          <a:bodyPr/>
+          <a:lstStyle/>
+          <a:p>
+            <a:endParaRPr lang="ko-KR" altLang="en-US"/>
+          </a:p>
+        </p:txBody>
+      </p:sp>
+      <p:sp>
+        <p:nvSpPr>
+          <p:cNvPr id="20" name="Text 18"/>
+          <p:cNvSpPr/>
+          <p:nvPr/>
+        </p:nvSpPr>
+        <p:spPr>
+          <a:xfrm>
+            <a:off x="731520" y="3657600"/>
+            <a:ext cx="2468880" cy="219456"/>
+          </a:xfrm>
+          <a:prstGeom prst="rect">
+            <a:avLst/>
+          </a:prstGeom>
+          <a:noFill/>
+          <a:ln/>
+        </p:spPr>
+        <p:txBody>
+          <a:bodyPr wrap="square" lIns="0" tIns="0" rIns="0" bIns="0" rtlCol="0" anchor="ctr"/>
+          <a:lstStyle/>
+          <a:p>
+            <a:pPr marL="0" indent="0">
+              <a:buNone/>
+            </a:pPr>
+            <a:r>
+              <a:rPr lang="en-US" sz="1050" dirty="0">
+                <a:solidFill>
+                  <a:srgbClr val="595959"/>
+                </a:solidFill>
+                <a:latin typeface="Malgun Gothic" pitchFamily="34" charset="0"/>
+                <a:ea typeface="Malgun Gothic" pitchFamily="34" charset="-122"/>
+                <a:cs typeface="Malgun Gothic" pitchFamily="34" charset="-120"/>
+              </a:rPr>
+              <a:t>1분 한도</a:t>
+            </a:r>
+            <a:endParaRPr lang="en-US" sz="1050" dirty="0"/>
+          </a:p>
+        </p:txBody>
+      </p:sp>
+      <p:sp>
+        <p:nvSpPr>
+          <p:cNvPr id="21" name="Text 19"/>
+          <p:cNvSpPr/>
+          <p:nvPr/>
+        </p:nvSpPr>
+        <p:spPr>
+          <a:xfrm>
+            <a:off x="731520" y="3858768"/>
+            <a:ext cx="2468880" cy="365760"/>
+          </a:xfrm>
+          <a:prstGeom prst="rect">
+            <a:avLst/>
+          </a:prstGeom>
+          <a:noFill/>
+          <a:ln/>
+        </p:spPr>
+        <p:txBody>
+          <a:bodyPr wrap="square" lIns="0" tIns="0" rIns="0" bIns="0" rtlCol="0" anchor="ctr"/>
+          <a:lstStyle/>
+          <a:p>
+            <a:pPr marL="0" indent="0">
+              <a:buNone/>
+            </a:pPr>
+            <a:r>
+              <a:rPr lang="en-US" sz="2400" b="1" dirty="0">
+                <a:solidFill>
+                  <a:srgbClr val="1F456E"/>
+                </a:solidFill>
+                <a:latin typeface="Malgun Gothic" pitchFamily="34" charset="0"/>
+                <a:ea typeface="Malgun Gothic" pitchFamily="34" charset="-122"/>
+                <a:cs typeface="Malgun Gothic" pitchFamily="34" charset="-120"/>
+              </a:rPr>
+              <a:t>30,000</a:t>
+            </a:r>
+            <a:endParaRPr lang="en-US" sz="2400" dirty="0"/>
+          </a:p>
+        </p:txBody>
+      </p:sp>
+      <p:sp>
+        <p:nvSpPr>
+          <p:cNvPr id="22" name="Text 20"/>
+          <p:cNvSpPr/>
+          <p:nvPr/>
+        </p:nvSpPr>
+        <p:spPr>
+          <a:xfrm>
+            <a:off x="3383280" y="3657600"/>
+            <a:ext cx="2468880" cy="219456"/>
+          </a:xfrm>
+          <a:prstGeom prst="rect">
+            <a:avLst/>
+          </a:prstGeom>
+          <a:noFill/>
+          <a:ln/>
+        </p:spPr>
+        <p:txBody>
+          <a:bodyPr wrap="square" lIns="0" tIns="0" rIns="0" bIns="0" rtlCol="0" anchor="ctr"/>
+          <a:lstStyle/>
+          <a:p>
+            <a:pPr marL="0" indent="0">
+              <a:buNone/>
+            </a:pPr>
+            <a:r>
+              <a:rPr lang="en-US" sz="1050" dirty="0">
+                <a:solidFill>
+                  <a:srgbClr val="595959"/>
+                </a:solidFill>
+                <a:latin typeface="Malgun Gothic" pitchFamily="34" charset="0"/>
+                <a:ea typeface="Malgun Gothic" pitchFamily="34" charset="-122"/>
+                <a:cs typeface="Malgun Gothic" pitchFamily="34" charset="-120"/>
+              </a:rPr>
+              <a:t>이미 쓴 양 (핵심 평가)</a:t>
+            </a:r>
+            <a:endParaRPr lang="en-US" sz="1050" dirty="0"/>
+          </a:p>
+        </p:txBody>
+      </p:sp>
+      <p:sp>
+        <p:nvSpPr>
+          <p:cNvPr id="23" name="Text 21"/>
+          <p:cNvSpPr/>
+          <p:nvPr/>
+        </p:nvSpPr>
+        <p:spPr>
+          <a:xfrm>
+            <a:off x="3383280" y="3858768"/>
+            <a:ext cx="2468880" cy="365760"/>
+          </a:xfrm>
+          <a:prstGeom prst="rect">
+            <a:avLst/>
+          </a:prstGeom>
+          <a:noFill/>
+          <a:ln/>
+        </p:spPr>
+        <p:txBody>
+          <a:bodyPr wrap="square" lIns="0" tIns="0" rIns="0" bIns="0" rtlCol="0" anchor="ctr"/>
+          <a:lstStyle/>
+          <a:p>
+            <a:pPr marL="0" indent="0">
+              <a:buNone/>
+            </a:pPr>
+            <a:r>
+              <a:rPr lang="en-US" sz="2400" b="1" dirty="0">
+                <a:solidFill>
+                  <a:srgbClr val="1F456E"/>
+                </a:solidFill>
+                <a:latin typeface="Malgun Gothic" pitchFamily="34" charset="0"/>
+                <a:ea typeface="Malgun Gothic" pitchFamily="34" charset="-122"/>
+                <a:cs typeface="Malgun Gothic" pitchFamily="34" charset="-120"/>
+              </a:rPr>
+              <a:t>11,668</a:t>
+            </a:r>
+            <a:endParaRPr lang="en-US" sz="2400" dirty="0"/>
+          </a:p>
+        </p:txBody>
+      </p:sp>
+      <p:sp>
+        <p:nvSpPr>
+          <p:cNvPr id="24" name="Text 22"/>
+          <p:cNvSpPr/>
+          <p:nvPr/>
+        </p:nvSpPr>
+        <p:spPr>
+          <a:xfrm>
+            <a:off x="6035040" y="3657600"/>
+            <a:ext cx="2468880" cy="219456"/>
+          </a:xfrm>
+          <a:prstGeom prst="rect">
+            <a:avLst/>
+          </a:prstGeom>
+          <a:noFill/>
+          <a:ln/>
+        </p:spPr>
+        <p:txBody>
+          <a:bodyPr wrap="square" lIns="0" tIns="0" rIns="0" bIns="0" rtlCol="0" anchor="ctr"/>
+          <a:lstStyle/>
+          <a:p>
+            <a:pPr marL="0" indent="0">
+              <a:buNone/>
+            </a:pPr>
+            <a:r>
+              <a:rPr lang="en-US" sz="1050" dirty="0">
+                <a:solidFill>
+                  <a:srgbClr val="595959"/>
+                </a:solidFill>
+                <a:latin typeface="Malgun Gothic" pitchFamily="34" charset="0"/>
+                <a:ea typeface="Malgun Gothic" pitchFamily="34" charset="-122"/>
+                <a:cs typeface="Malgun Gothic" pitchFamily="34" charset="-120"/>
+              </a:rPr>
+              <a:t>이번 요청 (웹검색)</a:t>
+            </a:r>
+            <a:endParaRPr lang="en-US" sz="1050" dirty="0"/>
+          </a:p>
+        </p:txBody>
+      </p:sp>
+      <p:sp>
+        <p:nvSpPr>
+          <p:cNvPr id="25" name="Text 23"/>
+          <p:cNvSpPr/>
+          <p:nvPr/>
+        </p:nvSpPr>
+        <p:spPr>
+          <a:xfrm>
+            <a:off x="6035040" y="3858768"/>
+            <a:ext cx="2468880" cy="365760"/>
+          </a:xfrm>
+          <a:prstGeom prst="rect">
+            <a:avLst/>
+          </a:prstGeom>
+          <a:noFill/>
+          <a:ln/>
+        </p:spPr>
+        <p:txBody>
+          <a:bodyPr wrap="square" lIns="0" tIns="0" rIns="0" bIns="0" rtlCol="0" anchor="ctr"/>
+          <a:lstStyle/>
+          <a:p>
+            <a:pPr marL="0" indent="0">
+              <a:buNone/>
+            </a:pPr>
+            <a:r>
+              <a:rPr lang="en-US" sz="2400" b="1" dirty="0">
+                <a:solidFill>
+                  <a:srgbClr val="E97132"/>
+                </a:solidFill>
+                <a:latin typeface="Malgun Gothic" pitchFamily="34" charset="0"/>
+                <a:ea typeface="Malgun Gothic" pitchFamily="34" charset="-122"/>
+                <a:cs typeface="Malgun Gothic" pitchFamily="34" charset="-120"/>
+              </a:rPr>
+              <a:t>18,845</a:t>
+            </a:r>
+            <a:endParaRPr lang="en-US" sz="2400" dirty="0"/>
+          </a:p>
+        </p:txBody>
+      </p:sp>
+      <p:sp>
+        <p:nvSpPr>
+          <p:cNvPr id="26" name="Text 24"/>
+          <p:cNvSpPr/>
+          <p:nvPr/>
+        </p:nvSpPr>
+        <p:spPr>
+          <a:xfrm>
+            <a:off x="8686800" y="3657600"/>
+            <a:ext cx="2468880" cy="219456"/>
+          </a:xfrm>
+          <a:prstGeom prst="rect">
+            <a:avLst/>
+          </a:prstGeom>
+          <a:noFill/>
+          <a:ln/>
+        </p:spPr>
+        <p:txBody>
+          <a:bodyPr wrap="square" lIns="0" tIns="0" rIns="0" bIns="0" rtlCol="0" anchor="ctr"/>
+          <a:lstStyle/>
+          <a:p>
+            <a:pPr marL="0" indent="0">
+              <a:buNone/>
+            </a:pPr>
+            <a:r>
+              <a:rPr lang="en-US" sz="1050" dirty="0">
+                <a:solidFill>
+                  <a:srgbClr val="595959"/>
+                </a:solidFill>
+                <a:latin typeface="Malgun Gothic" pitchFamily="34" charset="0"/>
+                <a:ea typeface="Malgun Gothic" pitchFamily="34" charset="-122"/>
+                <a:cs typeface="Malgun Gothic" pitchFamily="34" charset="-120"/>
+              </a:rPr>
+              <a:t>한도 초과분</a:t>
+            </a:r>
+            <a:endParaRPr lang="en-US" sz="1050" dirty="0"/>
+          </a:p>
+        </p:txBody>
+      </p:sp>
+      <p:sp>
+        <p:nvSpPr>
+          <p:cNvPr id="27" name="Text 25"/>
+          <p:cNvSpPr/>
+          <p:nvPr/>
+        </p:nvSpPr>
+        <p:spPr>
+          <a:xfrm>
+            <a:off x="8686800" y="3858768"/>
+            <a:ext cx="2468880" cy="365760"/>
+          </a:xfrm>
+          <a:prstGeom prst="rect">
+            <a:avLst/>
+          </a:prstGeom>
+          <a:noFill/>
+          <a:ln/>
+        </p:spPr>
+        <p:txBody>
+          <a:bodyPr wrap="square" lIns="0" tIns="0" rIns="0" bIns="0" rtlCol="0" anchor="ctr"/>
+          <a:lstStyle/>
+          <a:p>
+            <a:pPr marL="0" indent="0">
+              <a:buNone/>
+            </a:pPr>
+            <a:r>
+              <a:rPr lang="en-US" sz="2400" b="1" dirty="0">
+                <a:solidFill>
+                  <a:srgbClr val="C03A2B"/>
+                </a:solidFill>
+                <a:latin typeface="Malgun Gothic" pitchFamily="34" charset="0"/>
+                <a:ea typeface="Malgun Gothic" pitchFamily="34" charset="-122"/>
+                <a:cs typeface="Malgun Gothic" pitchFamily="34" charset="-120"/>
+              </a:rPr>
+              <a:t>513</a:t>
+            </a:r>
+            <a:endParaRPr lang="en-US" sz="2400" dirty="0"/>
+          </a:p>
+        </p:txBody>
+      </p:sp>
+      <p:sp>
+        <p:nvSpPr>
+          <p:cNvPr id="28" name="Text 26"/>
+          <p:cNvSpPr/>
+          <p:nvPr/>
+        </p:nvSpPr>
+        <p:spPr>
+          <a:xfrm>
+            <a:off x="731520" y="4297680"/>
+            <a:ext cx="10698480" cy="274320"/>
+          </a:xfrm>
+          <a:prstGeom prst="rect">
+            <a:avLst/>
+          </a:prstGeom>
+          <a:noFill/>
+          <a:ln/>
+        </p:spPr>
+        <p:txBody>
+          <a:bodyPr wrap="square" lIns="0" tIns="0" rIns="0" bIns="0" rtlCol="0" anchor="ctr"/>
+          <a:lstStyle/>
+          <a:p>
+            <a:pPr marL="0" indent="0">
+              <a:buNone/>
+            </a:pPr>
+            <a:r>
+              <a:rPr lang="en-US" sz="1350" dirty="0">
+                <a:solidFill>
+                  <a:srgbClr val="333333"/>
+                </a:solidFill>
+                <a:latin typeface="Malgun Gothic" pitchFamily="34" charset="0"/>
+                <a:ea typeface="Malgun Gothic" pitchFamily="34" charset="-122"/>
+                <a:cs typeface="Malgun Gothic" pitchFamily="34" charset="-120"/>
+              </a:rPr>
+              <a:t>1분에 30,000 = 1초에 500씩 회복된다.   따라서 초과분 513 ÷ 500 = </a:t>
+            </a:r>
+            <a:r>
+              <a:rPr lang="en-US" sz="1350" b="1" dirty="0">
+                <a:solidFill>
+                  <a:srgbClr val="3E9B6F"/>
+                </a:solidFill>
+                <a:latin typeface="Malgun Gothic" pitchFamily="34" charset="0"/>
+                <a:ea typeface="Malgun Gothic" pitchFamily="34" charset="-122"/>
+                <a:cs typeface="Malgun Gothic" pitchFamily="34" charset="-120"/>
+              </a:rPr>
+              <a:t>1.026초  —  에러가 알려준 대기 시간과 소수점까지 일치</a:t>
+            </a:r>
+            <a:endParaRPr lang="en-US" sz="1350" dirty="0"/>
+          </a:p>
+        </p:txBody>
+      </p:sp>
+      <p:sp>
+        <p:nvSpPr>
+          <p:cNvPr id="29" name="Text 27"/>
+          <p:cNvSpPr/>
+          <p:nvPr/>
+        </p:nvSpPr>
+        <p:spPr>
+          <a:xfrm>
+            <a:off x="731520" y="4553712"/>
+            <a:ext cx="10698480" cy="219456"/>
+          </a:xfrm>
+          <a:prstGeom prst="rect">
+            <a:avLst/>
+          </a:prstGeom>
+          <a:noFill/>
+          <a:ln/>
+        </p:spPr>
+        <p:txBody>
+          <a:bodyPr wrap="square" lIns="0" tIns="0" rIns="0" bIns="0" rtlCol="0" anchor="ctr"/>
+          <a:lstStyle/>
+          <a:p>
+            <a:pPr marL="0" indent="0">
+              <a:buNone/>
+            </a:pPr>
+            <a:r>
+              <a:rPr lang="en-US" sz="1100" dirty="0">
+                <a:solidFill>
+                  <a:srgbClr val="595959"/>
+                </a:solidFill>
+                <a:latin typeface="Malgun Gothic" pitchFamily="34" charset="0"/>
+                <a:ea typeface="Malgun Gothic" pitchFamily="34" charset="-122"/>
+                <a:cs typeface="Malgun Gothic" pitchFamily="34" charset="-120"/>
+              </a:rPr>
+              <a:t>→ 숫자를 우리가 짜맞춘 것이 아니라, OpenAI가 센 값끼리 맞아떨어진다는 뜻이다.</a:t>
+            </a:r>
+            <a:endParaRPr lang="en-US" sz="1100" dirty="0"/>
+          </a:p>
+        </p:txBody>
+      </p:sp>
+      <p:sp>
+        <p:nvSpPr>
+          <p:cNvPr id="30" name="Shape 28"/>
+          <p:cNvSpPr/>
+          <p:nvPr/>
+        </p:nvSpPr>
+        <p:spPr>
+          <a:xfrm>
+            <a:off x="420624" y="4937760"/>
+            <a:ext cx="5550408" cy="1005840"/>
+          </a:xfrm>
+          <a:prstGeom prst="roundRect">
+            <a:avLst>
+              <a:gd name="adj" fmla="val 5455"/>
+            </a:avLst>
+          </a:prstGeom>
+          <a:solidFill>
+            <a:srgbClr val="FFFFFF"/>
+          </a:solidFill>
+          <a:ln w="12700">
+            <a:solidFill>
+              <a:srgbClr val="B7CDE2"/>
+            </a:solidFill>
+            <a:prstDash val="solid"/>
+          </a:ln>
+        </p:spPr>
+        <p:txBody>
+          <a:bodyPr/>
+          <a:lstStyle/>
+          <a:p>
+            <a:endParaRPr lang="ko-KR" altLang="en-US"/>
+          </a:p>
+        </p:txBody>
+      </p:sp>
+      <p:sp>
+        <p:nvSpPr>
+          <p:cNvPr id="31" name="Text 29"/>
+          <p:cNvSpPr/>
+          <p:nvPr/>
+        </p:nvSpPr>
+        <p:spPr>
+          <a:xfrm>
+            <a:off x="585216" y="5001768"/>
+            <a:ext cx="5266944" cy="256032"/>
+          </a:xfrm>
+          <a:prstGeom prst="rect">
+            <a:avLst/>
+          </a:prstGeom>
+          <a:noFill/>
+          <a:ln/>
+        </p:spPr>
+        <p:txBody>
+          <a:bodyPr wrap="square" lIns="0" tIns="0" rIns="0" bIns="0" rtlCol="0" anchor="ctr"/>
+          <a:lstStyle/>
+          <a:p>
+            <a:pPr marL="0" indent="0">
+              <a:buNone/>
+            </a:pPr>
+            <a:r>
+              <a:rPr lang="en-US" sz="1300" b="1" dirty="0">
+                <a:solidFill>
+                  <a:srgbClr val="3E9B6F"/>
+                </a:solidFill>
+                <a:latin typeface="Malgun Gothic" pitchFamily="34" charset="0"/>
+                <a:ea typeface="Malgun Gothic" pitchFamily="34" charset="-122"/>
+                <a:cs typeface="Malgun Gothic" pitchFamily="34" charset="-120"/>
+              </a:rPr>
+              <a:t>확인 ①   이번 429의 원인은 '보낸 양' 하나뿐</a:t>
+            </a:r>
+            <a:endParaRPr lang="en-US" sz="1300" dirty="0"/>
+          </a:p>
+        </p:txBody>
+      </p:sp>
+      <p:sp>
+        <p:nvSpPr>
+          <p:cNvPr id="32" name="Text 30"/>
+          <p:cNvSpPr/>
+          <p:nvPr/>
+        </p:nvSpPr>
+        <p:spPr>
+          <a:xfrm>
+            <a:off x="585216" y="5266944"/>
+            <a:ext cx="5266944" cy="640080"/>
+          </a:xfrm>
+          <a:prstGeom prst="rect">
+            <a:avLst/>
+          </a:prstGeom>
+          <a:noFill/>
+          <a:ln/>
+        </p:spPr>
+        <p:txBody>
+          <a:bodyPr wrap="square" lIns="0" tIns="0" rIns="0" bIns="0" rtlCol="0" anchor="t"/>
+          <a:lstStyle/>
+          <a:p>
+            <a:pPr marL="0" indent="0">
+              <a:lnSpc>
+                <a:spcPct val="125000"/>
+              </a:lnSpc>
+              <a:buNone/>
+            </a:pPr>
+            <a:r>
+              <a:rPr lang="en-US" sz="1020" dirty="0">
+                <a:solidFill>
+                  <a:srgbClr val="333333"/>
+                </a:solidFill>
+                <a:latin typeface="Malgun Gothic" pitchFamily="34" charset="0"/>
+                <a:ea typeface="Malgun Gothic" pitchFamily="34" charset="-122"/>
+                <a:cs typeface="Malgun Gothic" pitchFamily="34" charset="-120"/>
+              </a:rPr>
+              <a:t>max_tokens = 답변을 최대 몇 토큰까지 만들지 미리 정해두는 상한값.</a:t>
+            </a:r>
+            <a:endParaRPr lang="en-US" sz="1020" dirty="0"/>
+          </a:p>
+          <a:p>
+            <a:pPr marL="0" indent="0">
+              <a:lnSpc>
+                <a:spcPct val="125000"/>
+              </a:lnSpc>
+              <a:buNone/>
+            </a:pPr>
+            <a:r>
+              <a:rPr lang="en-US" sz="1020" dirty="0">
+                <a:solidFill>
+                  <a:srgbClr val="333333"/>
+                </a:solidFill>
+                <a:latin typeface="Malgun Gothic" pitchFamily="34" charset="0"/>
+                <a:ea typeface="Malgun Gothic" pitchFamily="34" charset="-122"/>
+                <a:cs typeface="Malgun Gothic" pitchFamily="34" charset="-120"/>
+              </a:rPr>
+              <a:t>우리 코드는 이 값을 지정하지 않아 출력분이 미리 예약되지 않는다.</a:t>
+            </a:r>
+            <a:endParaRPr lang="en-US" sz="1020" dirty="0"/>
+          </a:p>
+          <a:p>
+            <a:pPr marL="0" indent="0">
+              <a:lnSpc>
+                <a:spcPct val="125000"/>
+              </a:lnSpc>
+              <a:buNone/>
+            </a:pPr>
+            <a:r>
+              <a:rPr lang="en-US" sz="1020" dirty="0">
+                <a:solidFill>
+                  <a:srgbClr val="333333"/>
+                </a:solidFill>
+                <a:latin typeface="Malgun Gothic" pitchFamily="34" charset="0"/>
+                <a:ea typeface="Malgun Gothic" pitchFamily="34" charset="-122"/>
+                <a:cs typeface="Malgun Gothic" pitchFamily="34" charset="-120"/>
+              </a:rPr>
+              <a:t>따라서 원인은 슬라이드 143장을 다시 보낸 것 하나로 확정된다.</a:t>
+            </a:r>
+            <a:endParaRPr lang="en-US" sz="1020" dirty="0"/>
+          </a:p>
+        </p:txBody>
+      </p:sp>
+      <p:sp>
+        <p:nvSpPr>
+          <p:cNvPr id="33" name="Shape 31"/>
+          <p:cNvSpPr/>
+          <p:nvPr/>
+        </p:nvSpPr>
+        <p:spPr>
+          <a:xfrm>
+            <a:off x="6099048" y="4937760"/>
+            <a:ext cx="5550408" cy="1005840"/>
+          </a:xfrm>
+          <a:prstGeom prst="roundRect">
+            <a:avLst>
+              <a:gd name="adj" fmla="val 5455"/>
+            </a:avLst>
+          </a:prstGeom>
+          <a:solidFill>
+            <a:srgbClr val="FFFFFF"/>
+          </a:solidFill>
+          <a:ln w="12700">
+            <a:solidFill>
+              <a:srgbClr val="B7CDE2"/>
+            </a:solidFill>
+            <a:prstDash val="solid"/>
+          </a:ln>
+        </p:spPr>
+        <p:txBody>
+          <a:bodyPr/>
+          <a:lstStyle/>
+          <a:p>
+            <a:endParaRPr lang="ko-KR" altLang="en-US"/>
+          </a:p>
+        </p:txBody>
+      </p:sp>
+      <p:sp>
+        <p:nvSpPr>
+          <p:cNvPr id="34" name="Text 32"/>
+          <p:cNvSpPr/>
+          <p:nvPr/>
+        </p:nvSpPr>
+        <p:spPr>
+          <a:xfrm>
+            <a:off x="6263640" y="5001768"/>
+            <a:ext cx="5266944" cy="256032"/>
+          </a:xfrm>
+          <a:prstGeom prst="rect">
+            <a:avLst/>
+          </a:prstGeom>
+          <a:noFill/>
+          <a:ln/>
+        </p:spPr>
+        <p:txBody>
+          <a:bodyPr wrap="square" lIns="0" tIns="0" rIns="0" bIns="0" rtlCol="0" anchor="ctr"/>
+          <a:lstStyle/>
+          <a:p>
+            <a:pPr marL="0" indent="0">
+              <a:buNone/>
+            </a:pPr>
+            <a:r>
+              <a:rPr lang="en-US" sz="1300" b="1" dirty="0">
+                <a:solidFill>
+                  <a:srgbClr val="C03A2B"/>
+                </a:solidFill>
+                <a:latin typeface="Malgun Gothic" pitchFamily="34" charset="0"/>
+                <a:ea typeface="Malgun Gothic" pitchFamily="34" charset="-122"/>
+                <a:cs typeface="Malgun Gothic" pitchFamily="34" charset="-120"/>
+              </a:rPr>
+              <a:t>확인 ②   제한을 걸면 오히려 불리해질 수 있다</a:t>
+            </a:r>
+            <a:endParaRPr lang="en-US" sz="1300" dirty="0"/>
+          </a:p>
+        </p:txBody>
+      </p:sp>
+      <p:sp>
+        <p:nvSpPr>
+          <p:cNvPr id="35" name="Text 33"/>
+          <p:cNvSpPr/>
+          <p:nvPr/>
+        </p:nvSpPr>
+        <p:spPr>
+          <a:xfrm>
+            <a:off x="6263640" y="5266944"/>
+            <a:ext cx="5266944" cy="640080"/>
+          </a:xfrm>
+          <a:prstGeom prst="rect">
+            <a:avLst/>
+          </a:prstGeom>
+          <a:noFill/>
+          <a:ln/>
+        </p:spPr>
+        <p:txBody>
+          <a:bodyPr wrap="square" lIns="0" tIns="0" rIns="0" bIns="0" rtlCol="0" anchor="t"/>
+          <a:lstStyle/>
+          <a:p>
+            <a:pPr marL="0" indent="0">
+              <a:lnSpc>
+                <a:spcPct val="125000"/>
+              </a:lnSpc>
+              <a:buNone/>
+            </a:pPr>
+            <a:r>
+              <a:rPr lang="en-US" sz="1020" dirty="0">
+                <a:solidFill>
+                  <a:srgbClr val="333333"/>
+                </a:solidFill>
+                <a:latin typeface="Malgun Gothic" pitchFamily="34" charset="0"/>
+                <a:ea typeface="Malgun Gothic" pitchFamily="34" charset="-122"/>
+                <a:cs typeface="Malgun Gothic" pitchFamily="34" charset="-120"/>
+              </a:rPr>
+              <a:t>지정하면 실제 출력이 아니라 '설정한 숫자'가 요청 시점에 미리 차감된다.</a:t>
+            </a:r>
+            <a:endParaRPr lang="en-US" sz="1020" dirty="0"/>
+          </a:p>
+          <a:p>
+            <a:pPr marL="0" indent="0">
+              <a:lnSpc>
+                <a:spcPct val="125000"/>
+              </a:lnSpc>
+              <a:buNone/>
+            </a:pPr>
+            <a:r>
+              <a:rPr lang="en-US" sz="1020" dirty="0">
+                <a:solidFill>
+                  <a:srgbClr val="333333"/>
+                </a:solidFill>
+                <a:latin typeface="Malgun Gothic" pitchFamily="34" charset="0"/>
+                <a:ea typeface="Malgun Gothic" pitchFamily="34" charset="-122"/>
+                <a:cs typeface="Malgun Gothic" pitchFamily="34" charset="-120"/>
+              </a:rPr>
+              <a:t>넉넉히 4,000을 걸고 8개를 동시에 돌리면 그것만으로 32,000 &gt; 30,000.</a:t>
+            </a:r>
+            <a:endParaRPr lang="en-US" sz="1020" dirty="0"/>
+          </a:p>
+          <a:p>
+            <a:pPr marL="0" indent="0">
+              <a:lnSpc>
+                <a:spcPct val="125000"/>
+              </a:lnSpc>
+              <a:buNone/>
+            </a:pPr>
+            <a:r>
+              <a:rPr lang="en-US" sz="1020" dirty="0">
+                <a:solidFill>
+                  <a:srgbClr val="333333"/>
+                </a:solidFill>
+                <a:latin typeface="Malgun Gothic" pitchFamily="34" charset="0"/>
+                <a:ea typeface="Malgun Gothic" pitchFamily="34" charset="-122"/>
+                <a:cs typeface="Malgun Gothic" pitchFamily="34" charset="-120"/>
+              </a:rPr>
+              <a:t>제한은 출력이 짧고 예측 가능한 호출에만 좁게 거는 편이 안전하다.</a:t>
+            </a:r>
+            <a:endParaRPr lang="en-US" sz="1020" dirty="0"/>
+          </a:p>
+        </p:txBody>
+      </p:sp>
+      <p:sp>
+        <p:nvSpPr>
+          <p:cNvPr id="36" name="Shape 34"/>
+          <p:cNvSpPr/>
+          <p:nvPr/>
+        </p:nvSpPr>
+        <p:spPr>
+          <a:xfrm>
+            <a:off x="420624" y="6016752"/>
+            <a:ext cx="11228832" cy="512064"/>
+          </a:xfrm>
+          <a:prstGeom prst="roundRect">
+            <a:avLst>
+              <a:gd name="adj" fmla="val 8929"/>
+            </a:avLst>
+          </a:prstGeom>
+          <a:solidFill>
+            <a:srgbClr val="1F456E"/>
+          </a:solidFill>
+          <a:ln w="12700">
+            <a:solidFill>
+              <a:srgbClr val="1F456E"/>
+            </a:solidFill>
+            <a:prstDash val="solid"/>
+          </a:ln>
+        </p:spPr>
+        <p:txBody>
+          <a:bodyPr/>
+          <a:lstStyle/>
+          <a:p>
+            <a:endParaRPr lang="ko-KR" altLang="en-US"/>
+          </a:p>
+        </p:txBody>
+      </p:sp>
+      <p:sp>
+        <p:nvSpPr>
+          <p:cNvPr id="37" name="Text 35"/>
+          <p:cNvSpPr/>
+          <p:nvPr/>
+        </p:nvSpPr>
+        <p:spPr>
+          <a:xfrm>
+            <a:off x="694944" y="6016752"/>
+            <a:ext cx="10789920" cy="512064"/>
+          </a:xfrm>
+          <a:prstGeom prst="rect">
+            <a:avLst/>
+          </a:prstGeom>
+          <a:noFill/>
+          <a:ln/>
+        </p:spPr>
+        <p:txBody>
+          <a:bodyPr wrap="square" lIns="0" tIns="0" rIns="0" bIns="0" rtlCol="0" anchor="ctr"/>
+          <a:lstStyle/>
+          <a:p>
+            <a:pPr marL="0" indent="0">
+              <a:buNone/>
+            </a:pPr>
+            <a:r>
+              <a:rPr lang="en-US" sz="1300" b="1" dirty="0">
+                <a:solidFill>
+                  <a:srgbClr val="B7CDE2"/>
+                </a:solidFill>
+                <a:latin typeface="Malgun Gothic" pitchFamily="34" charset="0"/>
+                <a:ea typeface="Malgun Gothic" pitchFamily="34" charset="-122"/>
+                <a:cs typeface="Malgun Gothic" pitchFamily="34" charset="-120"/>
+              </a:rPr>
+              <a:t>시사점   </a:t>
+            </a:r>
+            <a:r>
+              <a:rPr lang="en-US" sz="1300" b="1" dirty="0">
+                <a:solidFill>
+                  <a:srgbClr val="FFFFFF"/>
+                </a:solidFill>
+                <a:latin typeface="Malgun Gothic" pitchFamily="34" charset="0"/>
+                <a:ea typeface="Malgun Gothic" pitchFamily="34" charset="-122"/>
+                <a:cs typeface="Malgun Gothic" pitchFamily="34" charset="-120"/>
+              </a:rPr>
+              <a:t>성공은 응답에서 · 실패는 에러 메시지에서 · 여유는 헤더에서. 세 곳을 모두 로그에 남겨야 다음 개선의 근거가 남는다</a:t>
+            </a:r>
+            <a:endParaRPr lang="en-US" sz="1300" dirty="0"/>
+          </a:p>
+        </p:txBody>
+      </p:sp>
+      <p:pic>
+        <p:nvPicPr>
+          <p:cNvPr id="38" name="Image 0" descr="preencoded.png"/>
+          <p:cNvPicPr>
+            <a:picLocks noChangeAspect="1"/>
+          </p:cNvPicPr>
+          <p:nvPr/>
+        </p:nvPicPr>
+        <p:blipFill>
+          <a:blip r:embed="rId3"/>
+          <a:stretch>
+            <a:fillRect/>
+          </a:stretch>
+        </p:blipFill>
+        <p:spPr>
+          <a:xfrm>
+            <a:off x="164592" y="6601968"/>
+            <a:ext cx="1335024" cy="155448"/>
+          </a:xfrm>
+          <a:prstGeom prst="rect">
+            <a:avLst/>
+          </a:prstGeom>
+        </p:spPr>
+      </p:pic>
+    </p:spTree>
+  </p:cSld>
+  <p:clrMapOvr>
+    <a:masterClrMapping/>
+  </p:clrMapOvr>
+</p:sld>
+</file>
+
+<file path=ppt/slides/slide27.xml><?xml version="1.0" encoding="utf-8"?>
 <p:sld xmlns:a="http://schemas.openxmlformats.org/drawingml/2006/main" xmlns:r="http://schemas.openxmlformats.org/officeDocument/2006/relationships" xmlns:p="http://schemas.openxmlformats.org/presentationml/2006/main">
   <p:cSld>
     <p:spTree>
@@ -28643,7 +32987,7 @@
             </a:pPr>
             <a:fld id="{00000000-1234-1234-1234-123412341234}" type="slidenum">
               <a:rPr lang="en-US"/>
-              <a:t>26</a:t>
+              <a:t>27</a:t>
             </a:fld>
             <a:endParaRPr/>
           </a:p>
@@ -29238,7 +33582,7 @@
 </p:sld>
 </file>
 
-<file path=ppt/slides/slide27.xml><?xml version="1.0" encoding="utf-8"?>
+<file path=ppt/slides/slide28.xml><?xml version="1.0" encoding="utf-8"?>
 <p:sld xmlns:a="http://schemas.openxmlformats.org/drawingml/2006/main" xmlns:r="http://schemas.openxmlformats.org/officeDocument/2006/relationships" xmlns:p="http://schemas.openxmlformats.org/presentationml/2006/main">
   <p:cSld>
     <p:spTree>
@@ -29388,7 +33732,7 @@
             </a:pPr>
             <a:fld id="{00000000-1234-1234-1234-123412341234}" type="slidenum">
               <a:rPr lang="en-US"/>
-              <a:t>27</a:t>
+              <a:t>28</a:t>
             </a:fld>
             <a:endParaRPr/>
           </a:p>
@@ -29816,10 +34160,26 @@
               <a:buNone/>
             </a:pPr>
             <a:r>
-              <a:rPr lang="en-US"/>
-              <a:t>프로젝트 배경 및 목적</a:t>
-            </a:r>
-            <a:endParaRPr/>
+              <a:rPr lang="en-US" dirty="0" err="1"/>
+              <a:t>프로젝트</a:t>
+            </a:r>
+            <a:r>
+              <a:rPr lang="en-US" dirty="0"/>
+              <a:t> </a:t>
+            </a:r>
+            <a:r>
+              <a:rPr lang="en-US" dirty="0" err="1"/>
+              <a:t>배경</a:t>
+            </a:r>
+            <a:r>
+              <a:rPr lang="en-US" dirty="0"/>
+              <a:t> 및 </a:t>
+            </a:r>
+            <a:r>
+              <a:rPr lang="en-US" dirty="0" err="1"/>
+              <a:t>목적</a:t>
+            </a:r>
+            <a:endParaRPr dirty="0"/>
           </a:p>
         </p:txBody>
       </p:sp>
@@ -30074,7 +34434,7 @@
               </a:spcAft>
             </a:pPr>
             <a:r>
-              <a:rPr sz="1800" b="1" i="0">
+              <a:rPr sz="1800" b="1" i="0" dirty="0" err="1">
                 <a:solidFill>
                   <a:srgbClr val="1F456E"/>
                 </a:solidFill>
@@ -30082,8 +34442,60 @@
                 <a:ea typeface="맑은 고딕"/>
                 <a:cs typeface="맑은 고딕"/>
               </a:rPr>
-              <a:t>통합 플랫폼의 필요성</a:t>
-            </a:r>
+              <a:t>통합</a:t>
+            </a:r>
+            <a:r>
+              <a:rPr sz="1800" b="1" i="0" dirty="0">
+                <a:solidFill>
+                  <a:srgbClr val="1F456E"/>
+                </a:solidFill>
+                <a:latin typeface="맑은 고딕"/>
+                <a:ea typeface="맑은 고딕"/>
+                <a:cs typeface="맑은 고딕"/>
+              </a:rPr>
+              <a:t> </a:t>
+            </a:r>
+            <a:r>
+              <a:rPr sz="1800" b="1" i="0" dirty="0" err="1">
+                <a:solidFill>
+                  <a:srgbClr val="1F456E"/>
+                </a:solidFill>
+                <a:latin typeface="맑은 고딕"/>
+                <a:ea typeface="맑은 고딕"/>
+                <a:cs typeface="맑은 고딕"/>
+              </a:rPr>
+              <a:t>플랫폼의</a:t>
+            </a:r>
+            <a:r>
+              <a:rPr sz="1800" b="1" i="0" dirty="0">
+                <a:solidFill>
+                  <a:srgbClr val="1F456E"/>
+                </a:solidFill>
+                <a:latin typeface="맑은 고딕"/>
+                <a:ea typeface="맑은 고딕"/>
+                <a:cs typeface="맑은 고딕"/>
+              </a:rPr>
+              <a:t> </a:t>
+            </a:r>
+            <a:r>
+              <a:rPr sz="1800" b="1" i="0" dirty="0" err="1">
+                <a:solidFill>
+                  <a:srgbClr val="1F456E"/>
+                </a:solidFill>
+                <a:latin typeface="맑은 고딕"/>
+                <a:ea typeface="맑은 고딕"/>
+                <a:cs typeface="맑은 고딕"/>
+              </a:rPr>
+              <a:t>필요성</a:t>
+            </a:r>
+            <a:endParaRPr sz="1800" b="1" i="0" dirty="0">
+              <a:solidFill>
+                <a:srgbClr val="1F456E"/>
+              </a:solidFill>
+              <a:latin typeface="맑은 고딕"/>
+              <a:ea typeface="맑은 고딕"/>
+              <a:cs typeface="맑은 고딕"/>
+            </a:endParaRPr>
           </a:p>
           <a:p>
             <a:pPr algn="l">
@@ -30092,18 +34504,227 @@
               </a:lnSpc>
             </a:pPr>
             <a:r>
-              <a:rPr sz="1800" b="0" i="0">
-                <a:solidFill>
-                  <a:srgbClr val="333333"/>
-                </a:solidFill>
-                <a:latin typeface="맑은 고딕"/>
-                <a:ea typeface="맑은 고딕"/>
-                <a:cs typeface="맑은 고딕"/>
-              </a:rPr>
-              <a:t>교육 콘텐츠를 안전하게 공유하고, 생성형 AI로 다양한 형태의 교육 자료를 </a:t>
-            </a:r>
-            <a:r>
-              <a:rPr lang="ko-KR" altLang="en-US" sz="1800" b="0" i="0">
+              <a:rPr sz="1800" b="0" i="0" dirty="0" err="1">
+                <a:solidFill>
+                  <a:srgbClr val="333333"/>
+                </a:solidFill>
+                <a:latin typeface="맑은 고딕"/>
+                <a:ea typeface="맑은 고딕"/>
+                <a:cs typeface="맑은 고딕"/>
+              </a:rPr>
+              <a:t>교육</a:t>
+            </a:r>
+            <a:r>
+              <a:rPr sz="1800" b="0" i="0" dirty="0">
+                <a:solidFill>
+                  <a:srgbClr val="333333"/>
+                </a:solidFill>
+                <a:latin typeface="맑은 고딕"/>
+                <a:ea typeface="맑은 고딕"/>
+                <a:cs typeface="맑은 고딕"/>
+              </a:rPr>
+              <a:t> </a:t>
+            </a:r>
+            <a:r>
+              <a:rPr sz="1800" b="0" i="0" dirty="0" err="1">
+                <a:solidFill>
+                  <a:srgbClr val="333333"/>
+                </a:solidFill>
+                <a:latin typeface="맑은 고딕"/>
+                <a:ea typeface="맑은 고딕"/>
+                <a:cs typeface="맑은 고딕"/>
+              </a:rPr>
+              <a:t>콘텐츠를</a:t>
+            </a:r>
+            <a:r>
+              <a:rPr sz="1800" b="0" i="0" dirty="0">
+                <a:solidFill>
+                  <a:srgbClr val="333333"/>
+                </a:solidFill>
+                <a:latin typeface="맑은 고딕"/>
+                <a:ea typeface="맑은 고딕"/>
+                <a:cs typeface="맑은 고딕"/>
+              </a:rPr>
+              <a:t> </a:t>
+            </a:r>
+            <a:r>
+              <a:rPr sz="1800" b="0" i="0" dirty="0" err="1">
+                <a:solidFill>
+                  <a:srgbClr val="333333"/>
+                </a:solidFill>
+                <a:latin typeface="맑은 고딕"/>
+                <a:ea typeface="맑은 고딕"/>
+                <a:cs typeface="맑은 고딕"/>
+              </a:rPr>
+              <a:t>안전하게</a:t>
+            </a:r>
+            <a:r>
+              <a:rPr sz="1800" b="0" i="0" dirty="0">
+                <a:solidFill>
+                  <a:srgbClr val="333333"/>
+                </a:solidFill>
+                <a:latin typeface="맑은 고딕"/>
+                <a:ea typeface="맑은 고딕"/>
+                <a:cs typeface="맑은 고딕"/>
+              </a:rPr>
+              <a:t> </a:t>
+            </a:r>
+            <a:r>
+              <a:rPr sz="1800" b="0" i="0" dirty="0" err="1">
+                <a:solidFill>
+                  <a:srgbClr val="333333"/>
+                </a:solidFill>
+                <a:latin typeface="맑은 고딕"/>
+                <a:ea typeface="맑은 고딕"/>
+                <a:cs typeface="맑은 고딕"/>
+              </a:rPr>
+              <a:t>공유하고</a:t>
+            </a:r>
+            <a:r>
+              <a:rPr sz="1800" b="0" i="0" dirty="0">
+                <a:solidFill>
+                  <a:srgbClr val="333333"/>
+                </a:solidFill>
+                <a:latin typeface="맑은 고딕"/>
+                <a:ea typeface="맑은 고딕"/>
+                <a:cs typeface="맑은 고딕"/>
+              </a:rPr>
+              <a:t>, </a:t>
+            </a:r>
+            <a:r>
+              <a:rPr sz="1800" b="0" i="0" dirty="0" err="1">
+                <a:solidFill>
+                  <a:srgbClr val="333333"/>
+                </a:solidFill>
+                <a:latin typeface="맑은 고딕"/>
+                <a:ea typeface="맑은 고딕"/>
+                <a:cs typeface="맑은 고딕"/>
+              </a:rPr>
+              <a:t>생성형</a:t>
+            </a:r>
+            <a:r>
+              <a:rPr sz="1800" b="0" i="0" dirty="0">
+                <a:solidFill>
+                  <a:srgbClr val="333333"/>
+                </a:solidFill>
+                <a:latin typeface="맑은 고딕"/>
+                <a:ea typeface="맑은 고딕"/>
+                <a:cs typeface="맑은 고딕"/>
+              </a:rPr>
+              <a:t> </a:t>
+            </a:r>
+            <a:r>
+              <a:rPr sz="1800" b="0" i="0" dirty="0" err="1">
+                <a:solidFill>
+                  <a:srgbClr val="333333"/>
+                </a:solidFill>
+                <a:latin typeface="맑은 고딕"/>
+                <a:ea typeface="맑은 고딕"/>
+                <a:cs typeface="맑은 고딕"/>
+              </a:rPr>
+              <a:t>AI로</a:t>
+            </a:r>
+            <a:r>
+              <a:rPr sz="1800" b="0" i="0" dirty="0">
+                <a:solidFill>
+                  <a:srgbClr val="333333"/>
+                </a:solidFill>
+                <a:latin typeface="맑은 고딕"/>
+                <a:ea typeface="맑은 고딕"/>
+                <a:cs typeface="맑은 고딕"/>
+              </a:rPr>
+              <a:t> </a:t>
+            </a:r>
+            <a:r>
+              <a:rPr sz="1800" b="0" i="0" dirty="0" err="1">
+                <a:solidFill>
+                  <a:srgbClr val="333333"/>
+                </a:solidFill>
+                <a:latin typeface="맑은 고딕"/>
+                <a:ea typeface="맑은 고딕"/>
+                <a:cs typeface="맑은 고딕"/>
+              </a:rPr>
+              <a:t>다양한</a:t>
+            </a:r>
+            <a:r>
+              <a:rPr sz="1800" b="0" i="0" dirty="0">
+                <a:solidFill>
+                  <a:srgbClr val="333333"/>
+                </a:solidFill>
+                <a:latin typeface="맑은 고딕"/>
+                <a:ea typeface="맑은 고딕"/>
+                <a:cs typeface="맑은 고딕"/>
+              </a:rPr>
+              <a:t> </a:t>
+            </a:r>
+            <a:r>
+              <a:rPr sz="1800" b="0" i="0" dirty="0" err="1">
+                <a:solidFill>
+                  <a:srgbClr val="333333"/>
+                </a:solidFill>
+                <a:latin typeface="맑은 고딕"/>
+                <a:ea typeface="맑은 고딕"/>
+                <a:cs typeface="맑은 고딕"/>
+              </a:rPr>
+              <a:t>형태의</a:t>
+            </a:r>
+            <a:r>
+              <a:rPr sz="1800" b="0" i="0" dirty="0">
+                <a:solidFill>
+                  <a:srgbClr val="333333"/>
+                </a:solidFill>
+                <a:latin typeface="맑은 고딕"/>
+                <a:ea typeface="맑은 고딕"/>
+                <a:cs typeface="맑은 고딕"/>
+              </a:rPr>
+              <a:t> </a:t>
+            </a:r>
+            <a:r>
+              <a:rPr sz="1800" b="0" i="0" dirty="0" err="1">
+                <a:solidFill>
+                  <a:srgbClr val="333333"/>
+                </a:solidFill>
+                <a:latin typeface="맑은 고딕"/>
+                <a:ea typeface="맑은 고딕"/>
+                <a:cs typeface="맑은 고딕"/>
+              </a:rPr>
+              <a:t>교육</a:t>
+            </a:r>
+            <a:r>
+              <a:rPr sz="1800" b="0" i="0" dirty="0">
+                <a:solidFill>
+                  <a:srgbClr val="333333"/>
+                </a:solidFill>
+                <a:latin typeface="맑은 고딕"/>
+                <a:ea typeface="맑은 고딕"/>
+                <a:cs typeface="맑은 고딕"/>
+              </a:rPr>
+              <a:t> </a:t>
+            </a:r>
+            <a:r>
+              <a:rPr sz="1800" b="0" i="0" dirty="0" err="1">
+                <a:solidFill>
+                  <a:srgbClr val="333333"/>
+                </a:solidFill>
+                <a:latin typeface="맑은 고딕"/>
+                <a:ea typeface="맑은 고딕"/>
+                <a:cs typeface="맑은 고딕"/>
+              </a:rPr>
+              <a:t>자료를</a:t>
+            </a:r>
+            <a:r>
+              <a:rPr sz="1800" b="0" i="0" dirty="0">
+                <a:solidFill>
+                  <a:srgbClr val="333333"/>
+                </a:solidFill>
+                <a:latin typeface="맑은 고딕"/>
+                <a:ea typeface="맑은 고딕"/>
+                <a:cs typeface="맑은 고딕"/>
+              </a:rPr>
+              <a:t> </a:t>
+            </a:r>
+            <a:r>
+              <a:rPr lang="ko-KR" altLang="en-US" sz="1800" b="0" i="0" dirty="0">
                 <a:solidFill>
                   <a:srgbClr val="333333"/>
                 </a:solidFill>
@@ -30114,18 +34735,117 @@
               <a:t>관리할</a:t>
             </a:r>
             <a:r>
-              <a:rPr sz="1800" b="0" i="0">
-                <a:solidFill>
-                  <a:srgbClr val="333333"/>
-                </a:solidFill>
-                <a:latin typeface="맑은 고딕"/>
-                <a:ea typeface="맑은 고딕"/>
-                <a:cs typeface="맑은 고딕"/>
-              </a:rPr>
-              <a:t> 수 있는 별도 플랫폼 구축 요구</a:t>
-            </a:r>
-            <a:r>
-              <a:rPr lang="en-US" sz="1800" b="0" i="0">
+              <a:rPr sz="1800" b="0" i="0" dirty="0">
+                <a:solidFill>
+                  <a:srgbClr val="333333"/>
+                </a:solidFill>
+                <a:latin typeface="맑은 고딕"/>
+                <a:ea typeface="맑은 고딕"/>
+                <a:cs typeface="맑은 고딕"/>
+              </a:rPr>
+              <a:t> 수 </a:t>
+            </a:r>
+            <a:r>
+              <a:rPr sz="1800" b="0" i="0" dirty="0" err="1">
+                <a:solidFill>
+                  <a:srgbClr val="333333"/>
+                </a:solidFill>
+                <a:latin typeface="맑은 고딕"/>
+                <a:ea typeface="맑은 고딕"/>
+                <a:cs typeface="맑은 고딕"/>
+              </a:rPr>
+              <a:t>있는</a:t>
+            </a:r>
+            <a:r>
+              <a:rPr sz="1800" b="0" i="0" dirty="0">
+                <a:solidFill>
+                  <a:srgbClr val="333333"/>
+                </a:solidFill>
+                <a:latin typeface="맑은 고딕"/>
+                <a:ea typeface="맑은 고딕"/>
+                <a:cs typeface="맑은 고딕"/>
+              </a:rPr>
+              <a:t> </a:t>
+            </a:r>
+            <a:r>
+              <a:rPr sz="1800" b="0" i="0" dirty="0" err="1">
+                <a:solidFill>
+                  <a:srgbClr val="333333"/>
+                </a:solidFill>
+                <a:latin typeface="맑은 고딕"/>
+                <a:ea typeface="맑은 고딕"/>
+                <a:cs typeface="맑은 고딕"/>
+              </a:rPr>
+              <a:t>별도</a:t>
+            </a:r>
+            <a:r>
+              <a:rPr sz="1800" b="0" i="0" dirty="0">
+                <a:solidFill>
+                  <a:srgbClr val="333333"/>
+                </a:solidFill>
+                <a:latin typeface="맑은 고딕"/>
+                <a:ea typeface="맑은 고딕"/>
+                <a:cs typeface="맑은 고딕"/>
+              </a:rPr>
+              <a:t> </a:t>
+            </a:r>
+            <a:r>
+              <a:rPr sz="1800" b="0" i="0" dirty="0" err="1">
+                <a:solidFill>
+                  <a:srgbClr val="333333"/>
+                </a:solidFill>
+                <a:latin typeface="맑은 고딕"/>
+                <a:ea typeface="맑은 고딕"/>
+                <a:cs typeface="맑은 고딕"/>
+              </a:rPr>
+              <a:t>플랫폼</a:t>
+            </a:r>
+            <a:r>
+              <a:rPr sz="1800" b="0" i="0" dirty="0">
+                <a:solidFill>
+                  <a:srgbClr val="333333"/>
+                </a:solidFill>
+                <a:latin typeface="맑은 고딕"/>
+                <a:ea typeface="맑은 고딕"/>
+                <a:cs typeface="맑은 고딕"/>
+              </a:rPr>
+              <a:t> </a:t>
+            </a:r>
+            <a:r>
+              <a:rPr sz="1800" b="0" i="0" dirty="0" err="1">
+                <a:solidFill>
+                  <a:srgbClr val="333333"/>
+                </a:solidFill>
+                <a:latin typeface="맑은 고딕"/>
+                <a:ea typeface="맑은 고딕"/>
+                <a:cs typeface="맑은 고딕"/>
+              </a:rPr>
+              <a:t>구축</a:t>
+            </a:r>
+            <a:r>
+              <a:rPr sz="1800" b="0" i="0" dirty="0">
+                <a:solidFill>
+                  <a:srgbClr val="333333"/>
+                </a:solidFill>
+                <a:latin typeface="맑은 고딕"/>
+                <a:ea typeface="맑은 고딕"/>
+                <a:cs typeface="맑은 고딕"/>
+              </a:rPr>
+              <a:t> </a:t>
+            </a:r>
+            <a:r>
+              <a:rPr sz="1800" b="0" i="0" dirty="0" err="1">
+                <a:solidFill>
+                  <a:srgbClr val="333333"/>
+                </a:solidFill>
+                <a:latin typeface="맑은 고딕"/>
+                <a:ea typeface="맑은 고딕"/>
+                <a:cs typeface="맑은 고딕"/>
+              </a:rPr>
+              <a:t>요구</a:t>
+            </a:r>
+            <a:r>
+              <a:rPr lang="en-US" sz="1800" b="0" i="0" dirty="0">
                 <a:solidFill>
                   <a:srgbClr val="333333"/>
                 </a:solidFill>
@@ -30136,7 +34856,7 @@
               <a:t>.</a:t>
             </a:r>
             <a:br>
-              <a:rPr lang="en-US" sz="1800" b="0" i="0">
+              <a:rPr lang="en-US" sz="1800" b="0" i="0" dirty="0">
                 <a:solidFill>
                   <a:srgbClr val="333333"/>
                 </a:solidFill>
@@ -30146,7 +34866,7 @@
               </a:rPr>
             </a:br>
             <a:r>
-              <a:rPr lang="ko-KR" altLang="en-US" sz="1800" b="0" i="0">
+              <a:rPr lang="ko-KR" altLang="en-US" sz="1800" b="0" i="0" dirty="0">
                 <a:solidFill>
                   <a:srgbClr val="333333"/>
                 </a:solidFill>
@@ -30157,7 +34877,7 @@
               <a:t>향후 취업자료 기반의 분석도구로 확장</a:t>
             </a:r>
             <a:r>
-              <a:rPr lang="en-US" altLang="ko-KR" sz="1800" b="0" i="0">
+              <a:rPr lang="en-US" altLang="ko-KR" sz="1800" b="0" i="0" dirty="0">
                 <a:solidFill>
                   <a:srgbClr val="333333"/>
                 </a:solidFill>
@@ -30167,7 +34887,7 @@
               </a:rPr>
               <a:t>.</a:t>
             </a:r>
-            <a:endParaRPr sz="1800" b="0" i="0">
+            <a:endParaRPr sz="1800" b="0" i="0" dirty="0">
               <a:solidFill>
                 <a:srgbClr val="333333"/>
               </a:solidFill>
@@ -30265,7 +34985,7 @@
               </a:spcAft>
             </a:pPr>
             <a:r>
-              <a:rPr sz="1800" b="1" i="0">
+              <a:rPr sz="1800" b="1" i="0" dirty="0" err="1">
                 <a:solidFill>
                   <a:srgbClr val="1F456E"/>
                 </a:solidFill>
@@ -30273,8 +34993,60 @@
                 <a:ea typeface="맑은 고딕"/>
                 <a:cs typeface="맑은 고딕"/>
               </a:rPr>
-              <a:t>안전한 콘텐츠 공유</a:t>
-            </a:r>
+              <a:t>안전한</a:t>
+            </a:r>
+            <a:r>
+              <a:rPr sz="1800" b="1" i="0" dirty="0">
+                <a:solidFill>
+                  <a:srgbClr val="1F456E"/>
+                </a:solidFill>
+                <a:latin typeface="맑은 고딕"/>
+                <a:ea typeface="맑은 고딕"/>
+                <a:cs typeface="맑은 고딕"/>
+              </a:rPr>
+              <a:t> </a:t>
+            </a:r>
+            <a:r>
+              <a:rPr sz="1800" b="1" i="0" dirty="0" err="1">
+                <a:solidFill>
+                  <a:srgbClr val="1F456E"/>
+                </a:solidFill>
+                <a:latin typeface="맑은 고딕"/>
+                <a:ea typeface="맑은 고딕"/>
+                <a:cs typeface="맑은 고딕"/>
+              </a:rPr>
+              <a:t>콘텐츠</a:t>
+            </a:r>
+            <a:r>
+              <a:rPr sz="1800" b="1" i="0" dirty="0">
+                <a:solidFill>
+                  <a:srgbClr val="1F456E"/>
+                </a:solidFill>
+                <a:latin typeface="맑은 고딕"/>
+                <a:ea typeface="맑은 고딕"/>
+                <a:cs typeface="맑은 고딕"/>
+              </a:rPr>
+              <a:t> </a:t>
+            </a:r>
+            <a:r>
+              <a:rPr sz="1800" b="1" i="0" dirty="0" err="1">
+                <a:solidFill>
+                  <a:srgbClr val="1F456E"/>
+                </a:solidFill>
+                <a:latin typeface="맑은 고딕"/>
+                <a:ea typeface="맑은 고딕"/>
+                <a:cs typeface="맑은 고딕"/>
+              </a:rPr>
+              <a:t>공유</a:t>
+            </a:r>
+            <a:endParaRPr sz="1800" b="1" i="0" dirty="0">
+              <a:solidFill>
+                <a:srgbClr val="1F456E"/>
+              </a:solidFill>
+              <a:latin typeface="맑은 고딕"/>
+              <a:ea typeface="맑은 고딕"/>
+              <a:cs typeface="맑은 고딕"/>
+            </a:endParaRPr>
           </a:p>
           <a:p>
             <a:pPr algn="l">
@@ -30283,18 +35055,84 @@
               </a:lnSpc>
             </a:pPr>
             <a:r>
-              <a:rPr sz="1800" b="0" i="0">
-                <a:solidFill>
-                  <a:srgbClr val="333333"/>
-                </a:solidFill>
-                <a:latin typeface="맑은 고딕"/>
-                <a:ea typeface="맑은 고딕"/>
-                <a:cs typeface="맑은 고딕"/>
-              </a:rPr>
-              <a:t>강의 교안(PPT)을 웹 기반으로 변환</a:t>
-            </a:r>
-            <a:r>
-              <a:rPr lang="en-US" sz="1800" b="0" i="0">
+              <a:rPr sz="1800" b="0" i="0" dirty="0" err="1">
+                <a:solidFill>
+                  <a:srgbClr val="333333"/>
+                </a:solidFill>
+                <a:latin typeface="맑은 고딕"/>
+                <a:ea typeface="맑은 고딕"/>
+                <a:cs typeface="맑은 고딕"/>
+              </a:rPr>
+              <a:t>강의</a:t>
+            </a:r>
+            <a:r>
+              <a:rPr sz="1800" b="0" i="0" dirty="0">
+                <a:solidFill>
+                  <a:srgbClr val="333333"/>
+                </a:solidFill>
+                <a:latin typeface="맑은 고딕"/>
+                <a:ea typeface="맑은 고딕"/>
+                <a:cs typeface="맑은 고딕"/>
+              </a:rPr>
+              <a:t> </a:t>
+            </a:r>
+            <a:r>
+              <a:rPr sz="1800" b="0" i="0" dirty="0" err="1">
+                <a:solidFill>
+                  <a:srgbClr val="333333"/>
+                </a:solidFill>
+                <a:latin typeface="맑은 고딕"/>
+                <a:ea typeface="맑은 고딕"/>
+                <a:cs typeface="맑은 고딕"/>
+              </a:rPr>
+              <a:t>교안</a:t>
+            </a:r>
+            <a:r>
+              <a:rPr sz="1800" b="0" i="0" dirty="0">
+                <a:solidFill>
+                  <a:srgbClr val="333333"/>
+                </a:solidFill>
+                <a:latin typeface="맑은 고딕"/>
+                <a:ea typeface="맑은 고딕"/>
+                <a:cs typeface="맑은 고딕"/>
+              </a:rPr>
+              <a:t>(PPT)을 웹 </a:t>
+            </a:r>
+            <a:r>
+              <a:rPr sz="1800" b="0" i="0" dirty="0" err="1">
+                <a:solidFill>
+                  <a:srgbClr val="333333"/>
+                </a:solidFill>
+                <a:latin typeface="맑은 고딕"/>
+                <a:ea typeface="맑은 고딕"/>
+                <a:cs typeface="맑은 고딕"/>
+              </a:rPr>
+              <a:t>기반으로</a:t>
+            </a:r>
+            <a:r>
+              <a:rPr sz="1800" b="0" i="0" dirty="0">
+                <a:solidFill>
+                  <a:srgbClr val="333333"/>
+                </a:solidFill>
+                <a:latin typeface="맑은 고딕"/>
+                <a:ea typeface="맑은 고딕"/>
+                <a:cs typeface="맑은 고딕"/>
+              </a:rPr>
+              <a:t> </a:t>
+            </a:r>
+            <a:r>
+              <a:rPr sz="1800" b="0" i="0" dirty="0" err="1">
+                <a:solidFill>
+                  <a:srgbClr val="333333"/>
+                </a:solidFill>
+                <a:latin typeface="맑은 고딕"/>
+                <a:ea typeface="맑은 고딕"/>
+                <a:cs typeface="맑은 고딕"/>
+              </a:rPr>
+              <a:t>변환</a:t>
+            </a:r>
+            <a:r>
+              <a:rPr lang="en-US" sz="1800" b="0" i="0" dirty="0">
                 <a:solidFill>
                   <a:srgbClr val="333333"/>
                 </a:solidFill>
@@ -30312,18 +35150,128 @@
               </a:lnSpc>
             </a:pPr>
             <a:r>
-              <a:rPr sz="1800" b="0" i="0">
-                <a:solidFill>
-                  <a:srgbClr val="333333"/>
-                </a:solidFill>
-                <a:latin typeface="맑은 고딕"/>
-                <a:ea typeface="맑은 고딕"/>
-                <a:cs typeface="맑은 고딕"/>
-              </a:rPr>
-              <a:t>수강생은 편집·다운로드 없이 목차와 함께 열람</a:t>
-            </a:r>
-            <a:r>
-              <a:rPr lang="en-US" sz="1800" b="0" i="0">
+              <a:rPr sz="1800" b="0" i="0" dirty="0" err="1">
+                <a:solidFill>
+                  <a:srgbClr val="333333"/>
+                </a:solidFill>
+                <a:latin typeface="맑은 고딕"/>
+                <a:ea typeface="맑은 고딕"/>
+                <a:cs typeface="맑은 고딕"/>
+              </a:rPr>
+              <a:t>수강생은</a:t>
+            </a:r>
+            <a:r>
+              <a:rPr sz="1800" b="0" i="0" dirty="0">
+                <a:solidFill>
+                  <a:srgbClr val="333333"/>
+                </a:solidFill>
+                <a:latin typeface="맑은 고딕"/>
+                <a:ea typeface="맑은 고딕"/>
+                <a:cs typeface="맑은 고딕"/>
+              </a:rPr>
+              <a:t> </a:t>
+            </a:r>
+            <a:r>
+              <a:rPr sz="1800" b="0" i="0" dirty="0" err="1">
+                <a:solidFill>
+                  <a:srgbClr val="333333"/>
+                </a:solidFill>
+                <a:latin typeface="맑은 고딕"/>
+                <a:ea typeface="맑은 고딕"/>
+                <a:cs typeface="맑은 고딕"/>
+              </a:rPr>
+              <a:t>편집·다운로드</a:t>
+            </a:r>
+            <a:r>
+              <a:rPr sz="1800" b="0" i="0" dirty="0">
+                <a:solidFill>
+                  <a:srgbClr val="333333"/>
+                </a:solidFill>
+                <a:latin typeface="맑은 고딕"/>
+                <a:ea typeface="맑은 고딕"/>
+                <a:cs typeface="맑은 고딕"/>
+              </a:rPr>
+              <a:t> </a:t>
+            </a:r>
+            <a:r>
+              <a:rPr sz="1800" b="0" i="0" dirty="0" err="1">
+                <a:solidFill>
+                  <a:srgbClr val="333333"/>
+                </a:solidFill>
+                <a:latin typeface="맑은 고딕"/>
+                <a:ea typeface="맑은 고딕"/>
+                <a:cs typeface="맑은 고딕"/>
+              </a:rPr>
+              <a:t>없이</a:t>
+            </a:r>
+            <a:r>
+              <a:rPr sz="1800" b="0" i="0" dirty="0">
+                <a:solidFill>
+                  <a:srgbClr val="333333"/>
+                </a:solidFill>
+                <a:latin typeface="맑은 고딕"/>
+                <a:ea typeface="맑은 고딕"/>
+                <a:cs typeface="맑은 고딕"/>
+              </a:rPr>
+              <a:t> </a:t>
+            </a:r>
+            <a:r>
+              <a:rPr sz="1800" b="0" i="0" dirty="0" err="1">
+                <a:solidFill>
+                  <a:srgbClr val="333333"/>
+                </a:solidFill>
+                <a:latin typeface="맑은 고딕"/>
+                <a:ea typeface="맑은 고딕"/>
+                <a:cs typeface="맑은 고딕"/>
+              </a:rPr>
+              <a:t>목차와</a:t>
+            </a:r>
+            <a:r>
+              <a:rPr sz="1800" b="0" i="0" dirty="0">
+                <a:solidFill>
+                  <a:srgbClr val="333333"/>
+                </a:solidFill>
+                <a:latin typeface="맑은 고딕"/>
+                <a:ea typeface="맑은 고딕"/>
+                <a:cs typeface="맑은 고딕"/>
+              </a:rPr>
+              <a:t> </a:t>
+            </a:r>
+            <a:r>
+              <a:rPr sz="1800" b="0" i="0" dirty="0" err="1">
+                <a:solidFill>
+                  <a:srgbClr val="333333"/>
+                </a:solidFill>
+                <a:latin typeface="맑은 고딕"/>
+                <a:ea typeface="맑은 고딕"/>
+                <a:cs typeface="맑은 고딕"/>
+              </a:rPr>
+              <a:t>함께</a:t>
+            </a:r>
+            <a:r>
+              <a:rPr sz="1800" b="0" i="0" dirty="0">
+                <a:solidFill>
+                  <a:srgbClr val="333333"/>
+                </a:solidFill>
+                <a:latin typeface="맑은 고딕"/>
+                <a:ea typeface="맑은 고딕"/>
+                <a:cs typeface="맑은 고딕"/>
+              </a:rPr>
+              <a:t> </a:t>
+            </a:r>
+            <a:r>
+              <a:rPr sz="1800" b="0" i="0" dirty="0" err="1">
+                <a:solidFill>
+                  <a:srgbClr val="333333"/>
+                </a:solidFill>
+                <a:latin typeface="맑은 고딕"/>
+                <a:ea typeface="맑은 고딕"/>
+                <a:cs typeface="맑은 고딕"/>
+              </a:rPr>
+              <a:t>열람</a:t>
+            </a:r>
+            <a:r>
+              <a:rPr lang="en-US" sz="1800" b="0" i="0" dirty="0">
                 <a:solidFill>
                   <a:srgbClr val="333333"/>
                 </a:solidFill>
@@ -30341,7 +35289,7 @@
               </a:lnSpc>
             </a:pPr>
             <a:r>
-              <a:rPr lang="ko-KR" altLang="en-US" sz="1800">
+              <a:rPr lang="ko-KR" altLang="en-US" sz="1800" dirty="0">
                 <a:solidFill>
                   <a:srgbClr val="333333"/>
                 </a:solidFill>
@@ -30352,7 +35300,7 @@
               <a:t>강사는 웹상에서 슬라이드 쇼 형태로 자료를 공개하며 강의진행 중 실시간으로 질문 답변을 진행하고 기록</a:t>
             </a:r>
             <a:r>
-              <a:rPr lang="en-US" altLang="ko-KR" sz="1800">
+              <a:rPr lang="en-US" altLang="ko-KR" sz="1800" dirty="0">
                 <a:solidFill>
                   <a:srgbClr val="333333"/>
                 </a:solidFill>
@@ -30362,7 +35310,7 @@
               </a:rPr>
               <a:t>.</a:t>
             </a:r>
-            <a:endParaRPr sz="1800" b="0" i="0">
+            <a:endParaRPr sz="1800" b="0" i="0" dirty="0">
               <a:solidFill>
                 <a:srgbClr val="333333"/>
               </a:solidFill>
@@ -30478,7 +35426,7 @@
               </a:spcAft>
             </a:pPr>
             <a:r>
-              <a:rPr sz="1800" b="1" i="0">
+              <a:rPr sz="1800" b="1" i="0" dirty="0">
                 <a:solidFill>
                   <a:srgbClr val="1F456E"/>
                 </a:solidFill>
@@ -30486,8 +35434,71 @@
                 <a:ea typeface="맑은 고딕"/>
                 <a:cs typeface="맑은 고딕"/>
               </a:rPr>
-              <a:t>AI 기반 강의 지원</a:t>
-            </a:r>
+              <a:t>AI </a:t>
+            </a:r>
+            <a:r>
+              <a:rPr sz="1800" b="1" i="0" dirty="0" err="1">
+                <a:solidFill>
+                  <a:srgbClr val="1F456E"/>
+                </a:solidFill>
+                <a:latin typeface="맑은 고딕"/>
+                <a:ea typeface="맑은 고딕"/>
+                <a:cs typeface="맑은 고딕"/>
+              </a:rPr>
+              <a:t>기반</a:t>
+            </a:r>
+            <a:r>
+              <a:rPr sz="1800" b="1" i="0" dirty="0">
+                <a:solidFill>
+                  <a:srgbClr val="1F456E"/>
+                </a:solidFill>
+                <a:latin typeface="맑은 고딕"/>
+                <a:ea typeface="맑은 고딕"/>
+                <a:cs typeface="맑은 고딕"/>
+              </a:rPr>
+              <a:t> </a:t>
+            </a:r>
+            <a:r>
+              <a:rPr sz="1800" b="1" i="0" dirty="0" err="1">
+                <a:solidFill>
+                  <a:srgbClr val="1F456E"/>
+                </a:solidFill>
+                <a:latin typeface="맑은 고딕"/>
+                <a:ea typeface="맑은 고딕"/>
+                <a:cs typeface="맑은 고딕"/>
+              </a:rPr>
+              <a:t>강의</a:t>
+            </a:r>
+            <a:r>
+              <a:rPr sz="1800" b="1" i="0" dirty="0">
+                <a:solidFill>
+                  <a:srgbClr val="1F456E"/>
+                </a:solidFill>
+                <a:latin typeface="맑은 고딕"/>
+                <a:ea typeface="맑은 고딕"/>
+                <a:cs typeface="맑은 고딕"/>
+              </a:rPr>
+              <a:t> </a:t>
+            </a:r>
+            <a:r>
+              <a:rPr sz="1800" b="1" i="0" dirty="0" err="1">
+                <a:solidFill>
+                  <a:srgbClr val="1F456E"/>
+                </a:solidFill>
+                <a:latin typeface="맑은 고딕"/>
+                <a:ea typeface="맑은 고딕"/>
+                <a:cs typeface="맑은 고딕"/>
+              </a:rPr>
+              <a:t>지원</a:t>
+            </a:r>
+            <a:endParaRPr sz="1800" b="1" i="0" dirty="0">
+              <a:solidFill>
+                <a:srgbClr val="1F456E"/>
+              </a:solidFill>
+              <a:latin typeface="맑은 고딕"/>
+              <a:ea typeface="맑은 고딕"/>
+              <a:cs typeface="맑은 고딕"/>
+            </a:endParaRPr>
           </a:p>
           <a:p>
             <a:pPr algn="l">
@@ -30496,16 +35507,266 @@
               </a:lnSpc>
             </a:pPr>
             <a:r>
-              <a:rPr sz="1800" b="0" i="0">
-                <a:solidFill>
-                  <a:srgbClr val="333333"/>
-                </a:solidFill>
-                <a:latin typeface="맑은 고딕"/>
-                <a:ea typeface="맑은 고딕"/>
-                <a:cs typeface="맑은 고딕"/>
-              </a:rPr>
-              <a:t>시험문제 생성 · 설문 의견 요약 · 가상 학생질문 · 강의자료 평가를 생성형 AI로 자동화</a:t>
-            </a:r>
+              <a:rPr sz="1800" b="0" i="0" dirty="0" err="1">
+                <a:solidFill>
+                  <a:srgbClr val="333333"/>
+                </a:solidFill>
+                <a:latin typeface="맑은 고딕"/>
+                <a:ea typeface="맑은 고딕"/>
+                <a:cs typeface="맑은 고딕"/>
+              </a:rPr>
+              <a:t>시험문제</a:t>
+            </a:r>
+            <a:r>
+              <a:rPr sz="1800" b="0" i="0" dirty="0">
+                <a:solidFill>
+                  <a:srgbClr val="333333"/>
+                </a:solidFill>
+                <a:latin typeface="맑은 고딕"/>
+                <a:ea typeface="맑은 고딕"/>
+                <a:cs typeface="맑은 고딕"/>
+              </a:rPr>
+              <a:t> </a:t>
+            </a:r>
+            <a:r>
+              <a:rPr sz="1800" b="0" i="0" dirty="0" err="1">
+                <a:solidFill>
+                  <a:srgbClr val="333333"/>
+                </a:solidFill>
+                <a:latin typeface="맑은 고딕"/>
+                <a:ea typeface="맑은 고딕"/>
+                <a:cs typeface="맑은 고딕"/>
+              </a:rPr>
+              <a:t>생성</a:t>
+            </a:r>
+            <a:r>
+              <a:rPr sz="1800" b="0" i="0" dirty="0">
+                <a:solidFill>
+                  <a:srgbClr val="333333"/>
+                </a:solidFill>
+                <a:latin typeface="맑은 고딕"/>
+                <a:ea typeface="맑은 고딕"/>
+                <a:cs typeface="맑은 고딕"/>
+              </a:rPr>
+              <a:t> · </a:t>
+            </a:r>
+            <a:r>
+              <a:rPr sz="1800" b="0" i="0" dirty="0" err="1">
+                <a:solidFill>
+                  <a:srgbClr val="333333"/>
+                </a:solidFill>
+                <a:latin typeface="맑은 고딕"/>
+                <a:ea typeface="맑은 고딕"/>
+                <a:cs typeface="맑은 고딕"/>
+              </a:rPr>
+              <a:t>설문</a:t>
+            </a:r>
+            <a:r>
+              <a:rPr sz="1800" b="0" i="0" dirty="0">
+                <a:solidFill>
+                  <a:srgbClr val="333333"/>
+                </a:solidFill>
+                <a:latin typeface="맑은 고딕"/>
+                <a:ea typeface="맑은 고딕"/>
+                <a:cs typeface="맑은 고딕"/>
+              </a:rPr>
+              <a:t> </a:t>
+            </a:r>
+            <a:r>
+              <a:rPr sz="1800" b="0" i="0" dirty="0" err="1">
+                <a:solidFill>
+                  <a:srgbClr val="333333"/>
+                </a:solidFill>
+                <a:latin typeface="맑은 고딕"/>
+                <a:ea typeface="맑은 고딕"/>
+                <a:cs typeface="맑은 고딕"/>
+              </a:rPr>
+              <a:t>의견</a:t>
+            </a:r>
+            <a:r>
+              <a:rPr sz="1800" b="0" i="0" dirty="0">
+                <a:solidFill>
+                  <a:srgbClr val="333333"/>
+                </a:solidFill>
+                <a:latin typeface="맑은 고딕"/>
+                <a:ea typeface="맑은 고딕"/>
+                <a:cs typeface="맑은 고딕"/>
+              </a:rPr>
+              <a:t> </a:t>
+            </a:r>
+            <a:r>
+              <a:rPr sz="1800" b="0" i="0" dirty="0" err="1">
+                <a:solidFill>
+                  <a:srgbClr val="333333"/>
+                </a:solidFill>
+                <a:latin typeface="맑은 고딕"/>
+                <a:ea typeface="맑은 고딕"/>
+                <a:cs typeface="맑은 고딕"/>
+              </a:rPr>
+              <a:t>요약</a:t>
+            </a:r>
+            <a:r>
+              <a:rPr sz="1800" b="0" i="0" dirty="0">
+                <a:solidFill>
+                  <a:srgbClr val="333333"/>
+                </a:solidFill>
+                <a:latin typeface="맑은 고딕"/>
+                <a:ea typeface="맑은 고딕"/>
+                <a:cs typeface="맑은 고딕"/>
+              </a:rPr>
+              <a:t> · </a:t>
+            </a:r>
+            <a:r>
+              <a:rPr sz="1800" b="0" i="0" dirty="0" err="1">
+                <a:solidFill>
+                  <a:srgbClr val="333333"/>
+                </a:solidFill>
+                <a:latin typeface="맑은 고딕"/>
+                <a:ea typeface="맑은 고딕"/>
+                <a:cs typeface="맑은 고딕"/>
+              </a:rPr>
+              <a:t>가상</a:t>
+            </a:r>
+            <a:r>
+              <a:rPr sz="1800" b="0" i="0" dirty="0">
+                <a:solidFill>
+                  <a:srgbClr val="333333"/>
+                </a:solidFill>
+                <a:latin typeface="맑은 고딕"/>
+                <a:ea typeface="맑은 고딕"/>
+                <a:cs typeface="맑은 고딕"/>
+              </a:rPr>
+              <a:t> </a:t>
+            </a:r>
+            <a:r>
+              <a:rPr sz="1800" b="0" i="0" dirty="0" err="1">
+                <a:solidFill>
+                  <a:srgbClr val="333333"/>
+                </a:solidFill>
+                <a:latin typeface="맑은 고딕"/>
+                <a:ea typeface="맑은 고딕"/>
+                <a:cs typeface="맑은 고딕"/>
+              </a:rPr>
+              <a:t>학생질문</a:t>
+            </a:r>
+            <a:r>
+              <a:rPr sz="1800" b="0" i="0" dirty="0">
+                <a:solidFill>
+                  <a:srgbClr val="333333"/>
+                </a:solidFill>
+                <a:latin typeface="맑은 고딕"/>
+                <a:ea typeface="맑은 고딕"/>
+                <a:cs typeface="맑은 고딕"/>
+              </a:rPr>
+              <a:t> · </a:t>
+            </a:r>
+            <a:r>
+              <a:rPr sz="1800" b="0" i="0" dirty="0" err="1">
+                <a:solidFill>
+                  <a:srgbClr val="333333"/>
+                </a:solidFill>
+                <a:latin typeface="맑은 고딕"/>
+                <a:ea typeface="맑은 고딕"/>
+                <a:cs typeface="맑은 고딕"/>
+              </a:rPr>
+              <a:t>강의자료</a:t>
+            </a:r>
+            <a:r>
+              <a:rPr sz="1800" b="0" i="0" dirty="0">
+                <a:solidFill>
+                  <a:srgbClr val="333333"/>
+                </a:solidFill>
+                <a:latin typeface="맑은 고딕"/>
+                <a:ea typeface="맑은 고딕"/>
+                <a:cs typeface="맑은 고딕"/>
+              </a:rPr>
+              <a:t> </a:t>
+            </a:r>
+            <a:r>
+              <a:rPr sz="1800" b="0" i="0" dirty="0" err="1">
+                <a:solidFill>
+                  <a:srgbClr val="333333"/>
+                </a:solidFill>
+                <a:latin typeface="맑은 고딕"/>
+                <a:ea typeface="맑은 고딕"/>
+                <a:cs typeface="맑은 고딕"/>
+              </a:rPr>
+              <a:t>평가를</a:t>
+            </a:r>
+            <a:r>
+              <a:rPr sz="1800" b="0" i="0" dirty="0">
+                <a:solidFill>
+                  <a:srgbClr val="333333"/>
+                </a:solidFill>
+                <a:latin typeface="맑은 고딕"/>
+                <a:ea typeface="맑은 고딕"/>
+                <a:cs typeface="맑은 고딕"/>
+              </a:rPr>
+              <a:t> </a:t>
+            </a:r>
+            <a:r>
+              <a:rPr sz="1800" b="0" i="0" dirty="0" err="1">
+                <a:solidFill>
+                  <a:srgbClr val="333333"/>
+                </a:solidFill>
+                <a:latin typeface="맑은 고딕"/>
+                <a:ea typeface="맑은 고딕"/>
+                <a:cs typeface="맑은 고딕"/>
+              </a:rPr>
+              <a:t>생성형</a:t>
+            </a:r>
+            <a:r>
+              <a:rPr sz="1800" b="0" i="0" dirty="0">
+                <a:solidFill>
+                  <a:srgbClr val="333333"/>
+                </a:solidFill>
+                <a:latin typeface="맑은 고딕"/>
+                <a:ea typeface="맑은 고딕"/>
+                <a:cs typeface="맑은 고딕"/>
+              </a:rPr>
+              <a:t> </a:t>
+            </a:r>
+            <a:r>
+              <a:rPr sz="1800" b="0" i="0" dirty="0" err="1">
+                <a:solidFill>
+                  <a:srgbClr val="333333"/>
+                </a:solidFill>
+                <a:latin typeface="맑은 고딕"/>
+                <a:ea typeface="맑은 고딕"/>
+                <a:cs typeface="맑은 고딕"/>
+              </a:rPr>
+              <a:t>AI로</a:t>
+            </a:r>
+            <a:r>
+              <a:rPr sz="1800" b="0" i="0" dirty="0">
+                <a:solidFill>
+                  <a:srgbClr val="333333"/>
+                </a:solidFill>
+                <a:latin typeface="맑은 고딕"/>
+                <a:ea typeface="맑은 고딕"/>
+                <a:cs typeface="맑은 고딕"/>
+              </a:rPr>
+              <a:t> </a:t>
+            </a:r>
+            <a:r>
+              <a:rPr sz="1800" b="0" i="0" dirty="0" err="1">
+                <a:solidFill>
+                  <a:srgbClr val="333333"/>
+                </a:solidFill>
+                <a:latin typeface="맑은 고딕"/>
+                <a:ea typeface="맑은 고딕"/>
+                <a:cs typeface="맑은 고딕"/>
+              </a:rPr>
+              <a:t>자동화</a:t>
+            </a:r>
+            <a:endParaRPr sz="1800" b="0" i="0" dirty="0">
+              <a:solidFill>
+                <a:srgbClr val="333333"/>
+              </a:solidFill>
+              <a:latin typeface="맑은 고딕"/>
+              <a:ea typeface="맑은 고딕"/>
+              <a:cs typeface="맑은 고딕"/>
+            </a:endParaRPr>
           </a:p>
         </p:txBody>
       </p:sp>
@@ -31906,7 +37167,7 @@
               </a:lnSpc>
             </a:pPr>
             <a:r>
-              <a:rPr sz="1600" b="1" i="0">
+              <a:rPr sz="1600" b="1" i="0" dirty="0" err="1">
                 <a:solidFill>
                   <a:srgbClr val="1F456E"/>
                 </a:solidFill>
@@ -31914,10 +37175,43 @@
                 <a:ea typeface="맑은 고딕"/>
                 <a:cs typeface="맑은 고딕"/>
               </a:rPr>
-              <a:t>자동 배포   </a:t>
-            </a:r>
-            <a:r>
-              <a:rPr lang="ko-KR" altLang="en-US" sz="1600" b="0" i="0">
+              <a:t>자동</a:t>
+            </a:r>
+            <a:r>
+              <a:rPr sz="1600" b="1" i="0" dirty="0">
+                <a:solidFill>
+                  <a:srgbClr val="1F456E"/>
+                </a:solidFill>
+                <a:latin typeface="맑은 고딕"/>
+                <a:ea typeface="맑은 고딕"/>
+                <a:cs typeface="맑은 고딕"/>
+              </a:rPr>
+              <a:t> </a:t>
+            </a:r>
+            <a:r>
+              <a:rPr sz="1600" b="1" i="0" dirty="0" err="1">
+                <a:solidFill>
+                  <a:srgbClr val="1F456E"/>
+                </a:solidFill>
+                <a:latin typeface="맑은 고딕"/>
+                <a:ea typeface="맑은 고딕"/>
+                <a:cs typeface="맑은 고딕"/>
+              </a:rPr>
+              <a:t>배포</a:t>
+            </a:r>
+            <a:r>
+              <a:rPr sz="1600" b="1" i="0" dirty="0">
+                <a:solidFill>
+                  <a:srgbClr val="1F456E"/>
+                </a:solidFill>
+                <a:latin typeface="맑은 고딕"/>
+                <a:ea typeface="맑은 고딕"/>
+                <a:cs typeface="맑은 고딕"/>
+              </a:rPr>
+              <a:t>   </a:t>
+            </a:r>
+            <a:r>
+              <a:rPr lang="ko-KR" altLang="en-US" sz="1600" b="0" i="0" dirty="0">
                 <a:solidFill>
                   <a:srgbClr val="333333"/>
                 </a:solidFill>
@@ -31928,7 +37222,7 @@
               <a:t>로컬</a:t>
             </a:r>
             <a:r>
-              <a:rPr sz="1600" b="0" i="0">
+              <a:rPr sz="1600" b="0" i="0" dirty="0">
                 <a:solidFill>
                   <a:srgbClr val="333333"/>
                 </a:solidFill>
@@ -31939,7 +37233,7 @@
               <a:t> </a:t>
             </a:r>
             <a:r>
-              <a:rPr lang="ko-KR" altLang="en-US" sz="1600" b="0" i="0">
+              <a:rPr lang="ko-KR" altLang="en-US" sz="1600" b="0" i="0" dirty="0">
                 <a:solidFill>
                   <a:srgbClr val="333333"/>
                 </a:solidFill>
@@ -31950,7 +37244,7 @@
               <a:t>프로젝트 </a:t>
             </a:r>
             <a:r>
-              <a:rPr sz="1600" b="0" i="0">
+              <a:rPr sz="1600" b="0" i="0" dirty="0">
                 <a:solidFill>
                   <a:srgbClr val="333333"/>
                 </a:solidFill>
@@ -31961,7 +37255,7 @@
               <a:t> → </a:t>
             </a:r>
             <a:r>
-              <a:rPr lang="en-US" sz="1600" b="0" i="0">
+              <a:rPr lang="en-US" sz="1600" b="0" i="0" dirty="0">
                 <a:solidFill>
                   <a:srgbClr val="333333"/>
                 </a:solidFill>
@@ -31972,7 +37266,7 @@
               <a:t>GitHub Push </a:t>
             </a:r>
             <a:r>
-              <a:rPr sz="1600" b="0" i="0">
+              <a:rPr sz="1600" b="0" i="0" dirty="0">
                 <a:solidFill>
                   <a:srgbClr val="333333"/>
                 </a:solidFill>
@@ -31983,7 +37277,7 @@
               <a:t>→ </a:t>
             </a:r>
             <a:r>
-              <a:rPr lang="en-US" sz="1600" b="0" i="0">
+              <a:rPr lang="en-US" sz="1600" b="0" i="0" dirty="0">
                 <a:solidFill>
                   <a:srgbClr val="333333"/>
                 </a:solidFill>
@@ -31994,7 +37288,7 @@
               <a:t>Google </a:t>
             </a:r>
             <a:r>
-              <a:rPr sz="1600" b="0" i="0">
+              <a:rPr sz="1600" b="0" i="0" dirty="0">
                 <a:solidFill>
                   <a:srgbClr val="333333"/>
                 </a:solidFill>
@@ -32005,7 +37299,7 @@
               <a:t>Cloud Run</a:t>
             </a:r>
             <a:r>
-              <a:rPr lang="en-US" sz="1600" b="0" i="0">
+              <a:rPr lang="en-US" sz="1600" b="0" i="0" dirty="0">
                 <a:solidFill>
                   <a:srgbClr val="333333"/>
                 </a:solidFill>
@@ -32016,7 +37310,7 @@
               <a:t> </a:t>
             </a:r>
             <a:r>
-              <a:rPr lang="ko-KR" altLang="en-US" sz="1600" b="0" i="0">
+              <a:rPr lang="ko-KR" altLang="en-US" sz="1600" b="0" i="0" dirty="0">
                 <a:solidFill>
                   <a:srgbClr val="333333"/>
                 </a:solidFill>
@@ -32027,7 +37321,7 @@
               <a:t>에 자동 빌드</a:t>
             </a:r>
             <a:r>
-              <a:rPr lang="en-US" altLang="ko-KR" sz="1600" b="0" i="0">
+              <a:rPr lang="en-US" altLang="ko-KR" sz="1600" b="0" i="0" dirty="0">
                 <a:solidFill>
                   <a:srgbClr val="333333"/>
                 </a:solidFill>
@@ -32038,7 +37332,7 @@
               <a:t>, </a:t>
             </a:r>
             <a:r>
-              <a:rPr sz="1600" b="0" i="0">
+              <a:rPr sz="1600" b="0" i="0" dirty="0" err="1">
                 <a:solidFill>
                   <a:srgbClr val="333333"/>
                 </a:solidFill>
@@ -32049,17 +37343,39 @@
               <a:t>배포</a:t>
             </a:r>
             <a:r>
-              <a:rPr lang="ko-KR" altLang="en-US" sz="1600" b="0" i="0">
-                <a:solidFill>
-                  <a:srgbClr val="333333"/>
-                </a:solidFill>
-                <a:latin typeface="맑은 고딕"/>
-                <a:ea typeface="맑은 고딕"/>
-                <a:cs typeface="맑은 고딕"/>
-              </a:rPr>
-              <a:t>하는 원클릭 배포 환경 구현</a:t>
-            </a:r>
-            <a:endParaRPr sz="1600" b="0" i="0">
+              <a:rPr lang="ko-KR" altLang="en-US" sz="1600" b="0" i="0" dirty="0">
+                <a:solidFill>
+                  <a:srgbClr val="333333"/>
+                </a:solidFill>
+                <a:latin typeface="맑은 고딕"/>
+                <a:ea typeface="맑은 고딕"/>
+                <a:cs typeface="맑은 고딕"/>
+              </a:rPr>
+              <a:t>하는 </a:t>
+            </a:r>
+            <a:r>
+              <a:rPr lang="ko-KR" altLang="en-US" sz="1600" b="0" i="0" dirty="0" err="1">
+                <a:solidFill>
+                  <a:srgbClr val="333333"/>
+                </a:solidFill>
+                <a:latin typeface="맑은 고딕"/>
+                <a:ea typeface="맑은 고딕"/>
+                <a:cs typeface="맑은 고딕"/>
+              </a:rPr>
+              <a:t>원클릭</a:t>
+            </a:r>
+            <a:r>
+              <a:rPr lang="ko-KR" altLang="en-US" sz="1600" b="0" i="0" dirty="0">
+                <a:solidFill>
+                  <a:srgbClr val="333333"/>
+                </a:solidFill>
+                <a:latin typeface="맑은 고딕"/>
+                <a:ea typeface="맑은 고딕"/>
+                <a:cs typeface="맑은 고딕"/>
+              </a:rPr>
+              <a:t> 배포 환경 구현</a:t>
+            </a:r>
+            <a:endParaRPr sz="1600" b="0" i="0" dirty="0">
               <a:solidFill>
                 <a:srgbClr val="333333"/>
               </a:solidFill>
@@ -32116,7 +37432,7 @@
         <p:spPr>
           <a:xfrm>
             <a:off x="6263640" y="3931920"/>
-            <a:ext cx="2715768" cy="2468880"/>
+            <a:ext cx="2630871" cy="2468880"/>
           </a:xfrm>
           <a:prstGeom prst="roundRect">
             <a:avLst>
@@ -32157,7 +37473,7 @@
               </a:spcAft>
             </a:pPr>
             <a:r>
-              <a:rPr sz="1600" b="1" i="0">
+              <a:rPr sz="1600" b="1" i="0" dirty="0" err="1">
                 <a:solidFill>
                   <a:srgbClr val="1F456E"/>
                 </a:solidFill>
@@ -32167,24 +37483,14 @@
               </a:rPr>
               <a:t>박수연</a:t>
             </a:r>
-          </a:p>
-          <a:p>
-            <a:pPr algn="l">
-              <a:spcAft>
-                <a:spcPts val="500"/>
-              </a:spcAft>
-            </a:pPr>
-            <a:r>
-              <a:rPr sz="1600" b="1" i="0">
-                <a:solidFill>
-                  <a:srgbClr val="3786BB"/>
-                </a:solidFill>
-                <a:latin typeface="맑은 고딕"/>
-                <a:ea typeface="맑은 고딕"/>
-                <a:cs typeface="맑은 고딕"/>
-              </a:rPr>
-              <a:t>기술개발 · 시스템 통합 총괄</a:t>
-            </a:r>
+            <a:endParaRPr sz="1600" b="1" i="0" dirty="0">
+              <a:solidFill>
+                <a:srgbClr val="1F456E"/>
+              </a:solidFill>
+              <a:latin typeface="맑은 고딕"/>
+              <a:ea typeface="맑은 고딕"/>
+              <a:cs typeface="맑은 고딕"/>
+            </a:endParaRPr>
           </a:p>
           <a:p>
             <a:pPr algn="l">
@@ -32192,8 +37498,23 @@
                 <a:spcPct val="118000"/>
               </a:lnSpc>
             </a:pPr>
-            <a:r>
-              <a:rPr sz="1600" b="0" i="0">
+            <a:endParaRPr lang="en-US" sz="1600" b="0" i="0" dirty="0">
+              <a:solidFill>
+                <a:srgbClr val="333333"/>
+              </a:solidFill>
+              <a:latin typeface="맑은 고딕"/>
+              <a:ea typeface="맑은 고딕"/>
+              <a:cs typeface="맑은 고딕"/>
+            </a:endParaRPr>
+          </a:p>
+          <a:p>
+            <a:pPr algn="l">
+              <a:lnSpc>
+                <a:spcPct val="118000"/>
+              </a:lnSpc>
+            </a:pPr>
+            <a:r>
+              <a:rPr sz="1600" b="0" i="0" dirty="0" err="1">
                 <a:solidFill>
                   <a:srgbClr val="333333"/>
                 </a:solidFill>
@@ -32204,7 +37525,7 @@
               <a:t>아키텍처</a:t>
             </a:r>
             <a:r>
-              <a:rPr lang="en-US" sz="1600" b="0" i="0">
+              <a:rPr lang="en-US" sz="1600" b="0" i="0" dirty="0">
                 <a:solidFill>
                   <a:srgbClr val="333333"/>
                 </a:solidFill>
@@ -32215,7 +37536,7 @@
               <a:t> </a:t>
             </a:r>
             <a:r>
-              <a:rPr lang="ko-KR" altLang="en-US" sz="1600" b="0" i="0">
+              <a:rPr lang="ko-KR" altLang="en-US" sz="1600" b="0" i="0" dirty="0">
                 <a:solidFill>
                   <a:srgbClr val="333333"/>
                 </a:solidFill>
@@ -32226,29 +37547,62 @@
               <a:t>설계</a:t>
             </a:r>
             <a:r>
-              <a:rPr sz="1600" b="0" i="0">
-                <a:solidFill>
-                  <a:srgbClr val="333333"/>
-                </a:solidFill>
-                <a:latin typeface="맑은 고딕"/>
-                <a:ea typeface="맑은 고딕"/>
-                <a:cs typeface="맑은 고딕"/>
-              </a:rPr>
-              <a:t>·데이터 연계 설계, 공통 모듈·게시엔진 개발, </a:t>
-            </a:r>
-            <a:r>
-              <a:rPr lang="ko-KR" altLang="en-US" sz="1600" b="0" i="0">
-                <a:solidFill>
-                  <a:srgbClr val="333333"/>
-                </a:solidFill>
-                <a:latin typeface="맑은 고딕"/>
-                <a:ea typeface="맑은 고딕"/>
-                <a:cs typeface="맑은 고딕"/>
-              </a:rPr>
-              <a:t>대시보드 개발</a:t>
-            </a:r>
-            <a:r>
-              <a:rPr lang="en-US" altLang="ko-KR" sz="1600" b="0" i="0">
+              <a:rPr sz="1600" b="0" i="0" dirty="0">
+                <a:solidFill>
+                  <a:srgbClr val="333333"/>
+                </a:solidFill>
+                <a:latin typeface="맑은 고딕"/>
+                <a:ea typeface="맑은 고딕"/>
+                <a:cs typeface="맑은 고딕"/>
+              </a:rPr>
+              <a:t>·</a:t>
+            </a:r>
+            <a:r>
+              <a:rPr lang="en-US" sz="1600" b="0" i="0" dirty="0">
+                <a:solidFill>
+                  <a:srgbClr val="333333"/>
+                </a:solidFill>
+                <a:latin typeface="맑은 고딕"/>
+                <a:ea typeface="맑은 고딕"/>
+                <a:cs typeface="맑은 고딕"/>
+              </a:rPr>
+              <a:t> </a:t>
+            </a:r>
+            <a:r>
+              <a:rPr lang="ko-KR" altLang="en-US" sz="1600" b="0" i="0" dirty="0">
+                <a:solidFill>
+                  <a:srgbClr val="333333"/>
+                </a:solidFill>
+                <a:latin typeface="맑은 고딕"/>
+                <a:ea typeface="맑은 고딕"/>
+                <a:cs typeface="맑은 고딕"/>
+              </a:rPr>
+              <a:t>라이브러리 및 </a:t>
+            </a:r>
+            <a:r>
+              <a:rPr lang="en-US" altLang="ko-KR" sz="1600" b="0" i="0" dirty="0">
+                <a:solidFill>
+                  <a:srgbClr val="333333"/>
+                </a:solidFill>
+                <a:latin typeface="맑은 고딕"/>
+                <a:ea typeface="맑은 고딕"/>
+                <a:cs typeface="맑은 고딕"/>
+              </a:rPr>
+              <a:t>API </a:t>
+            </a:r>
+            <a:r>
+              <a:rPr lang="ko-KR" altLang="en-US" sz="1600" b="0" i="0" dirty="0">
+                <a:solidFill>
+                  <a:srgbClr val="333333"/>
+                </a:solidFill>
+                <a:latin typeface="맑은 고딕"/>
+                <a:ea typeface="맑은 고딕"/>
+                <a:cs typeface="맑은 고딕"/>
+              </a:rPr>
+              <a:t>개발</a:t>
+            </a:r>
+            <a:r>
+              <a:rPr lang="en-US" altLang="ko-KR" sz="1600" b="0" i="0" dirty="0">
                 <a:solidFill>
                   <a:srgbClr val="333333"/>
                 </a:solidFill>
@@ -32259,16 +37613,123 @@
               <a:t>. </a:t>
             </a:r>
             <a:r>
-              <a:rPr sz="1600" b="0" i="0">
-                <a:solidFill>
-                  <a:srgbClr val="333333"/>
-                </a:solidFill>
-                <a:latin typeface="맑은 고딕"/>
-                <a:ea typeface="맑은 고딕"/>
-                <a:cs typeface="맑은 고딕"/>
-              </a:rPr>
-              <a:t>배포 관리</a:t>
-            </a:r>
+              <a:rPr sz="1600" b="0" i="0" dirty="0">
+                <a:solidFill>
+                  <a:srgbClr val="333333"/>
+                </a:solidFill>
+                <a:latin typeface="맑은 고딕"/>
+                <a:ea typeface="맑은 고딕"/>
+                <a:cs typeface="맑은 고딕"/>
+              </a:rPr>
+              <a:t> </a:t>
+            </a:r>
+            <a:r>
+              <a:rPr sz="1600" b="0" i="0" dirty="0" err="1">
+                <a:solidFill>
+                  <a:srgbClr val="333333"/>
+                </a:solidFill>
+                <a:latin typeface="맑은 고딕"/>
+                <a:ea typeface="맑은 고딕"/>
+                <a:cs typeface="맑은 고딕"/>
+              </a:rPr>
+              <a:t>공통</a:t>
+            </a:r>
+            <a:r>
+              <a:rPr sz="1600" b="0" i="0" dirty="0">
+                <a:solidFill>
+                  <a:srgbClr val="333333"/>
+                </a:solidFill>
+                <a:latin typeface="맑은 고딕"/>
+                <a:ea typeface="맑은 고딕"/>
+                <a:cs typeface="맑은 고딕"/>
+              </a:rPr>
+              <a:t> </a:t>
+            </a:r>
+            <a:r>
+              <a:rPr sz="1600" b="0" i="0" dirty="0" err="1">
+                <a:solidFill>
+                  <a:srgbClr val="333333"/>
+                </a:solidFill>
+                <a:latin typeface="맑은 고딕"/>
+                <a:ea typeface="맑은 고딕"/>
+                <a:cs typeface="맑은 고딕"/>
+              </a:rPr>
+              <a:t>모듈·게시엔진</a:t>
+            </a:r>
+            <a:r>
+              <a:rPr sz="1600" b="0" i="0" dirty="0">
+                <a:solidFill>
+                  <a:srgbClr val="333333"/>
+                </a:solidFill>
+                <a:latin typeface="맑은 고딕"/>
+                <a:ea typeface="맑은 고딕"/>
+                <a:cs typeface="맑은 고딕"/>
+              </a:rPr>
+              <a:t> </a:t>
+            </a:r>
+            <a:r>
+              <a:rPr sz="1600" b="0" i="0" dirty="0" err="1">
+                <a:solidFill>
+                  <a:srgbClr val="333333"/>
+                </a:solidFill>
+                <a:latin typeface="맑은 고딕"/>
+                <a:ea typeface="맑은 고딕"/>
+                <a:cs typeface="맑은 고딕"/>
+              </a:rPr>
+              <a:t>개발</a:t>
+            </a:r>
+            <a:r>
+              <a:rPr sz="1600" b="0" i="0" dirty="0">
+                <a:solidFill>
+                  <a:srgbClr val="333333"/>
+                </a:solidFill>
+                <a:latin typeface="맑은 고딕"/>
+                <a:ea typeface="맑은 고딕"/>
+                <a:cs typeface="맑은 고딕"/>
+              </a:rPr>
+              <a:t>, </a:t>
+            </a:r>
+            <a:r>
+              <a:rPr sz="1600" b="0" i="0" dirty="0" err="1">
+                <a:solidFill>
+                  <a:srgbClr val="333333"/>
+                </a:solidFill>
+                <a:latin typeface="맑은 고딕"/>
+                <a:ea typeface="맑은 고딕"/>
+                <a:cs typeface="맑은 고딕"/>
+              </a:rPr>
+              <a:t>배포</a:t>
+            </a:r>
+            <a:r>
+              <a:rPr sz="1600" b="0" i="0" dirty="0">
+                <a:solidFill>
+                  <a:srgbClr val="333333"/>
+                </a:solidFill>
+                <a:latin typeface="맑은 고딕"/>
+                <a:ea typeface="맑은 고딕"/>
+                <a:cs typeface="맑은 고딕"/>
+              </a:rPr>
+              <a:t> </a:t>
+            </a:r>
+            <a:r>
+              <a:rPr sz="1600" b="0" i="0" dirty="0" err="1">
+                <a:solidFill>
+                  <a:srgbClr val="333333"/>
+                </a:solidFill>
+                <a:latin typeface="맑은 고딕"/>
+                <a:ea typeface="맑은 고딕"/>
+                <a:cs typeface="맑은 고딕"/>
+              </a:rPr>
+              <a:t>관리</a:t>
+            </a:r>
+            <a:endParaRPr sz="1600" b="0" i="0" dirty="0">
+              <a:solidFill>
+                <a:srgbClr val="333333"/>
+              </a:solidFill>
+              <a:latin typeface="맑은 고딕"/>
+              <a:ea typeface="맑은 고딕"/>
+              <a:cs typeface="맑은 고딕"/>
+            </a:endParaRPr>
           </a:p>
         </p:txBody>
       </p:sp>
@@ -32280,8 +37741,8 @@
         </p:nvSpPr>
         <p:spPr>
           <a:xfrm>
-            <a:off x="9116567" y="3931920"/>
-            <a:ext cx="2715768" cy="2468880"/>
+            <a:off x="8980531" y="3931920"/>
+            <a:ext cx="2851804" cy="2468880"/>
           </a:xfrm>
           <a:prstGeom prst="roundRect">
             <a:avLst>
@@ -32322,7 +37783,7 @@
               </a:spcAft>
             </a:pPr>
             <a:r>
-              <a:rPr sz="1600" b="1" i="0">
+              <a:rPr sz="1600" b="1" i="0" dirty="0" err="1">
                 <a:solidFill>
                   <a:srgbClr val="1F456E"/>
                 </a:solidFill>
@@ -32332,49 +37793,9 @@
               </a:rPr>
               <a:t>박희용</a:t>
             </a:r>
-          </a:p>
-          <a:p>
-            <a:pPr algn="l">
-              <a:spcAft>
-                <a:spcPts val="500"/>
-              </a:spcAft>
-            </a:pPr>
-            <a:r>
-              <a:rPr sz="1600" b="1" i="0">
-                <a:solidFill>
-                  <a:srgbClr val="3786BB"/>
-                </a:solidFill>
-                <a:latin typeface="맑은 고딕"/>
-                <a:ea typeface="맑은 고딕"/>
-                <a:cs typeface="맑은 고딕"/>
-              </a:rPr>
-              <a:t>요구사항 분석 · 서비스 기획</a:t>
-            </a:r>
-            <a:r>
-              <a:rPr lang="en-US" sz="1600" b="1" i="0">
-                <a:solidFill>
-                  <a:srgbClr val="3786BB"/>
-                </a:solidFill>
-                <a:latin typeface="맑은 고딕"/>
-                <a:ea typeface="맑은 고딕"/>
-                <a:cs typeface="맑은 고딕"/>
-              </a:rPr>
-              <a:t>. </a:t>
-            </a:r>
-            <a:r>
-              <a:rPr lang="ko-KR" altLang="en-US" sz="1600" b="1" i="0">
-                <a:solidFill>
-                  <a:srgbClr val="3786BB"/>
-                </a:solidFill>
-                <a:latin typeface="맑은 고딕"/>
-                <a:ea typeface="맑은 고딕"/>
-                <a:cs typeface="맑은 고딕"/>
-              </a:rPr>
-              <a:t>데이터 설계</a:t>
-            </a:r>
-            <a:endParaRPr sz="1600" b="1" i="0">
+            <a:endParaRPr lang="en-US" sz="1600" b="1" i="0" dirty="0">
               <a:solidFill>
-                <a:srgbClr val="3786BB"/>
+                <a:srgbClr val="1F456E"/>
               </a:solidFill>
               <a:latin typeface="맑은 고딕"/>
               <a:ea typeface="맑은 고딕"/>
@@ -32383,23 +37804,181 @@
           </a:p>
           <a:p>
             <a:pPr algn="l">
-              <a:lnSpc>
-                <a:spcPct val="118000"/>
-              </a:lnSpc>
+              <a:spcAft>
+                <a:spcPts val="100"/>
+              </a:spcAft>
             </a:pPr>
-            <a:r>
-              <a:rPr sz="1600" b="0" i="0">
-                <a:solidFill>
-                  <a:srgbClr val="333333"/>
-                </a:solidFill>
-                <a:latin typeface="맑은 고딕"/>
-                <a:ea typeface="맑은 고딕"/>
-                <a:cs typeface="맑은 고딕"/>
-              </a:rPr>
-              <a:t>사용자별 요구사항 정의·기능 우선순위, 운영 시나리오 설계, </a:t>
-            </a:r>
-            <a:r>
-              <a:rPr lang="ko-KR" altLang="en-US" sz="1600" b="0" i="0">
+            <a:endParaRPr lang="en-US" altLang="ko-KR" sz="1600" b="1" dirty="0">
+              <a:solidFill>
+                <a:srgbClr val="1F456E"/>
+              </a:solidFill>
+              <a:latin typeface="맑은 고딕"/>
+              <a:ea typeface="맑은 고딕"/>
+              <a:cs typeface="맑은 고딕"/>
+            </a:endParaRPr>
+          </a:p>
+          <a:p>
+            <a:pPr algn="l">
+              <a:spcAft>
+                <a:spcPts val="100"/>
+              </a:spcAft>
+            </a:pPr>
+            <a:r>
+              <a:rPr lang="ko-KR" altLang="en-US" sz="1600" b="0" i="0" dirty="0">
+                <a:solidFill>
+                  <a:srgbClr val="333333"/>
+                </a:solidFill>
+                <a:latin typeface="맑은 고딕"/>
+                <a:ea typeface="맑은 고딕"/>
+                <a:cs typeface="맑은 고딕"/>
+              </a:rPr>
+              <a:t>아키텍처 설계</a:t>
+            </a:r>
+            <a:r>
+              <a:rPr lang="en-US" altLang="ko-KR" sz="1600" b="0" i="0" dirty="0">
+                <a:solidFill>
+                  <a:srgbClr val="333333"/>
+                </a:solidFill>
+                <a:latin typeface="맑은 고딕"/>
+                <a:ea typeface="맑은 고딕"/>
+                <a:cs typeface="맑은 고딕"/>
+              </a:rPr>
+              <a:t>. </a:t>
+            </a:r>
+            <a:r>
+              <a:rPr sz="1600" b="0" i="0" dirty="0" err="1">
+                <a:solidFill>
+                  <a:srgbClr val="333333"/>
+                </a:solidFill>
+                <a:latin typeface="맑은 고딕"/>
+                <a:ea typeface="맑은 고딕"/>
+                <a:cs typeface="맑은 고딕"/>
+              </a:rPr>
+              <a:t>요구사항</a:t>
+            </a:r>
+            <a:r>
+              <a:rPr sz="1600" b="0" i="0" dirty="0">
+                <a:solidFill>
+                  <a:srgbClr val="333333"/>
+                </a:solidFill>
+                <a:latin typeface="맑은 고딕"/>
+                <a:ea typeface="맑은 고딕"/>
+                <a:cs typeface="맑은 고딕"/>
+              </a:rPr>
+              <a:t> </a:t>
+            </a:r>
+            <a:r>
+              <a:rPr sz="1600" b="0" i="0" dirty="0" err="1">
+                <a:solidFill>
+                  <a:srgbClr val="333333"/>
+                </a:solidFill>
+                <a:latin typeface="맑은 고딕"/>
+                <a:ea typeface="맑은 고딕"/>
+                <a:cs typeface="맑은 고딕"/>
+              </a:rPr>
+              <a:t>정의·기능</a:t>
+            </a:r>
+            <a:r>
+              <a:rPr sz="1600" b="0" i="0" dirty="0">
+                <a:solidFill>
+                  <a:srgbClr val="333333"/>
+                </a:solidFill>
+                <a:latin typeface="맑은 고딕"/>
+                <a:ea typeface="맑은 고딕"/>
+                <a:cs typeface="맑은 고딕"/>
+              </a:rPr>
+              <a:t> </a:t>
+            </a:r>
+            <a:r>
+              <a:rPr sz="1600" b="0" i="0" dirty="0" err="1">
+                <a:solidFill>
+                  <a:srgbClr val="333333"/>
+                </a:solidFill>
+                <a:latin typeface="맑은 고딕"/>
+                <a:ea typeface="맑은 고딕"/>
+                <a:cs typeface="맑은 고딕"/>
+              </a:rPr>
+              <a:t>우선순위</a:t>
+            </a:r>
+            <a:r>
+              <a:rPr lang="ko-KR" altLang="en-US" sz="1600" b="0" i="0" dirty="0">
+                <a:solidFill>
+                  <a:srgbClr val="333333"/>
+                </a:solidFill>
+                <a:latin typeface="맑은 고딕"/>
+                <a:ea typeface="맑은 고딕"/>
+                <a:cs typeface="맑은 고딕"/>
+              </a:rPr>
+              <a:t>와 </a:t>
+            </a:r>
+            <a:r>
+              <a:rPr sz="1600" b="0" i="0" dirty="0" err="1">
+                <a:solidFill>
+                  <a:srgbClr val="333333"/>
+                </a:solidFill>
+                <a:latin typeface="맑은 고딕"/>
+                <a:ea typeface="맑은 고딕"/>
+                <a:cs typeface="맑은 고딕"/>
+              </a:rPr>
+              <a:t>운영</a:t>
+            </a:r>
+            <a:r>
+              <a:rPr sz="1600" b="0" i="0" dirty="0">
+                <a:solidFill>
+                  <a:srgbClr val="333333"/>
+                </a:solidFill>
+                <a:latin typeface="맑은 고딕"/>
+                <a:ea typeface="맑은 고딕"/>
+                <a:cs typeface="맑은 고딕"/>
+              </a:rPr>
+              <a:t> </a:t>
+            </a:r>
+            <a:r>
+              <a:rPr sz="1600" b="0" i="0" dirty="0" err="1">
+                <a:solidFill>
+                  <a:srgbClr val="333333"/>
+                </a:solidFill>
+                <a:latin typeface="맑은 고딕"/>
+                <a:ea typeface="맑은 고딕"/>
+                <a:cs typeface="맑은 고딕"/>
+              </a:rPr>
+              <a:t>시나리오</a:t>
+            </a:r>
+            <a:r>
+              <a:rPr sz="1600" b="0" i="0" dirty="0">
+                <a:solidFill>
+                  <a:srgbClr val="333333"/>
+                </a:solidFill>
+                <a:latin typeface="맑은 고딕"/>
+                <a:ea typeface="맑은 고딕"/>
+                <a:cs typeface="맑은 고딕"/>
+              </a:rPr>
+              <a:t> </a:t>
+            </a:r>
+            <a:r>
+              <a:rPr sz="1600" b="0" i="0" dirty="0" err="1">
+                <a:solidFill>
+                  <a:srgbClr val="333333"/>
+                </a:solidFill>
+                <a:latin typeface="맑은 고딕"/>
+                <a:ea typeface="맑은 고딕"/>
+                <a:cs typeface="맑은 고딕"/>
+              </a:rPr>
+              <a:t>설계</a:t>
+            </a:r>
+            <a:r>
+              <a:rPr sz="1600" b="0" i="0" dirty="0">
+                <a:solidFill>
+                  <a:srgbClr val="333333"/>
+                </a:solidFill>
+                <a:latin typeface="맑은 고딕"/>
+                <a:ea typeface="맑은 고딕"/>
+                <a:cs typeface="맑은 고딕"/>
+              </a:rPr>
+              <a:t>, </a:t>
+            </a:r>
+            <a:r>
+              <a:rPr lang="ko-KR" altLang="en-US" sz="1600" b="0" i="0" dirty="0">
                 <a:solidFill>
                   <a:srgbClr val="333333"/>
                 </a:solidFill>
@@ -32410,7 +37989,7 @@
               <a:t>데이터구조 설계</a:t>
             </a:r>
             <a:r>
-              <a:rPr lang="en-US" altLang="ko-KR" sz="1600" b="0" i="0">
+              <a:rPr lang="en-US" altLang="ko-KR" sz="1600" b="0" i="0" dirty="0">
                 <a:solidFill>
                   <a:srgbClr val="333333"/>
                 </a:solidFill>
@@ -32421,16 +38000,112 @@
               <a:t>. </a:t>
             </a:r>
             <a:r>
-              <a:rPr sz="1600" b="0" i="0">
-                <a:solidFill>
-                  <a:srgbClr val="333333"/>
-                </a:solidFill>
-                <a:latin typeface="맑은 고딕"/>
-                <a:ea typeface="맑은 고딕"/>
-                <a:cs typeface="맑은 고딕"/>
-              </a:rPr>
-              <a:t>뷰어 화면 구성·, 사용자 테스트</a:t>
-            </a:r>
+              <a:rPr sz="1600" b="0" i="0" dirty="0" err="1">
+                <a:solidFill>
+                  <a:srgbClr val="333333"/>
+                </a:solidFill>
+                <a:latin typeface="맑은 고딕"/>
+                <a:ea typeface="맑은 고딕"/>
+                <a:cs typeface="맑은 고딕"/>
+              </a:rPr>
+              <a:t>뷰어</a:t>
+            </a:r>
+            <a:r>
+              <a:rPr sz="1600" b="0" i="0" dirty="0">
+                <a:solidFill>
+                  <a:srgbClr val="333333"/>
+                </a:solidFill>
+                <a:latin typeface="맑은 고딕"/>
+                <a:ea typeface="맑은 고딕"/>
+                <a:cs typeface="맑은 고딕"/>
+              </a:rPr>
+              <a:t> </a:t>
+            </a:r>
+            <a:r>
+              <a:rPr sz="1600" b="0" i="0" dirty="0" err="1">
+                <a:solidFill>
+                  <a:srgbClr val="333333"/>
+                </a:solidFill>
+                <a:latin typeface="맑은 고딕"/>
+                <a:ea typeface="맑은 고딕"/>
+                <a:cs typeface="맑은 고딕"/>
+              </a:rPr>
+              <a:t>화면</a:t>
+            </a:r>
+            <a:r>
+              <a:rPr sz="1600" b="0" i="0" dirty="0">
+                <a:solidFill>
+                  <a:srgbClr val="333333"/>
+                </a:solidFill>
+                <a:latin typeface="맑은 고딕"/>
+                <a:ea typeface="맑은 고딕"/>
+                <a:cs typeface="맑은 고딕"/>
+              </a:rPr>
+              <a:t> </a:t>
+            </a:r>
+            <a:r>
+              <a:rPr sz="1600" b="0" i="0" dirty="0" err="1">
+                <a:solidFill>
+                  <a:srgbClr val="333333"/>
+                </a:solidFill>
+                <a:latin typeface="맑은 고딕"/>
+                <a:ea typeface="맑은 고딕"/>
+                <a:cs typeface="맑은 고딕"/>
+              </a:rPr>
+              <a:t>구성</a:t>
+            </a:r>
+            <a:r>
+              <a:rPr sz="1600" b="0" i="0" dirty="0">
+                <a:solidFill>
+                  <a:srgbClr val="333333"/>
+                </a:solidFill>
+                <a:latin typeface="맑은 고딕"/>
+                <a:ea typeface="맑은 고딕"/>
+                <a:cs typeface="맑은 고딕"/>
+              </a:rPr>
+              <a:t>·, </a:t>
+            </a:r>
+            <a:r>
+              <a:rPr sz="1600" b="0" i="0" dirty="0" err="1">
+                <a:solidFill>
+                  <a:srgbClr val="333333"/>
+                </a:solidFill>
+                <a:latin typeface="맑은 고딕"/>
+                <a:ea typeface="맑은 고딕"/>
+                <a:cs typeface="맑은 고딕"/>
+              </a:rPr>
+              <a:t>사용자</a:t>
+            </a:r>
+            <a:r>
+              <a:rPr sz="1600" b="0" i="0" dirty="0">
+                <a:solidFill>
+                  <a:srgbClr val="333333"/>
+                </a:solidFill>
+                <a:latin typeface="맑은 고딕"/>
+                <a:ea typeface="맑은 고딕"/>
+                <a:cs typeface="맑은 고딕"/>
+              </a:rPr>
+              <a:t> </a:t>
+            </a:r>
+            <a:r>
+              <a:rPr sz="1600" b="0" i="0" dirty="0" err="1">
+                <a:solidFill>
+                  <a:srgbClr val="333333"/>
+                </a:solidFill>
+                <a:latin typeface="맑은 고딕"/>
+                <a:ea typeface="맑은 고딕"/>
+                <a:cs typeface="맑은 고딕"/>
+              </a:rPr>
+              <a:t>테스트</a:t>
+            </a:r>
+            <a:endParaRPr sz="1600" b="0" i="0" dirty="0">
+              <a:solidFill>
+                <a:srgbClr val="333333"/>
+              </a:solidFill>
+              <a:latin typeface="맑은 고딕"/>
+              <a:ea typeface="맑은 고딕"/>
+              <a:cs typeface="맑은 고딕"/>
+            </a:endParaRPr>
           </a:p>
         </p:txBody>
       </p:sp>

--- a/참고파일/강의 컨텐츠 관리 시스템_박수연_박희용_260807.pptx
+++ b/참고파일/강의 컨텐츠 관리 시스템_박수연_박희용_260807.pptx
@@ -41,13 +41,13 @@
   <p:notesSz cx="6858000" cy="9144000"/>
   <p:embeddedFontLst>
     <p:embeddedFont>
-      <p:font typeface="Microsoft GothicNeo Light" panose="020B0300000101010101" pitchFamily="50" charset="-127"/>
+      <p:font typeface="Microsoft GothicNeo" panose="020B0500000101010101" pitchFamily="50" charset="-127"/>
       <p:regular r:id="rId31"/>
+      <p:bold r:id="rId32"/>
     </p:embeddedFont>
     <p:embeddedFont>
-      <p:font typeface="Microsoft GothicNeo" panose="020B0500000101010101" pitchFamily="50" charset="-127"/>
-      <p:regular r:id="rId32"/>
-      <p:bold r:id="rId33"/>
+      <p:font typeface="Microsoft GothicNeo Light" panose="020B0300000101010101" pitchFamily="50" charset="-127"/>
+      <p:regular r:id="rId33"/>
     </p:embeddedFont>
     <p:embeddedFont>
       <p:font typeface="맑은 고딕" panose="020B0503020000020004" pitchFamily="50" charset="-127"/>
@@ -29177,7 +29177,7 @@
             <a:r>
               <a:rPr lang="en-US" b="0" i="0" dirty="0">
                 <a:solidFill>
-                  <a:srgbClr val="595959"/>
+                  <a:srgbClr val="FF0000"/>
                 </a:solidFill>
                 <a:latin typeface="맑은 고딕"/>
                 <a:ea typeface="맑은 고딕"/>
@@ -29188,7 +29188,7 @@
             <a:r>
               <a:rPr lang="ko-KR" altLang="en-US" b="0" i="0" dirty="0">
                 <a:solidFill>
-                  <a:srgbClr val="595959"/>
+                  <a:srgbClr val="FF0000"/>
                 </a:solidFill>
                 <a:latin typeface="맑은 고딕"/>
                 <a:ea typeface="맑은 고딕"/>
@@ -29199,7 +29199,7 @@
             <a:r>
               <a:rPr lang="en-US" altLang="ko-KR" b="0" i="0" dirty="0">
                 <a:solidFill>
-                  <a:srgbClr val="595959"/>
+                  <a:srgbClr val="FF0000"/>
                 </a:solidFill>
                 <a:latin typeface="맑은 고딕"/>
                 <a:ea typeface="맑은 고딕"/>
@@ -29210,17 +29210,72 @@
             <a:r>
               <a:rPr lang="ko-KR" altLang="en-US" b="0" i="0" dirty="0">
                 <a:solidFill>
-                  <a:srgbClr val="595959"/>
+                  <a:srgbClr val="FF0000"/>
                 </a:solidFill>
                 <a:latin typeface="맑은 고딕"/>
                 <a:ea typeface="맑은 고딕"/>
                 <a:cs typeface="맑은 고딕"/>
               </a:rPr>
               <a:t>오류</a:t>
+            </a:r>
+            <a:r>
+              <a:rPr lang="en-US" altLang="ko-KR" b="0" i="0" dirty="0">
+                <a:solidFill>
+                  <a:srgbClr val="FF0000"/>
+                </a:solidFill>
+                <a:latin typeface="맑은 고딕"/>
+                <a:ea typeface="맑은 고딕"/>
+                <a:cs typeface="맑은 고딕"/>
+              </a:rPr>
+              <a:t>. </a:t>
+            </a:r>
+            <a:r>
+              <a:rPr lang="ko-KR" altLang="en-US" b="0" i="0" dirty="0">
+                <a:solidFill>
+                  <a:srgbClr val="FF0000"/>
+                </a:solidFill>
+                <a:latin typeface="맑은 고딕"/>
+                <a:ea typeface="맑은 고딕"/>
+                <a:cs typeface="맑은 고딕"/>
+              </a:rPr>
+              <a:t>이 메시지의 내용 기준으로 </a:t>
+            </a:r>
+            <a:r>
+              <a:rPr lang="ko-KR" altLang="en-US" b="0" i="0" dirty="0" err="1">
+                <a:solidFill>
+                  <a:srgbClr val="FF0000"/>
+                </a:solidFill>
+                <a:latin typeface="맑은 고딕"/>
+                <a:ea typeface="맑은 고딕"/>
+                <a:cs typeface="맑은 고딕"/>
+              </a:rPr>
+              <a:t>토큰량</a:t>
+            </a:r>
+            <a:r>
+              <a:rPr lang="ko-KR" altLang="en-US" b="0" i="0" dirty="0">
+                <a:solidFill>
+                  <a:srgbClr val="FF0000"/>
+                </a:solidFill>
+                <a:latin typeface="맑은 고딕"/>
+                <a:ea typeface="맑은 고딕"/>
+                <a:cs typeface="맑은 고딕"/>
+              </a:rPr>
+              <a:t> 확인</a:t>
+            </a:r>
+            <a:r>
+              <a:rPr lang="en-US" altLang="ko-KR" b="0" i="0" dirty="0">
+                <a:solidFill>
+                  <a:srgbClr val="FF0000"/>
+                </a:solidFill>
+                <a:latin typeface="맑은 고딕"/>
+                <a:ea typeface="맑은 고딕"/>
+                <a:cs typeface="맑은 고딕"/>
+              </a:rPr>
+              <a:t>.</a:t>
             </a:r>
             <a:endParaRPr b="0" i="0" dirty="0">
               <a:solidFill>
-                <a:srgbClr val="595959"/>
+                <a:srgbClr val="FF0000"/>
               </a:solidFill>
               <a:latin typeface="맑은 고딕"/>
               <a:ea typeface="맑은 고딕"/>
@@ -29947,8 +30002,8 @@
         </p:nvSpPr>
         <p:spPr>
           <a:xfrm>
-            <a:off x="3805245" y="3889244"/>
-            <a:ext cx="5029200" cy="430887"/>
+            <a:off x="3805244" y="3889244"/>
+            <a:ext cx="7838109" cy="215444"/>
           </a:xfrm>
           <a:prstGeom prst="rect">
             <a:avLst/>
@@ -29963,7 +30018,7 @@
           <a:p>
             <a:pPr algn="l"/>
             <a:r>
-              <a:rPr b="1" i="0">
+              <a:rPr b="1" i="0" dirty="0" err="1">
                 <a:solidFill>
                   <a:srgbClr val="3E9B6F"/>
                 </a:solidFill>
@@ -29971,19 +30026,225 @@
                 <a:ea typeface="맑은 고딕"/>
                 <a:cs typeface="맑은 고딕"/>
               </a:rPr>
-              <a:t>웹검색(파생 요약 재사용) — 수백 토큰 수준  </a:t>
-            </a:r>
-            <a:r>
-              <a:rPr b="0" i="0">
-                <a:solidFill>
-                  <a:srgbClr val="333333"/>
-                </a:solidFill>
-                <a:latin typeface="맑은 고딕"/>
-                <a:ea typeface="맑은 고딕"/>
-                <a:cs typeface="맑은 고딕"/>
-              </a:rPr>
-              <a:t>한도 내 · 429 미발생</a:t>
-            </a:r>
+              <a:t>웹검색</a:t>
+            </a:r>
+            <a:r>
+              <a:rPr b="1" i="0" dirty="0">
+                <a:solidFill>
+                  <a:srgbClr val="3E9B6F"/>
+                </a:solidFill>
+                <a:latin typeface="맑은 고딕"/>
+                <a:ea typeface="맑은 고딕"/>
+                <a:cs typeface="맑은 고딕"/>
+              </a:rPr>
+              <a:t>(</a:t>
+            </a:r>
+            <a:r>
+              <a:rPr b="1" i="0" dirty="0" err="1">
+                <a:solidFill>
+                  <a:srgbClr val="3E9B6F"/>
+                </a:solidFill>
+                <a:latin typeface="맑은 고딕"/>
+                <a:ea typeface="맑은 고딕"/>
+                <a:cs typeface="맑은 고딕"/>
+              </a:rPr>
+              <a:t>파생</a:t>
+            </a:r>
+            <a:r>
+              <a:rPr b="1" i="0" dirty="0">
+                <a:solidFill>
+                  <a:srgbClr val="3E9B6F"/>
+                </a:solidFill>
+                <a:latin typeface="맑은 고딕"/>
+                <a:ea typeface="맑은 고딕"/>
+                <a:cs typeface="맑은 고딕"/>
+              </a:rPr>
+              <a:t> </a:t>
+            </a:r>
+            <a:r>
+              <a:rPr b="1" i="0" dirty="0" err="1">
+                <a:solidFill>
+                  <a:srgbClr val="3E9B6F"/>
+                </a:solidFill>
+                <a:latin typeface="맑은 고딕"/>
+                <a:ea typeface="맑은 고딕"/>
+                <a:cs typeface="맑은 고딕"/>
+              </a:rPr>
+              <a:t>요약</a:t>
+            </a:r>
+            <a:r>
+              <a:rPr b="1" i="0" dirty="0">
+                <a:solidFill>
+                  <a:srgbClr val="3E9B6F"/>
+                </a:solidFill>
+                <a:latin typeface="맑은 고딕"/>
+                <a:ea typeface="맑은 고딕"/>
+                <a:cs typeface="맑은 고딕"/>
+              </a:rPr>
+              <a:t> </a:t>
+            </a:r>
+            <a:r>
+              <a:rPr b="1" i="0" dirty="0" err="1">
+                <a:solidFill>
+                  <a:srgbClr val="3E9B6F"/>
+                </a:solidFill>
+                <a:latin typeface="맑은 고딕"/>
+                <a:ea typeface="맑은 고딕"/>
+                <a:cs typeface="맑은 고딕"/>
+              </a:rPr>
+              <a:t>재사용</a:t>
+            </a:r>
+            <a:r>
+              <a:rPr b="1" i="0" dirty="0">
+                <a:solidFill>
+                  <a:srgbClr val="3E9B6F"/>
+                </a:solidFill>
+                <a:latin typeface="맑은 고딕"/>
+                <a:ea typeface="맑은 고딕"/>
+                <a:cs typeface="맑은 고딕"/>
+              </a:rPr>
+              <a:t>) — </a:t>
+            </a:r>
+            <a:r>
+              <a:rPr b="1" i="0" dirty="0" err="1">
+                <a:solidFill>
+                  <a:srgbClr val="3E9B6F"/>
+                </a:solidFill>
+                <a:latin typeface="맑은 고딕"/>
+                <a:ea typeface="맑은 고딕"/>
+                <a:cs typeface="맑은 고딕"/>
+              </a:rPr>
+              <a:t>수백</a:t>
+            </a:r>
+            <a:r>
+              <a:rPr b="1" i="0" dirty="0">
+                <a:solidFill>
+                  <a:srgbClr val="3E9B6F"/>
+                </a:solidFill>
+                <a:latin typeface="맑은 고딕"/>
+                <a:ea typeface="맑은 고딕"/>
+                <a:cs typeface="맑은 고딕"/>
+              </a:rPr>
+              <a:t> </a:t>
+            </a:r>
+            <a:r>
+              <a:rPr b="1" i="0" dirty="0" err="1">
+                <a:solidFill>
+                  <a:srgbClr val="3E9B6F"/>
+                </a:solidFill>
+                <a:latin typeface="맑은 고딕"/>
+                <a:ea typeface="맑은 고딕"/>
+                <a:cs typeface="맑은 고딕"/>
+              </a:rPr>
+              <a:t>토큰</a:t>
+            </a:r>
+            <a:r>
+              <a:rPr b="1" i="0" dirty="0">
+                <a:solidFill>
+                  <a:srgbClr val="3E9B6F"/>
+                </a:solidFill>
+                <a:latin typeface="맑은 고딕"/>
+                <a:ea typeface="맑은 고딕"/>
+                <a:cs typeface="맑은 고딕"/>
+              </a:rPr>
+              <a:t> </a:t>
+            </a:r>
+            <a:r>
+              <a:rPr b="1" i="0" dirty="0" err="1">
+                <a:solidFill>
+                  <a:srgbClr val="3E9B6F"/>
+                </a:solidFill>
+                <a:latin typeface="맑은 고딕"/>
+                <a:ea typeface="맑은 고딕"/>
+                <a:cs typeface="맑은 고딕"/>
+              </a:rPr>
+              <a:t>수준</a:t>
+            </a:r>
+            <a:r>
+              <a:rPr lang="en-US" b="1" i="0" dirty="0">
+                <a:solidFill>
+                  <a:srgbClr val="3E9B6F"/>
+                </a:solidFill>
+                <a:latin typeface="맑은 고딕"/>
+                <a:ea typeface="맑은 고딕"/>
+                <a:cs typeface="맑은 고딕"/>
+              </a:rPr>
+              <a:t> (</a:t>
+            </a:r>
+            <a:r>
+              <a:rPr lang="ko-KR" altLang="en-US" b="1" i="0" dirty="0">
+                <a:solidFill>
+                  <a:srgbClr val="3E9B6F"/>
+                </a:solidFill>
+                <a:latin typeface="맑은 고딕"/>
+                <a:ea typeface="맑은 고딕"/>
+                <a:cs typeface="맑은 고딕"/>
+              </a:rPr>
+              <a:t>입력 크기 기준 추정치</a:t>
+            </a:r>
+            <a:r>
+              <a:rPr lang="en-US" altLang="ko-KR" b="1" i="0" dirty="0">
+                <a:solidFill>
+                  <a:srgbClr val="3E9B6F"/>
+                </a:solidFill>
+                <a:latin typeface="맑은 고딕"/>
+                <a:ea typeface="맑은 고딕"/>
+                <a:cs typeface="맑은 고딕"/>
+              </a:rPr>
+              <a:t>)</a:t>
+            </a:r>
+            <a:r>
+              <a:rPr b="1" i="0" dirty="0">
+                <a:solidFill>
+                  <a:srgbClr val="3E9B6F"/>
+                </a:solidFill>
+                <a:latin typeface="맑은 고딕"/>
+                <a:ea typeface="맑은 고딕"/>
+                <a:cs typeface="맑은 고딕"/>
+              </a:rPr>
+              <a:t>  </a:t>
+            </a:r>
+            <a:r>
+              <a:rPr b="0" i="0" dirty="0" err="1">
+                <a:solidFill>
+                  <a:srgbClr val="333333"/>
+                </a:solidFill>
+                <a:latin typeface="맑은 고딕"/>
+                <a:ea typeface="맑은 고딕"/>
+                <a:cs typeface="맑은 고딕"/>
+              </a:rPr>
+              <a:t>한도</a:t>
+            </a:r>
+            <a:r>
+              <a:rPr b="0" i="0" dirty="0">
+                <a:solidFill>
+                  <a:srgbClr val="333333"/>
+                </a:solidFill>
+                <a:latin typeface="맑은 고딕"/>
+                <a:ea typeface="맑은 고딕"/>
+                <a:cs typeface="맑은 고딕"/>
+              </a:rPr>
+              <a:t> 내 · 429 </a:t>
+            </a:r>
+            <a:r>
+              <a:rPr b="0" i="0" dirty="0" err="1">
+                <a:solidFill>
+                  <a:srgbClr val="333333"/>
+                </a:solidFill>
+                <a:latin typeface="맑은 고딕"/>
+                <a:ea typeface="맑은 고딕"/>
+                <a:cs typeface="맑은 고딕"/>
+              </a:rPr>
+              <a:t>미발생</a:t>
+            </a:r>
+            <a:endParaRPr b="0" i="0" dirty="0">
+              <a:solidFill>
+                <a:srgbClr val="333333"/>
+              </a:solidFill>
+              <a:latin typeface="맑은 고딕"/>
+              <a:ea typeface="맑은 고딕"/>
+              <a:cs typeface="맑은 고딕"/>
+            </a:endParaRPr>
           </a:p>
         </p:txBody>
       </p:sp>
@@ -32405,7 +32666,40 @@
                 <a:ea typeface="Malgun Gothic" pitchFamily="34" charset="-122"/>
                 <a:cs typeface="Malgun Gothic" pitchFamily="34" charset="-120"/>
               </a:rPr>
-              <a:t>1.026초  —  에러가 알려준 대기 시간과 소수점까지 일치</a:t>
+              <a:t>1.026초  —  에러가 알려준 대기 </a:t>
+            </a:r>
+            <a:r>
+              <a:rPr lang="en-US" sz="1350" b="1" dirty="0" err="1">
+                <a:solidFill>
+                  <a:srgbClr val="3E9B6F"/>
+                </a:solidFill>
+                <a:latin typeface="Malgun Gothic" pitchFamily="34" charset="0"/>
+                <a:ea typeface="Malgun Gothic" pitchFamily="34" charset="-122"/>
+                <a:cs typeface="Malgun Gothic" pitchFamily="34" charset="-120"/>
+              </a:rPr>
+              <a:t>시간과</a:t>
+            </a:r>
+            <a:r>
+              <a:rPr lang="en-US" sz="1350" b="1" dirty="0">
+                <a:solidFill>
+                  <a:srgbClr val="3E9B6F"/>
+                </a:solidFill>
+                <a:latin typeface="Malgun Gothic" pitchFamily="34" charset="0"/>
+                <a:ea typeface="Malgun Gothic" pitchFamily="34" charset="-122"/>
+                <a:cs typeface="Malgun Gothic" pitchFamily="34" charset="-120"/>
+              </a:rPr>
+              <a:t> </a:t>
+            </a:r>
+            <a:r>
+              <a:rPr lang="en-US" sz="1350" b="1" dirty="0" err="1">
+                <a:solidFill>
+                  <a:srgbClr val="3E9B6F"/>
+                </a:solidFill>
+                <a:latin typeface="Malgun Gothic" pitchFamily="34" charset="0"/>
+                <a:ea typeface="Malgun Gothic" pitchFamily="34" charset="-122"/>
+                <a:cs typeface="Malgun Gothic" pitchFamily="34" charset="-120"/>
+              </a:rPr>
+              <a:t>일치</a:t>
             </a:r>
             <a:endParaRPr lang="en-US" sz="1350" dirty="0"/>
           </a:p>
